--- a/syllabus/27_requête_asynchrone/syllabus_27_async.pptx
+++ b/syllabus/27_requête_asynchrone/syllabus_27_async.pptx
@@ -5,7 +5,7 @@
     <p:sldMasterId id="2147483856" r:id="rId1"/>
   </p:sldMasterIdLst>
   <p:notesMasterIdLst>
-    <p:notesMasterId r:id="rId62"/>
+    <p:notesMasterId r:id="rId63"/>
   </p:notesMasterIdLst>
   <p:sldIdLst>
     <p:sldId id="256" r:id="rId2"/>
@@ -47,27 +47,28 @@
     <p:sldId id="606" r:id="rId38"/>
     <p:sldId id="607" r:id="rId39"/>
     <p:sldId id="608" r:id="rId40"/>
-    <p:sldId id="619" r:id="rId41"/>
-    <p:sldId id="609" r:id="rId42"/>
-    <p:sldId id="610" r:id="rId43"/>
-    <p:sldId id="632" r:id="rId44"/>
-    <p:sldId id="617" r:id="rId45"/>
-    <p:sldId id="615" r:id="rId46"/>
-    <p:sldId id="611" r:id="rId47"/>
-    <p:sldId id="612" r:id="rId48"/>
-    <p:sldId id="614" r:id="rId49"/>
-    <p:sldId id="616" r:id="rId50"/>
-    <p:sldId id="613" r:id="rId51"/>
-    <p:sldId id="618" r:id="rId52"/>
-    <p:sldId id="621" r:id="rId53"/>
-    <p:sldId id="622" r:id="rId54"/>
-    <p:sldId id="624" r:id="rId55"/>
-    <p:sldId id="625" r:id="rId56"/>
-    <p:sldId id="626" r:id="rId57"/>
-    <p:sldId id="631" r:id="rId58"/>
-    <p:sldId id="627" r:id="rId59"/>
-    <p:sldId id="630" r:id="rId60"/>
-    <p:sldId id="573" r:id="rId61"/>
+    <p:sldId id="648" r:id="rId41"/>
+    <p:sldId id="649" r:id="rId42"/>
+    <p:sldId id="609" r:id="rId43"/>
+    <p:sldId id="610" r:id="rId44"/>
+    <p:sldId id="632" r:id="rId45"/>
+    <p:sldId id="617" r:id="rId46"/>
+    <p:sldId id="615" r:id="rId47"/>
+    <p:sldId id="611" r:id="rId48"/>
+    <p:sldId id="612" r:id="rId49"/>
+    <p:sldId id="614" r:id="rId50"/>
+    <p:sldId id="616" r:id="rId51"/>
+    <p:sldId id="613" r:id="rId52"/>
+    <p:sldId id="618" r:id="rId53"/>
+    <p:sldId id="621" r:id="rId54"/>
+    <p:sldId id="622" r:id="rId55"/>
+    <p:sldId id="624" r:id="rId56"/>
+    <p:sldId id="625" r:id="rId57"/>
+    <p:sldId id="626" r:id="rId58"/>
+    <p:sldId id="631" r:id="rId59"/>
+    <p:sldId id="627" r:id="rId60"/>
+    <p:sldId id="630" r:id="rId61"/>
+    <p:sldId id="573" r:id="rId62"/>
   </p:sldIdLst>
   <p:sldSz cx="12192000" cy="6858000"/>
   <p:notesSz cx="6858000" cy="9144000"/>
@@ -227,7 +228,8 @@
             <p14:sldId id="606"/>
             <p14:sldId id="607"/>
             <p14:sldId id="608"/>
-            <p14:sldId id="619"/>
+            <p14:sldId id="648"/>
+            <p14:sldId id="649"/>
           </p14:sldIdLst>
         </p14:section>
         <p14:section name="Fetch + MVC" id="{1129707E-EE94-44A7-8E4E-5941D23A4362}">
@@ -390,7 +392,7 @@
           <a:p>
             <a:fld id="{FCE9742F-4DAE-47F5-9244-6ACC3985DD6B}" type="datetimeFigureOut">
               <a:rPr lang="fr-BE" smtClean="0"/>
-              <a:t>23-02-26</a:t>
+              <a:t>02-03-26</a:t>
             </a:fld>
             <a:endParaRPr lang="fr-BE"/>
           </a:p>
@@ -1448,7 +1450,7 @@
           <a:p>
             <a:fld id="{0E3842A0-1A3F-4998-8237-CE5EEE5DFDF0}" type="slidenum">
               <a:rPr lang="fr-BE" smtClean="0"/>
-              <a:t>60</a:t>
+              <a:t>61</a:t>
             </a:fld>
             <a:endParaRPr lang="fr-BE" dirty="0"/>
           </a:p>
@@ -1664,7 +1666,7 @@
           <a:p>
             <a:fld id="{F3953782-D06E-4853-BE3C-64C197273937}" type="datetimeFigureOut">
               <a:rPr lang="fr-BE" smtClean="0"/>
-              <a:t>23-02-26</a:t>
+              <a:t>02-03-26</a:t>
             </a:fld>
             <a:endParaRPr lang="fr-BE"/>
           </a:p>
@@ -3532,7 +3534,7 @@
           <a:p>
             <a:fld id="{F3953782-D06E-4853-BE3C-64C197273937}" type="datetimeFigureOut">
               <a:rPr lang="fr-BE" smtClean="0"/>
-              <a:t>23-02-26</a:t>
+              <a:t>02-03-26</a:t>
             </a:fld>
             <a:endParaRPr lang="fr-BE"/>
           </a:p>
@@ -3848,7 +3850,7 @@
           <a:p>
             <a:fld id="{F3953782-D06E-4853-BE3C-64C197273937}" type="datetimeFigureOut">
               <a:rPr lang="fr-BE" smtClean="0"/>
-              <a:t>23-02-26</a:t>
+              <a:t>02-03-26</a:t>
             </a:fld>
             <a:endParaRPr lang="fr-BE"/>
           </a:p>
@@ -4045,7 +4047,7 @@
           <a:p>
             <a:fld id="{F3953782-D06E-4853-BE3C-64C197273937}" type="datetimeFigureOut">
               <a:rPr lang="fr-BE" smtClean="0"/>
-              <a:t>23-02-26</a:t>
+              <a:t>02-03-26</a:t>
             </a:fld>
             <a:endParaRPr lang="fr-BE"/>
           </a:p>
@@ -4307,7 +4309,7 @@
           <a:p>
             <a:fld id="{F3953782-D06E-4853-BE3C-64C197273937}" type="datetimeFigureOut">
               <a:rPr lang="fr-BE" smtClean="0"/>
-              <a:t>23-02-26</a:t>
+              <a:t>02-03-26</a:t>
             </a:fld>
             <a:endParaRPr lang="fr-BE"/>
           </a:p>
@@ -4718,7 +4720,7 @@
           <a:p>
             <a:fld id="{F3953782-D06E-4853-BE3C-64C197273937}" type="datetimeFigureOut">
               <a:rPr lang="fr-BE" smtClean="0"/>
-              <a:t>23-02-26</a:t>
+              <a:t>02-03-26</a:t>
             </a:fld>
             <a:endParaRPr lang="fr-BE"/>
           </a:p>
@@ -4866,7 +4868,7 @@
           <a:p>
             <a:fld id="{F3953782-D06E-4853-BE3C-64C197273937}" type="datetimeFigureOut">
               <a:rPr lang="fr-BE" smtClean="0"/>
-              <a:t>23-02-26</a:t>
+              <a:t>02-03-26</a:t>
             </a:fld>
             <a:endParaRPr lang="fr-BE"/>
           </a:p>
@@ -5215,7 +5217,7 @@
           <a:p>
             <a:fld id="{F3953782-D06E-4853-BE3C-64C197273937}" type="datetimeFigureOut">
               <a:rPr lang="fr-BE" smtClean="0"/>
-              <a:t>23-02-26</a:t>
+              <a:t>02-03-26</a:t>
             </a:fld>
             <a:endParaRPr lang="fr-BE"/>
           </a:p>
@@ -5541,7 +5543,7 @@
           <a:p>
             <a:fld id="{F3953782-D06E-4853-BE3C-64C197273937}" type="datetimeFigureOut">
               <a:rPr lang="fr-BE" smtClean="0"/>
-              <a:t>23-02-26</a:t>
+              <a:t>02-03-26</a:t>
             </a:fld>
             <a:endParaRPr lang="fr-BE"/>
           </a:p>
@@ -6192,7 +6194,7 @@
         <p14:reveal/>
       </p:transition>
     </mc:Choice>
-    <mc:Fallback xmlns:ahyp="http://schemas.microsoft.com/office/drawing/2018/hyperlinkcolor" xmlns:p15="http://schemas.microsoft.com/office/powerpoint/2012/main" xmlns:com="http://schemas.openxmlformats.org/drawingml/2006/compatibility" xmlns:pvml="urn:schemas-microsoft-com:office:powerpoint" xmlns:v="urn:schemas-microsoft-com:vml" xmlns:o="urn:schemas-microsoft-com:office:office" xmlns:dgm="http://schemas.openxmlformats.org/drawingml/2006/diagram" xmlns:c="http://schemas.openxmlformats.org/drawingml/2006/chart" xmlns:mv="urn:schemas-microsoft-com:mac:vml" xmlns="">
+    <mc:Fallback xmlns="" xmlns:mv="urn:schemas-microsoft-com:mac:vml" xmlns:c="http://schemas.openxmlformats.org/drawingml/2006/chart" xmlns:dgm="http://schemas.openxmlformats.org/drawingml/2006/diagram" xmlns:o="urn:schemas-microsoft-com:office:office" xmlns:v="urn:schemas-microsoft-com:vml" xmlns:pvml="urn:schemas-microsoft-com:office:powerpoint" xmlns:com="http://schemas.openxmlformats.org/drawingml/2006/compatibility" xmlns:p15="http://schemas.microsoft.com/office/powerpoint/2012/main" xmlns:ahyp="http://schemas.microsoft.com/office/drawing/2018/hyperlinkcolor">
       <p:transition spd="med">
         <p:fade/>
       </p:transition>
@@ -6484,7 +6486,7 @@
           <a:p>
             <a:fld id="{1E5DF2A6-70B6-40A7-989A-34759E4806B0}" type="datetime1">
               <a:rPr lang="fr-BE" smtClean="0"/>
-              <a:t>23-02-26</a:t>
+              <a:t>02-03-26</a:t>
             </a:fld>
             <a:endParaRPr lang="fr-BE"/>
           </a:p>
@@ -6755,7 +6757,7 @@
           <a:p>
             <a:fld id="{D8C58C02-2470-452C-8FD7-48D2369607DA}" type="datetime1">
               <a:rPr lang="fr-BE" smtClean="0"/>
-              <a:t>23-02-26</a:t>
+              <a:t>02-03-26</a:t>
             </a:fld>
             <a:endParaRPr lang="fr-BE"/>
           </a:p>
@@ -7085,7 +7087,7 @@
           <a:p>
             <a:fld id="{5A7E6BF1-684C-4CDC-B855-2D4466F5C157}" type="datetime1">
               <a:rPr lang="fr-BE" smtClean="0"/>
-              <a:t>23-02-26</a:t>
+              <a:t>02-03-26</a:t>
             </a:fld>
             <a:endParaRPr lang="fr-BE"/>
           </a:p>
@@ -7483,7 +7485,7 @@
           <a:p>
             <a:fld id="{EC6CA901-155B-4352-AD5E-7C239337D48D}" type="datetime1">
               <a:rPr lang="fr-BE" smtClean="0"/>
-              <a:t>23-02-26</a:t>
+              <a:t>02-03-26</a:t>
             </a:fld>
             <a:endParaRPr lang="fr-BE"/>
           </a:p>
@@ -7639,7 +7641,7 @@
           <a:p>
             <a:fld id="{47EA6130-C364-45FF-ADCC-7D6C28140105}" type="datetime1">
               <a:rPr lang="fr-BE" smtClean="0"/>
-              <a:t>23-02-26</a:t>
+              <a:t>02-03-26</a:t>
             </a:fld>
             <a:endParaRPr lang="fr-BE"/>
           </a:p>
@@ -9880,7 +9882,7 @@
         <p14:reveal/>
       </p:transition>
     </mc:Choice>
-    <mc:Fallback xmlns="" xmlns:mv="urn:schemas-microsoft-com:mac:vml" xmlns:c="http://schemas.openxmlformats.org/drawingml/2006/chart" xmlns:dgm="http://schemas.openxmlformats.org/drawingml/2006/diagram" xmlns:o="urn:schemas-microsoft-com:office:office" xmlns:v="urn:schemas-microsoft-com:vml" xmlns:pvml="urn:schemas-microsoft-com:office:powerpoint" xmlns:com="http://schemas.openxmlformats.org/drawingml/2006/compatibility" xmlns:p15="http://schemas.microsoft.com/office/powerpoint/2012/main" xmlns:ahyp="http://schemas.microsoft.com/office/drawing/2018/hyperlinkcolor">
+    <mc:Fallback xmlns:ahyp="http://schemas.microsoft.com/office/drawing/2018/hyperlinkcolor" xmlns:p15="http://schemas.microsoft.com/office/powerpoint/2012/main" xmlns:com="http://schemas.openxmlformats.org/drawingml/2006/compatibility" xmlns:pvml="urn:schemas-microsoft-com:office:powerpoint" xmlns:v="urn:schemas-microsoft-com:vml" xmlns:o="urn:schemas-microsoft-com:office:office" xmlns:dgm="http://schemas.openxmlformats.org/drawingml/2006/diagram" xmlns:c="http://schemas.openxmlformats.org/drawingml/2006/chart" xmlns:mv="urn:schemas-microsoft-com:mac:vml" xmlns="">
       <p:transition spd="med">
         <p:fade/>
       </p:transition>
@@ -16256,7 +16258,7 @@
           <a:p>
             <a:fld id="{47EA6130-C364-45FF-ADCC-7D6C28140105}" type="datetime1">
               <a:rPr lang="fr-BE" smtClean="0"/>
-              <a:t>23-02-26</a:t>
+              <a:t>02-03-26</a:t>
             </a:fld>
             <a:endParaRPr lang="fr-BE"/>
           </a:p>
@@ -19517,7 +19519,7 @@
           <a:p>
             <a:fld id="{5F3F1EAC-2519-4A97-BA21-1B73D8FEBD2F}" type="datetime1">
               <a:rPr lang="fr-BE" smtClean="0"/>
-              <a:t>23-02-26</a:t>
+              <a:t>02-03-26</a:t>
             </a:fld>
             <a:endParaRPr lang="fr-BE"/>
           </a:p>
@@ -19582,7 +19584,13 @@
   <p:cSld>
     <p:spTree>
       <p:nvGrpSpPr>
-        <p:cNvPr id="1" name=""/>
+        <p:cNvPr id="1" name="">
+          <a:extLst>
+            <a:ext uri="{FF2B5EF4-FFF2-40B4-BE49-F238E27FC236}">
+              <a16:creationId xmlns:a16="http://schemas.microsoft.com/office/drawing/2014/main" id="{5F6D2ECE-BEB3-9F40-145C-AD17C3B548E8}"/>
+            </a:ext>
+          </a:extLst>
+        </p:cNvPr>
         <p:cNvGrpSpPr/>
         <p:nvPr/>
       </p:nvGrpSpPr>
@@ -19599,7 +19607,7 @@
           <p:cNvPr id="2" name="Titre 1">
             <a:extLst>
               <a:ext uri="{FF2B5EF4-FFF2-40B4-BE49-F238E27FC236}">
-                <a16:creationId xmlns:a16="http://schemas.microsoft.com/office/drawing/2014/main" id="{B78E30EF-D140-62A9-CCBE-1489C33F3223}"/>
+                <a16:creationId xmlns:a16="http://schemas.microsoft.com/office/drawing/2014/main" id="{AF858465-A555-D23D-A3B8-39BFEFE64FEC}"/>
               </a:ext>
             </a:extLst>
           </p:cNvPr>
@@ -19612,34 +19620,14 @@
         </p:nvSpPr>
         <p:spPr/>
         <p:txBody>
-          <a:bodyPr/>
+          <a:bodyPr>
+            <a:normAutofit/>
+          </a:bodyPr>
           <a:lstStyle/>
           <a:p>
             <a:r>
               <a:rPr lang="fr-BE"/>
-              <a:t>Remarque sur </a:t>
-            </a:r>
-            <a:r>
-              <a:rPr lang="fr-BE" b="0">
-                <a:solidFill>
-                  <a:srgbClr val="996633"/>
-                </a:solidFill>
-                <a:latin typeface="Consolas" panose="020B0609020204030204" pitchFamily="49" charset="0"/>
-              </a:rPr>
-              <a:t>header</a:t>
-            </a:r>
-            <a:r>
-              <a:rPr lang="fr-BE"/>
-              <a:t> et </a:t>
-            </a:r>
-            <a:r>
-              <a:rPr lang="fr-BE" b="0">
-                <a:solidFill>
-                  <a:srgbClr val="996633"/>
-                </a:solidFill>
-                <a:latin typeface="Consolas" panose="020B0609020204030204" pitchFamily="49" charset="0"/>
-              </a:rPr>
-              <a:t>body</a:t>
+              <a:t>Envoyer les params au serveur : 2 méthodes</a:t>
             </a:r>
           </a:p>
         </p:txBody>
@@ -19649,7 +19637,7 @@
           <p:cNvPr id="3" name="Espace réservé du contenu 2">
             <a:extLst>
               <a:ext uri="{FF2B5EF4-FFF2-40B4-BE49-F238E27FC236}">
-                <a16:creationId xmlns:a16="http://schemas.microsoft.com/office/drawing/2014/main" id="{7032FD49-F1D6-7214-5915-AD1DB42E7D8D}"/>
+                <a16:creationId xmlns:a16="http://schemas.microsoft.com/office/drawing/2014/main" id="{08551DE3-A7D5-7AED-723F-677DDB054F5E}"/>
               </a:ext>
             </a:extLst>
           </p:cNvPr>
@@ -19667,283 +19655,272 @@
           </a:bodyPr>
           <a:lstStyle/>
           <a:p>
+            <a:pPr marL="0" indent="0">
+              <a:lnSpc>
+                <a:spcPct val="100000"/>
+              </a:lnSpc>
+              <a:buNone/>
+            </a:pPr>
+            <a:r>
+              <a:rPr lang="fr-BE">
+                <a:solidFill>
+                  <a:schemeClr val="accent2"/>
+                </a:solidFill>
+              </a:rPr>
+              <a:t>Chaîne de requête URL-encodée</a:t>
+            </a:r>
+          </a:p>
+          <a:p>
+            <a:pPr>
+              <a:lnSpc>
+                <a:spcPct val="100000"/>
+              </a:lnSpc>
+            </a:pPr>
             <a:r>
               <a:rPr lang="fr-BE"/>
-              <a:t>Deux méthodes pour envoyer les params au serveur </a:t>
-            </a:r>
-          </a:p>
-          <a:p>
+              <a:t>API traditionnel : </a:t>
+            </a:r>
+            <a:r>
+              <a:rPr lang="fr-BE" sz="3200">
+                <a:solidFill>
+                  <a:srgbClr val="996633"/>
+                </a:solidFill>
+                <a:latin typeface="Consolas" panose="020B0609020204030204" pitchFamily="49" charset="0"/>
+              </a:rPr>
+              <a:t>clé1=valeur1&amp;clé2=valeur2</a:t>
+            </a:r>
+            <a:endParaRPr lang="fr-BE">
+              <a:solidFill>
+                <a:schemeClr val="accent2"/>
+              </a:solidFill>
+            </a:endParaRPr>
+          </a:p>
+          <a:p>
+            <a:pPr>
+              <a:lnSpc>
+                <a:spcPct val="100000"/>
+              </a:lnSpc>
+            </a:pPr>
             <a:r>
               <a:rPr lang="fr-BE"/>
-              <a:t>chaîne de requête URL-encodée</a:t>
-            </a:r>
-          </a:p>
-          <a:p>
-            <a:pPr lvl="1"/>
-            <a:r>
-              <a:rPr lang="fr-BE"/>
-              <a:t>méthode traditionnelle : </a:t>
-            </a:r>
-            <a:r>
-              <a:rPr lang="fr-BE">
+              <a:t>Côté client</a:t>
+            </a:r>
+          </a:p>
+          <a:p>
+            <a:pPr marL="457189" lvl="1" indent="0" defTabSz="361950">
+              <a:lnSpc>
+                <a:spcPct val="100000"/>
+              </a:lnSpc>
+              <a:spcBef>
+                <a:spcPts val="0"/>
+              </a:spcBef>
+              <a:buNone/>
+            </a:pPr>
+            <a:r>
+              <a:rPr lang="fr-BE" sz="2400">
                 <a:solidFill>
                   <a:srgbClr val="996633"/>
                 </a:solidFill>
                 <a:latin typeface="Consolas" panose="020B0609020204030204" pitchFamily="49" charset="0"/>
               </a:rPr>
-              <a:t>clé1=valeur1&amp;clé2=valeur2</a:t>
-            </a:r>
-          </a:p>
-          <a:p>
-            <a:pPr lvl="1" defTabSz="361950">
+              <a:t>headers : {</a:t>
+            </a:r>
+            <a:br>
+              <a:rPr lang="fr-BE" sz="2400">
+                <a:solidFill>
+                  <a:srgbClr val="996633"/>
+                </a:solidFill>
+                <a:latin typeface="Consolas" panose="020B0609020204030204" pitchFamily="49" charset="0"/>
+              </a:rPr>
+            </a:br>
+            <a:r>
+              <a:rPr lang="fr-BE" sz="2400">
+                <a:solidFill>
+                  <a:srgbClr val="996633"/>
+                </a:solidFill>
+                <a:latin typeface="Consolas" panose="020B0609020204030204" pitchFamily="49" charset="0"/>
+              </a:rPr>
+              <a:t>		'Content-Type': 'application/</a:t>
+            </a:r>
+            <a:r>
+              <a:rPr lang="fr-BE" sz="2400">
+                <a:solidFill>
+                  <a:schemeClr val="accent2"/>
+                </a:solidFill>
+                <a:latin typeface="Consolas" panose="020B0609020204030204" pitchFamily="49" charset="0"/>
+              </a:rPr>
+              <a:t>x-www-form-urlencoded</a:t>
+            </a:r>
+            <a:r>
+              <a:rPr lang="fr-BE" sz="2400">
+                <a:solidFill>
+                  <a:srgbClr val="996633"/>
+                </a:solidFill>
+                <a:latin typeface="Consolas" panose="020B0609020204030204" pitchFamily="49" charset="0"/>
+              </a:rPr>
+              <a:t>',</a:t>
+            </a:r>
+            <a:br>
+              <a:rPr lang="fr-BE" sz="2400">
+                <a:solidFill>
+                  <a:srgbClr val="996633"/>
+                </a:solidFill>
+                <a:latin typeface="Consolas" panose="020B0609020204030204" pitchFamily="49" charset="0"/>
+              </a:rPr>
+            </a:br>
+            <a:r>
+              <a:rPr lang="fr-BE" sz="2400">
+                <a:solidFill>
+                  <a:srgbClr val="996633"/>
+                </a:solidFill>
+                <a:latin typeface="Consolas" panose="020B0609020204030204" pitchFamily="49" charset="0"/>
+              </a:rPr>
+              <a:t>},</a:t>
+            </a:r>
+            <a:br>
+              <a:rPr lang="fr-BE" sz="2400">
+                <a:solidFill>
+                  <a:srgbClr val="996633"/>
+                </a:solidFill>
+                <a:latin typeface="Consolas" panose="020B0609020204030204" pitchFamily="49" charset="0"/>
+              </a:rPr>
+            </a:br>
+            <a:r>
+              <a:rPr lang="en-US" sz="2400">
+                <a:solidFill>
+                  <a:srgbClr val="996633"/>
+                </a:solidFill>
+                <a:latin typeface="Consolas" panose="020B0609020204030204" pitchFamily="49" charset="0"/>
+              </a:rPr>
+              <a:t>body: </a:t>
+            </a:r>
+            <a:r>
+              <a:rPr lang="en-US" sz="2400">
+                <a:solidFill>
+                  <a:schemeClr val="accent5"/>
+                </a:solidFill>
+                <a:latin typeface="Consolas" panose="020B0609020204030204" pitchFamily="49" charset="0"/>
+              </a:rPr>
+              <a:t>new URLSearchParams(param).toString()</a:t>
+            </a:r>
+            <a:r>
+              <a:rPr lang="en-US" sz="2400">
+                <a:solidFill>
+                  <a:srgbClr val="996633"/>
+                </a:solidFill>
+                <a:latin typeface="Consolas" panose="020B0609020204030204" pitchFamily="49" charset="0"/>
+              </a:rPr>
+              <a:t>,</a:t>
+            </a:r>
+          </a:p>
+          <a:p>
+            <a:pPr defTabSz="361950">
+              <a:lnSpc>
+                <a:spcPct val="100000"/>
+              </a:lnSpc>
               <a:spcBef>
                 <a:spcPts val="0"/>
               </a:spcBef>
             </a:pPr>
             <a:r>
-              <a:rPr lang="fr-BE" sz="2400">
-                <a:solidFill>
-                  <a:srgbClr val="996633"/>
-                </a:solidFill>
-                <a:latin typeface="Consolas" panose="020B0609020204030204" pitchFamily="49" charset="0"/>
-              </a:rPr>
-              <a:t>headers : {</a:t>
-            </a:r>
-            <a:br>
-              <a:rPr lang="fr-BE" sz="2400">
-                <a:solidFill>
-                  <a:srgbClr val="996633"/>
-                </a:solidFill>
-                <a:latin typeface="Consolas" panose="020B0609020204030204" pitchFamily="49" charset="0"/>
-              </a:rPr>
-            </a:br>
-            <a:r>
-              <a:rPr lang="fr-BE" sz="2400">
-                <a:solidFill>
-                  <a:srgbClr val="996633"/>
-                </a:solidFill>
-                <a:latin typeface="Consolas" panose="020B0609020204030204" pitchFamily="49" charset="0"/>
-              </a:rPr>
-              <a:t>		'Content-Type': 'application/</a:t>
-            </a:r>
-            <a:r>
-              <a:rPr lang="fr-BE" sz="2400">
-                <a:solidFill>
-                  <a:schemeClr val="accent2"/>
-                </a:solidFill>
-                <a:latin typeface="Consolas" panose="020B0609020204030204" pitchFamily="49" charset="0"/>
-              </a:rPr>
-              <a:t>x-www-form-urlencoded</a:t>
-            </a:r>
-            <a:r>
-              <a:rPr lang="fr-BE" sz="2400">
-                <a:solidFill>
-                  <a:srgbClr val="996633"/>
-                </a:solidFill>
-                <a:latin typeface="Consolas" panose="020B0609020204030204" pitchFamily="49" charset="0"/>
-              </a:rPr>
-              <a:t>',</a:t>
-            </a:r>
-            <a:br>
-              <a:rPr lang="fr-BE" sz="2400">
-                <a:solidFill>
-                  <a:srgbClr val="996633"/>
-                </a:solidFill>
-                <a:latin typeface="Consolas" panose="020B0609020204030204" pitchFamily="49" charset="0"/>
-              </a:rPr>
-            </a:br>
-            <a:r>
-              <a:rPr lang="fr-BE" sz="2400">
-                <a:solidFill>
-                  <a:srgbClr val="996633"/>
-                </a:solidFill>
-                <a:latin typeface="Consolas" panose="020B0609020204030204" pitchFamily="49" charset="0"/>
-              </a:rPr>
-              <a:t>},</a:t>
-            </a:r>
-            <a:br>
-              <a:rPr lang="fr-BE" sz="2400">
-                <a:solidFill>
-                  <a:srgbClr val="996633"/>
-                </a:solidFill>
-                <a:latin typeface="Consolas" panose="020B0609020204030204" pitchFamily="49" charset="0"/>
-              </a:rPr>
-            </a:br>
-            <a:r>
-              <a:rPr lang="en-US" sz="2400">
-                <a:solidFill>
-                  <a:srgbClr val="996633"/>
-                </a:solidFill>
-                <a:latin typeface="Consolas" panose="020B0609020204030204" pitchFamily="49" charset="0"/>
-              </a:rPr>
-              <a:t>body: </a:t>
-            </a:r>
-            <a:r>
-              <a:rPr lang="en-US" sz="2400">
-                <a:solidFill>
-                  <a:schemeClr val="accent5"/>
-                </a:solidFill>
-                <a:latin typeface="Consolas" panose="020B0609020204030204" pitchFamily="49" charset="0"/>
-              </a:rPr>
-              <a:t>new URLSearchParams(param).toString()</a:t>
-            </a:r>
-            <a:r>
-              <a:rPr lang="en-US" sz="2400">
-                <a:solidFill>
-                  <a:srgbClr val="996633"/>
-                </a:solidFill>
-                <a:latin typeface="Consolas" panose="020B0609020204030204" pitchFamily="49" charset="0"/>
-              </a:rPr>
-              <a:t>,</a:t>
-            </a:r>
-            <a:endParaRPr lang="fr-BE" sz="2400">
-              <a:solidFill>
-                <a:srgbClr val="996633"/>
-              </a:solidFill>
-              <a:latin typeface="Consolas" panose="020B0609020204030204" pitchFamily="49" charset="0"/>
-            </a:endParaRPr>
-          </a:p>
-          <a:p>
-            <a:pPr defTabSz="361950">
+              <a:rPr lang="en-US"/>
+              <a:t>Côté serveur </a:t>
+            </a:r>
+          </a:p>
+          <a:p>
+            <a:pPr lvl="1" defTabSz="361950">
+              <a:lnSpc>
+                <a:spcPct val="100000"/>
+              </a:lnSpc>
               <a:spcBef>
                 <a:spcPts val="0"/>
               </a:spcBef>
             </a:pPr>
             <a:r>
-              <a:rPr lang="fr-BE"/>
-              <a:t>JSON</a:t>
+              <a:rPr lang="en-US"/>
+              <a:t>Utilisation classique de </a:t>
+            </a:r>
+            <a:r>
+              <a:rPr lang="en-US">
+                <a:solidFill>
+                  <a:srgbClr val="996633"/>
+                </a:solidFill>
+                <a:latin typeface="Consolas" panose="020B0609020204030204" pitchFamily="49" charset="0"/>
+              </a:rPr>
+              <a:t>$_GET</a:t>
+            </a:r>
+            <a:r>
+              <a:rPr lang="en-US"/>
+              <a:t> ou </a:t>
+            </a:r>
+            <a:r>
+              <a:rPr lang="en-US">
+                <a:solidFill>
+                  <a:srgbClr val="996633"/>
+                </a:solidFill>
+                <a:latin typeface="Consolas" panose="020B0609020204030204" pitchFamily="49" charset="0"/>
+              </a:rPr>
+              <a:t>$_POST</a:t>
             </a:r>
           </a:p>
           <a:p>
             <a:pPr lvl="1" defTabSz="361950">
+              <a:lnSpc>
+                <a:spcPct val="100000"/>
+              </a:lnSpc>
               <a:spcBef>
                 <a:spcPts val="0"/>
               </a:spcBef>
             </a:pPr>
             <a:r>
-              <a:rPr lang="fr-BE"/>
-              <a:t>API REST modernes</a:t>
-            </a:r>
-          </a:p>
-          <a:p>
-            <a:pPr lvl="1" defTabSz="361950">
+              <a:rPr lang="en-US"/>
+              <a:t>Réponse : soit </a:t>
+            </a:r>
+            <a:r>
+              <a:rPr lang="en-US">
+                <a:solidFill>
+                  <a:srgbClr val="996633"/>
+                </a:solidFill>
+                <a:latin typeface="Consolas" panose="020B0609020204030204" pitchFamily="49" charset="0"/>
+              </a:rPr>
+              <a:t>HTML</a:t>
+            </a:r>
+            <a:r>
+              <a:rPr lang="en-US"/>
+              <a:t> soit données (</a:t>
+            </a:r>
+            <a:r>
+              <a:rPr lang="en-US">
+                <a:solidFill>
+                  <a:srgbClr val="996633"/>
+                </a:solidFill>
+                <a:latin typeface="Consolas" panose="020B0609020204030204" pitchFamily="49" charset="0"/>
+              </a:rPr>
+              <a:t>JSON</a:t>
+            </a:r>
+            <a:r>
+              <a:rPr lang="en-US"/>
+              <a:t>)</a:t>
+            </a:r>
+            <a:endParaRPr lang="fr-BE"/>
+          </a:p>
+          <a:p>
+            <a:pPr marL="457189" lvl="1" indent="0" defTabSz="361950">
+              <a:lnSpc>
+                <a:spcPct val="100000"/>
+              </a:lnSpc>
               <a:spcBef>
                 <a:spcPts val="0"/>
               </a:spcBef>
-            </a:pPr>
-            <a:r>
-              <a:rPr lang="fr-BE" sz="2400">
-                <a:solidFill>
-                  <a:srgbClr val="996633"/>
-                </a:solidFill>
-                <a:latin typeface="Consolas" panose="020B0609020204030204" pitchFamily="49" charset="0"/>
-              </a:rPr>
-              <a:t>headers : {</a:t>
-            </a:r>
-            <a:br>
-              <a:rPr lang="fr-BE" sz="2400">
-                <a:solidFill>
-                  <a:srgbClr val="996633"/>
-                </a:solidFill>
-                <a:latin typeface="Consolas" panose="020B0609020204030204" pitchFamily="49" charset="0"/>
-              </a:rPr>
-            </a:br>
-            <a:r>
-              <a:rPr lang="fr-BE" sz="2400">
-                <a:solidFill>
-                  <a:srgbClr val="996633"/>
-                </a:solidFill>
-                <a:latin typeface="Consolas" panose="020B0609020204030204" pitchFamily="49" charset="0"/>
-              </a:rPr>
-              <a:t>		'Content-Type': 'application/</a:t>
-            </a:r>
-            <a:r>
-              <a:rPr lang="fr-BE" sz="2400">
-                <a:solidFill>
-                  <a:schemeClr val="accent2"/>
-                </a:solidFill>
-                <a:latin typeface="Consolas" panose="020B0609020204030204" pitchFamily="49" charset="0"/>
-              </a:rPr>
-              <a:t>json</a:t>
-            </a:r>
-            <a:r>
-              <a:rPr lang="fr-BE" sz="2400">
-                <a:solidFill>
-                  <a:srgbClr val="996633"/>
-                </a:solidFill>
-                <a:latin typeface="Consolas" panose="020B0609020204030204" pitchFamily="49" charset="0"/>
-              </a:rPr>
-              <a:t>',</a:t>
-            </a:r>
-            <a:br>
-              <a:rPr lang="fr-BE" sz="2400">
-                <a:solidFill>
-                  <a:srgbClr val="996633"/>
-                </a:solidFill>
-                <a:latin typeface="Consolas" panose="020B0609020204030204" pitchFamily="49" charset="0"/>
-              </a:rPr>
-            </a:br>
-            <a:r>
-              <a:rPr lang="fr-BE" sz="2400">
-                <a:solidFill>
-                  <a:srgbClr val="996633"/>
-                </a:solidFill>
-                <a:latin typeface="Consolas" panose="020B0609020204030204" pitchFamily="49" charset="0"/>
-              </a:rPr>
-              <a:t>},</a:t>
-            </a:r>
-            <a:br>
-              <a:rPr lang="fr-BE" sz="2400">
-                <a:solidFill>
-                  <a:srgbClr val="996633"/>
-                </a:solidFill>
-                <a:latin typeface="Consolas" panose="020B0609020204030204" pitchFamily="49" charset="0"/>
-              </a:rPr>
-            </a:br>
-            <a:r>
-              <a:rPr lang="en-US" sz="2400">
-                <a:solidFill>
-                  <a:srgbClr val="996633"/>
-                </a:solidFill>
-                <a:latin typeface="Consolas" panose="020B0609020204030204" pitchFamily="49" charset="0"/>
-              </a:rPr>
-              <a:t>body: </a:t>
-            </a:r>
-            <a:r>
-              <a:rPr lang="en-US" sz="2400">
-                <a:solidFill>
-                  <a:schemeClr val="accent5"/>
-                </a:solidFill>
-                <a:latin typeface="Consolas" panose="020B0609020204030204" pitchFamily="49" charset="0"/>
-              </a:rPr>
-              <a:t>JSON.stringify(param)</a:t>
-            </a:r>
-            <a:r>
-              <a:rPr lang="en-US" sz="2400">
-                <a:solidFill>
-                  <a:srgbClr val="996633"/>
-                </a:solidFill>
-                <a:latin typeface="Consolas" panose="020B0609020204030204" pitchFamily="49" charset="0"/>
-              </a:rPr>
-              <a:t>,</a:t>
-            </a:r>
-            <a:endParaRPr lang="fr-BE" sz="2400">
-              <a:solidFill>
-                <a:srgbClr val="996633"/>
-              </a:solidFill>
-              <a:latin typeface="Consolas" panose="020B0609020204030204" pitchFamily="49" charset="0"/>
-            </a:endParaRPr>
-          </a:p>
-          <a:p>
-            <a:pPr lvl="1" defTabSz="361950">
-              <a:spcBef>
-                <a:spcPts val="0"/>
-              </a:spcBef>
+              <a:buNone/>
             </a:pPr>
             <a:endParaRPr lang="fr-BE"/>
           </a:p>
           <a:p>
             <a:pPr lvl="1" defTabSz="361950">
+              <a:lnSpc>
+                <a:spcPct val="100000"/>
+              </a:lnSpc>
               <a:spcBef>
                 <a:spcPts val="0"/>
               </a:spcBef>
@@ -19956,7 +19933,11 @@
             </a:endParaRPr>
           </a:p>
           <a:p>
-            <a:pPr lvl="1"/>
+            <a:pPr lvl="1">
+              <a:lnSpc>
+                <a:spcPct val="100000"/>
+              </a:lnSpc>
+            </a:pPr>
             <a:endParaRPr lang="fr-BE">
               <a:solidFill>
                 <a:srgbClr val="996633"/>
@@ -19965,6 +19946,11 @@
             </a:endParaRPr>
           </a:p>
           <a:p>
+            <a:pPr>
+              <a:lnSpc>
+                <a:spcPct val="100000"/>
+              </a:lnSpc>
+            </a:pPr>
             <a:endParaRPr lang="fr-BE"/>
           </a:p>
         </p:txBody>
@@ -19974,7 +19960,7 @@
           <p:cNvPr id="4" name="Espace réservé de la date 3">
             <a:extLst>
               <a:ext uri="{FF2B5EF4-FFF2-40B4-BE49-F238E27FC236}">
-                <a16:creationId xmlns:a16="http://schemas.microsoft.com/office/drawing/2014/main" id="{1B7D458C-0DC8-CB7E-F468-F8C2F7876FD9}"/>
+                <a16:creationId xmlns:a16="http://schemas.microsoft.com/office/drawing/2014/main" id="{C0E35AA1-BE26-4011-65F1-D81CD4D8EE55}"/>
               </a:ext>
             </a:extLst>
           </p:cNvPr>
@@ -19992,7 +19978,7 @@
           <a:p>
             <a:fld id="{86F765DB-6413-4EEF-AA4B-13CECBA56D16}" type="datetime1">
               <a:rPr lang="fr-BE" smtClean="0"/>
-              <a:t>23-02-26</a:t>
+              <a:t>02-03-26</a:t>
             </a:fld>
             <a:endParaRPr lang="fr-BE"/>
           </a:p>
@@ -20003,7 +19989,7 @@
           <p:cNvPr id="5" name="Espace réservé du numéro de diapositive 4">
             <a:extLst>
               <a:ext uri="{FF2B5EF4-FFF2-40B4-BE49-F238E27FC236}">
-                <a16:creationId xmlns:a16="http://schemas.microsoft.com/office/drawing/2014/main" id="{86A887B4-676E-104D-52E0-6579BC8B9957}"/>
+                <a16:creationId xmlns:a16="http://schemas.microsoft.com/office/drawing/2014/main" id="{2F62FC29-BB51-9974-7203-D24A1E903371}"/>
               </a:ext>
             </a:extLst>
           </p:cNvPr>
@@ -20030,20 +20016,20 @@
     </p:spTree>
     <p:extLst>
       <p:ext uri="{BB962C8B-B14F-4D97-AF65-F5344CB8AC3E}">
-        <p14:creationId xmlns:p14="http://schemas.microsoft.com/office/powerpoint/2010/main" val="3387476806"/>
+        <p14:creationId xmlns:p14="http://schemas.microsoft.com/office/powerpoint/2010/main" val="1549234610"/>
       </p:ext>
     </p:extLst>
   </p:cSld>
   <p:clrMapOvr>
     <a:masterClrMapping/>
   </p:clrMapOvr>
-  <mc:AlternateContent xmlns:mc="http://schemas.openxmlformats.org/markup-compatibility/2006" xmlns:p14="http://schemas.microsoft.com/office/powerpoint/2010/main">
-    <mc:Choice Requires="p14">
+  <mc:AlternateContent xmlns:mc="http://schemas.openxmlformats.org/markup-compatibility/2006">
+    <mc:Choice xmlns:p14="http://schemas.microsoft.com/office/powerpoint/2010/main" Requires="p14">
       <p:transition spd="slow">
         <p14:reveal/>
       </p:transition>
     </mc:Choice>
-    <mc:Fallback xmlns="">
+    <mc:Fallback>
       <p:transition spd="slow">
         <p:fade/>
       </p:transition>
@@ -20053,6 +20039,420 @@
 </file>
 
 <file path=ppt/slides/slide41.xml><?xml version="1.0" encoding="utf-8"?>
+<p:sld xmlns:a="http://schemas.openxmlformats.org/drawingml/2006/main" xmlns:r="http://schemas.openxmlformats.org/officeDocument/2006/relationships" xmlns:p="http://schemas.openxmlformats.org/presentationml/2006/main">
+  <p:cSld>
+    <p:spTree>
+      <p:nvGrpSpPr>
+        <p:cNvPr id="1" name="">
+          <a:extLst>
+            <a:ext uri="{FF2B5EF4-FFF2-40B4-BE49-F238E27FC236}">
+              <a16:creationId xmlns:a16="http://schemas.microsoft.com/office/drawing/2014/main" id="{8CC7C4AD-5DC2-3E67-C716-22DB887D23E5}"/>
+            </a:ext>
+          </a:extLst>
+        </p:cNvPr>
+        <p:cNvGrpSpPr/>
+        <p:nvPr/>
+      </p:nvGrpSpPr>
+      <p:grpSpPr>
+        <a:xfrm>
+          <a:off x="0" y="0"/>
+          <a:ext cx="0" cy="0"/>
+          <a:chOff x="0" y="0"/>
+          <a:chExt cx="0" cy="0"/>
+        </a:xfrm>
+      </p:grpSpPr>
+      <p:sp>
+        <p:nvSpPr>
+          <p:cNvPr id="2" name="Titre 1">
+            <a:extLst>
+              <a:ext uri="{FF2B5EF4-FFF2-40B4-BE49-F238E27FC236}">
+                <a16:creationId xmlns:a16="http://schemas.microsoft.com/office/drawing/2014/main" id="{A4BE6E39-AF4A-1B73-F16A-CB2743F3A418}"/>
+              </a:ext>
+            </a:extLst>
+          </p:cNvPr>
+          <p:cNvSpPr>
+            <a:spLocks noGrp="1"/>
+          </p:cNvSpPr>
+          <p:nvPr>
+            <p:ph type="title"/>
+          </p:nvPr>
+        </p:nvSpPr>
+        <p:spPr/>
+        <p:txBody>
+          <a:bodyPr>
+            <a:normAutofit/>
+          </a:bodyPr>
+          <a:lstStyle/>
+          <a:p>
+            <a:r>
+              <a:rPr lang="fr-BE"/>
+              <a:t>Envoyer les params au serveur : 2 méthodes</a:t>
+            </a:r>
+          </a:p>
+        </p:txBody>
+      </p:sp>
+      <p:sp>
+        <p:nvSpPr>
+          <p:cNvPr id="3" name="Espace réservé du contenu 2">
+            <a:extLst>
+              <a:ext uri="{FF2B5EF4-FFF2-40B4-BE49-F238E27FC236}">
+                <a16:creationId xmlns:a16="http://schemas.microsoft.com/office/drawing/2014/main" id="{B9F30B80-3BAC-FD7B-0CC9-9E9CADC0E472}"/>
+              </a:ext>
+            </a:extLst>
+          </p:cNvPr>
+          <p:cNvSpPr>
+            <a:spLocks noGrp="1"/>
+          </p:cNvSpPr>
+          <p:nvPr>
+            <p:ph idx="1"/>
+          </p:nvPr>
+        </p:nvSpPr>
+        <p:spPr/>
+        <p:txBody>
+          <a:bodyPr>
+            <a:normAutofit fontScale="92500" lnSpcReduction="20000"/>
+          </a:bodyPr>
+          <a:lstStyle/>
+          <a:p>
+            <a:pPr marL="0" indent="0" defTabSz="361950">
+              <a:lnSpc>
+                <a:spcPct val="100000"/>
+              </a:lnSpc>
+              <a:spcBef>
+                <a:spcPts val="0"/>
+              </a:spcBef>
+              <a:buNone/>
+            </a:pPr>
+            <a:r>
+              <a:rPr lang="fr-BE">
+                <a:solidFill>
+                  <a:schemeClr val="accent2"/>
+                </a:solidFill>
+              </a:rPr>
+              <a:t>JSON</a:t>
+            </a:r>
+          </a:p>
+          <a:p>
+            <a:pPr defTabSz="361950">
+              <a:lnSpc>
+                <a:spcPct val="100000"/>
+              </a:lnSpc>
+              <a:spcBef>
+                <a:spcPts val="0"/>
+              </a:spcBef>
+            </a:pPr>
+            <a:r>
+              <a:rPr lang="fr-BE"/>
+              <a:t>API REST modernes</a:t>
+            </a:r>
+          </a:p>
+          <a:p>
+            <a:pPr defTabSz="361950">
+              <a:lnSpc>
+                <a:spcPct val="100000"/>
+              </a:lnSpc>
+              <a:spcBef>
+                <a:spcPts val="0"/>
+              </a:spcBef>
+            </a:pPr>
+            <a:r>
+              <a:rPr lang="fr-BE"/>
+              <a:t>Côté client</a:t>
+            </a:r>
+          </a:p>
+          <a:p>
+            <a:pPr marL="457189" lvl="1" indent="0" defTabSz="361950">
+              <a:lnSpc>
+                <a:spcPct val="100000"/>
+              </a:lnSpc>
+              <a:spcBef>
+                <a:spcPts val="0"/>
+              </a:spcBef>
+              <a:buNone/>
+            </a:pPr>
+            <a:r>
+              <a:rPr lang="fr-BE" sz="2400">
+                <a:solidFill>
+                  <a:srgbClr val="996633"/>
+                </a:solidFill>
+                <a:latin typeface="Consolas" panose="020B0609020204030204" pitchFamily="49" charset="0"/>
+              </a:rPr>
+              <a:t>headers : {</a:t>
+            </a:r>
+            <a:br>
+              <a:rPr lang="fr-BE" sz="2400">
+                <a:solidFill>
+                  <a:srgbClr val="996633"/>
+                </a:solidFill>
+                <a:latin typeface="Consolas" panose="020B0609020204030204" pitchFamily="49" charset="0"/>
+              </a:rPr>
+            </a:br>
+            <a:r>
+              <a:rPr lang="fr-BE" sz="2400">
+                <a:solidFill>
+                  <a:srgbClr val="996633"/>
+                </a:solidFill>
+                <a:latin typeface="Consolas" panose="020B0609020204030204" pitchFamily="49" charset="0"/>
+              </a:rPr>
+              <a:t>		'Content-Type': 'application/</a:t>
+            </a:r>
+            <a:r>
+              <a:rPr lang="fr-BE" sz="2400">
+                <a:solidFill>
+                  <a:schemeClr val="accent2"/>
+                </a:solidFill>
+                <a:latin typeface="Consolas" panose="020B0609020204030204" pitchFamily="49" charset="0"/>
+              </a:rPr>
+              <a:t>json</a:t>
+            </a:r>
+            <a:r>
+              <a:rPr lang="fr-BE" sz="2400">
+                <a:solidFill>
+                  <a:srgbClr val="996633"/>
+                </a:solidFill>
+                <a:latin typeface="Consolas" panose="020B0609020204030204" pitchFamily="49" charset="0"/>
+              </a:rPr>
+              <a:t>',</a:t>
+            </a:r>
+            <a:br>
+              <a:rPr lang="fr-BE" sz="2400">
+                <a:solidFill>
+                  <a:srgbClr val="996633"/>
+                </a:solidFill>
+                <a:latin typeface="Consolas" panose="020B0609020204030204" pitchFamily="49" charset="0"/>
+              </a:rPr>
+            </a:br>
+            <a:r>
+              <a:rPr lang="fr-BE" sz="2400">
+                <a:solidFill>
+                  <a:srgbClr val="996633"/>
+                </a:solidFill>
+                <a:latin typeface="Consolas" panose="020B0609020204030204" pitchFamily="49" charset="0"/>
+              </a:rPr>
+              <a:t>},</a:t>
+            </a:r>
+            <a:br>
+              <a:rPr lang="fr-BE" sz="2400">
+                <a:solidFill>
+                  <a:srgbClr val="996633"/>
+                </a:solidFill>
+                <a:latin typeface="Consolas" panose="020B0609020204030204" pitchFamily="49" charset="0"/>
+              </a:rPr>
+            </a:br>
+            <a:r>
+              <a:rPr lang="en-US" sz="2400">
+                <a:solidFill>
+                  <a:srgbClr val="996633"/>
+                </a:solidFill>
+                <a:latin typeface="Consolas" panose="020B0609020204030204" pitchFamily="49" charset="0"/>
+              </a:rPr>
+              <a:t>body: </a:t>
+            </a:r>
+            <a:r>
+              <a:rPr lang="en-US" sz="2400">
+                <a:solidFill>
+                  <a:schemeClr val="accent5"/>
+                </a:solidFill>
+                <a:latin typeface="Consolas" panose="020B0609020204030204" pitchFamily="49" charset="0"/>
+              </a:rPr>
+              <a:t>JSON.stringify(param)</a:t>
+            </a:r>
+            <a:r>
+              <a:rPr lang="en-US" sz="2400">
+                <a:solidFill>
+                  <a:srgbClr val="996633"/>
+                </a:solidFill>
+                <a:latin typeface="Consolas" panose="020B0609020204030204" pitchFamily="49" charset="0"/>
+              </a:rPr>
+              <a:t>,</a:t>
+            </a:r>
+            <a:endParaRPr lang="fr-BE" sz="2400">
+              <a:solidFill>
+                <a:srgbClr val="996633"/>
+              </a:solidFill>
+              <a:latin typeface="Consolas" panose="020B0609020204030204" pitchFamily="49" charset="0"/>
+            </a:endParaRPr>
+          </a:p>
+          <a:p>
+            <a:pPr defTabSz="361950">
+              <a:lnSpc>
+                <a:spcPct val="100000"/>
+              </a:lnSpc>
+              <a:spcBef>
+                <a:spcPts val="0"/>
+              </a:spcBef>
+            </a:pPr>
+            <a:r>
+              <a:rPr lang="en-US"/>
+              <a:t>Côté serveur </a:t>
+            </a:r>
+          </a:p>
+          <a:p>
+            <a:pPr marL="457189" lvl="1" indent="0" defTabSz="361950">
+              <a:lnSpc>
+                <a:spcPct val="100000"/>
+              </a:lnSpc>
+              <a:spcBef>
+                <a:spcPts val="0"/>
+              </a:spcBef>
+              <a:buNone/>
+            </a:pPr>
+            <a:r>
+              <a:rPr lang="fr-BE">
+                <a:solidFill>
+                  <a:srgbClr val="996633"/>
+                </a:solidFill>
+                <a:latin typeface="Consolas" panose="020B0609020204030204" pitchFamily="49" charset="0"/>
+              </a:rPr>
+              <a:t>$json_s = file_get_contents('php://input');</a:t>
+            </a:r>
+          </a:p>
+          <a:p>
+            <a:pPr marL="457189" lvl="1" indent="0" defTabSz="361950">
+              <a:lnSpc>
+                <a:spcPct val="100000"/>
+              </a:lnSpc>
+              <a:spcBef>
+                <a:spcPts val="0"/>
+              </a:spcBef>
+              <a:buNone/>
+            </a:pPr>
+            <a:r>
+              <a:rPr lang="fr-BE">
+                <a:solidFill>
+                  <a:srgbClr val="996633"/>
+                </a:solidFill>
+                <a:latin typeface="Consolas" panose="020B0609020204030204" pitchFamily="49" charset="0"/>
+              </a:rPr>
+              <a:t>$data_a = json_decode($json_s, true);</a:t>
+            </a:r>
+          </a:p>
+          <a:p>
+            <a:pPr marL="457189" lvl="1" indent="0" defTabSz="361950">
+              <a:lnSpc>
+                <a:spcPct val="100000"/>
+              </a:lnSpc>
+              <a:spcBef>
+                <a:spcPts val="0"/>
+              </a:spcBef>
+              <a:buNone/>
+            </a:pPr>
+            <a:r>
+              <a:rPr lang="fr-BE">
+                <a:solidFill>
+                  <a:srgbClr val="996633"/>
+                </a:solidFill>
+                <a:latin typeface="Consolas" panose="020B0609020204030204" pitchFamily="49" charset="0"/>
+              </a:rPr>
+              <a:t>…</a:t>
+            </a:r>
+          </a:p>
+          <a:p>
+            <a:pPr marL="457189" lvl="1" indent="0" defTabSz="361950">
+              <a:lnSpc>
+                <a:spcPct val="100000"/>
+              </a:lnSpc>
+              <a:spcBef>
+                <a:spcPts val="0"/>
+              </a:spcBef>
+              <a:buNone/>
+            </a:pPr>
+            <a:r>
+              <a:rPr lang="fr-BE">
+                <a:solidFill>
+                  <a:srgbClr val="996633"/>
+                </a:solidFill>
+                <a:latin typeface="Consolas" panose="020B0609020204030204" pitchFamily="49" charset="0"/>
+              </a:rPr>
+              <a:t>echo json_encode($response_a);</a:t>
+            </a:r>
+          </a:p>
+        </p:txBody>
+      </p:sp>
+      <p:sp>
+        <p:nvSpPr>
+          <p:cNvPr id="4" name="Espace réservé de la date 3">
+            <a:extLst>
+              <a:ext uri="{FF2B5EF4-FFF2-40B4-BE49-F238E27FC236}">
+                <a16:creationId xmlns:a16="http://schemas.microsoft.com/office/drawing/2014/main" id="{30FDD0F4-68E2-6B67-09CA-CA38BBE09D9D}"/>
+              </a:ext>
+            </a:extLst>
+          </p:cNvPr>
+          <p:cNvSpPr>
+            <a:spLocks noGrp="1"/>
+          </p:cNvSpPr>
+          <p:nvPr>
+            <p:ph type="dt" sz="half" idx="10"/>
+          </p:nvPr>
+        </p:nvSpPr>
+        <p:spPr/>
+        <p:txBody>
+          <a:bodyPr/>
+          <a:lstStyle/>
+          <a:p>
+            <a:fld id="{86F765DB-6413-4EEF-AA4B-13CECBA56D16}" type="datetime1">
+              <a:rPr lang="fr-BE" smtClean="0"/>
+              <a:t>02-03-26</a:t>
+            </a:fld>
+            <a:endParaRPr lang="fr-BE"/>
+          </a:p>
+        </p:txBody>
+      </p:sp>
+      <p:sp>
+        <p:nvSpPr>
+          <p:cNvPr id="5" name="Espace réservé du numéro de diapositive 4">
+            <a:extLst>
+              <a:ext uri="{FF2B5EF4-FFF2-40B4-BE49-F238E27FC236}">
+                <a16:creationId xmlns:a16="http://schemas.microsoft.com/office/drawing/2014/main" id="{018A3FFA-E77A-55B4-C4CC-C2DEE36F8514}"/>
+              </a:ext>
+            </a:extLst>
+          </p:cNvPr>
+          <p:cNvSpPr>
+            <a:spLocks noGrp="1"/>
+          </p:cNvSpPr>
+          <p:nvPr>
+            <p:ph type="sldNum" sz="quarter" idx="12"/>
+          </p:nvPr>
+        </p:nvSpPr>
+        <p:spPr/>
+        <p:txBody>
+          <a:bodyPr/>
+          <a:lstStyle/>
+          <a:p>
+            <a:fld id="{02C092ED-0E97-497E-99D9-BB9DD7276F53}" type="slidenum">
+              <a:rPr lang="fr-BE" smtClean="0"/>
+              <a:t>41</a:t>
+            </a:fld>
+            <a:endParaRPr lang="fr-BE"/>
+          </a:p>
+        </p:txBody>
+      </p:sp>
+    </p:spTree>
+    <p:extLst>
+      <p:ext uri="{BB962C8B-B14F-4D97-AF65-F5344CB8AC3E}">
+        <p14:creationId xmlns:p14="http://schemas.microsoft.com/office/powerpoint/2010/main" val="2204548126"/>
+      </p:ext>
+    </p:extLst>
+  </p:cSld>
+  <p:clrMapOvr>
+    <a:masterClrMapping/>
+  </p:clrMapOvr>
+  <mc:AlternateContent xmlns:mc="http://schemas.openxmlformats.org/markup-compatibility/2006">
+    <mc:Choice xmlns:p14="http://schemas.microsoft.com/office/powerpoint/2010/main" Requires="p14">
+      <p:transition spd="slow">
+        <p14:reveal/>
+      </p:transition>
+    </mc:Choice>
+    <mc:Fallback>
+      <p:transition spd="slow">
+        <p:fade/>
+      </p:transition>
+    </mc:Fallback>
+  </mc:AlternateContent>
+</p:sld>
+</file>
+
+<file path=ppt/slides/slide42.xml><?xml version="1.0" encoding="utf-8"?>
 <p:sld xmlns:a="http://schemas.openxmlformats.org/drawingml/2006/main" xmlns:r="http://schemas.openxmlformats.org/officeDocument/2006/relationships" xmlns:p="http://schemas.openxmlformats.org/presentationml/2006/main">
   <p:cSld>
     <p:spTree>
@@ -20160,7 +20560,7 @@
           <a:p>
             <a:fld id="{47EA6130-C364-45FF-ADCC-7D6C28140105}" type="datetime1">
               <a:rPr lang="fr-BE" smtClean="0"/>
-              <a:t>23-02-26</a:t>
+              <a:t>02-03-26</a:t>
             </a:fld>
             <a:endParaRPr lang="fr-BE"/>
           </a:p>
@@ -20189,7 +20589,7 @@
           <a:p>
             <a:fld id="{02C092ED-0E97-497E-99D9-BB9DD7276F53}" type="slidenum">
               <a:rPr lang="fr-BE" smtClean="0"/>
-              <a:t>41</a:t>
+              <a:t>42</a:t>
             </a:fld>
             <a:endParaRPr lang="fr-BE"/>
           </a:p>
@@ -20255,7 +20655,7 @@
 </p:sld>
 </file>
 
-<file path=ppt/slides/slide42.xml><?xml version="1.0" encoding="utf-8"?>
+<file path=ppt/slides/slide43.xml><?xml version="1.0" encoding="utf-8"?>
 <p:sld xmlns:a="http://schemas.openxmlformats.org/drawingml/2006/main" xmlns:r="http://schemas.openxmlformats.org/officeDocument/2006/relationships" xmlns:p="http://schemas.openxmlformats.org/presentationml/2006/main">
   <p:cSld>
     <p:spTree>
@@ -20408,7 +20808,7 @@
           <a:p>
             <a:fld id="{9387EA18-5AD6-45A6-A8E3-163D735A5432}" type="datetime1">
               <a:rPr lang="fr-BE" smtClean="0"/>
-              <a:t>23-02-26</a:t>
+              <a:t>02-03-26</a:t>
             </a:fld>
             <a:endParaRPr lang="fr-BE"/>
           </a:p>
@@ -20437,7 +20837,7 @@
           <a:p>
             <a:fld id="{02C092ED-0E97-497E-99D9-BB9DD7276F53}" type="slidenum">
               <a:rPr lang="fr-BE" smtClean="0"/>
-              <a:t>42</a:t>
+              <a:t>43</a:t>
             </a:fld>
             <a:endParaRPr lang="fr-BE"/>
           </a:p>
@@ -20447,280 +20847,6 @@
     <p:extLst>
       <p:ext uri="{BB962C8B-B14F-4D97-AF65-F5344CB8AC3E}">
         <p14:creationId xmlns:p14="http://schemas.microsoft.com/office/powerpoint/2010/main" val="3781755094"/>
-      </p:ext>
-    </p:extLst>
-  </p:cSld>
-  <p:clrMapOvr>
-    <a:masterClrMapping/>
-  </p:clrMapOvr>
-  <mc:AlternateContent xmlns:mc="http://schemas.openxmlformats.org/markup-compatibility/2006" xmlns:p14="http://schemas.microsoft.com/office/powerpoint/2010/main">
-    <mc:Choice Requires="p14">
-      <p:transition spd="slow">
-        <p14:reveal/>
-      </p:transition>
-    </mc:Choice>
-    <mc:Fallback xmlns="">
-      <p:transition spd="slow">
-        <p:fade/>
-      </p:transition>
-    </mc:Fallback>
-  </mc:AlternateContent>
-</p:sld>
-</file>
-
-<file path=ppt/slides/slide43.xml><?xml version="1.0" encoding="utf-8"?>
-<p:sld xmlns:a="http://schemas.openxmlformats.org/drawingml/2006/main" xmlns:r="http://schemas.openxmlformats.org/officeDocument/2006/relationships" xmlns:p="http://schemas.openxmlformats.org/presentationml/2006/main">
-  <p:cSld>
-    <p:spTree>
-      <p:nvGrpSpPr>
-        <p:cNvPr id="1" name="">
-          <a:extLst>
-            <a:ext uri="{FF2B5EF4-FFF2-40B4-BE49-F238E27FC236}">
-              <a16:creationId xmlns:a16="http://schemas.microsoft.com/office/drawing/2014/main" id="{C13E4B6D-6580-FA9C-FE29-49D9F3D88959}"/>
-            </a:ext>
-          </a:extLst>
-        </p:cNvPr>
-        <p:cNvGrpSpPr/>
-        <p:nvPr/>
-      </p:nvGrpSpPr>
-      <p:grpSpPr>
-        <a:xfrm>
-          <a:off x="0" y="0"/>
-          <a:ext cx="0" cy="0"/>
-          <a:chOff x="0" y="0"/>
-          <a:chExt cx="0" cy="0"/>
-        </a:xfrm>
-      </p:grpSpPr>
-      <p:sp>
-        <p:nvSpPr>
-          <p:cNvPr id="7" name="Titre 6">
-            <a:extLst>
-              <a:ext uri="{FF2B5EF4-FFF2-40B4-BE49-F238E27FC236}">
-                <a16:creationId xmlns:a16="http://schemas.microsoft.com/office/drawing/2014/main" id="{6D74B91B-F063-5D01-A6B7-1B9FC103D142}"/>
-              </a:ext>
-            </a:extLst>
-          </p:cNvPr>
-          <p:cNvSpPr>
-            <a:spLocks noGrp="1"/>
-          </p:cNvSpPr>
-          <p:nvPr>
-            <p:ph type="title"/>
-          </p:nvPr>
-        </p:nvSpPr>
-        <p:spPr/>
-        <p:txBody>
-          <a:bodyPr/>
-          <a:lstStyle/>
-          <a:p>
-            <a:r>
-              <a:rPr lang="fr-BE"/>
-              <a:t>Mise en place</a:t>
-            </a:r>
-          </a:p>
-        </p:txBody>
-      </p:sp>
-      <p:sp>
-        <p:nvSpPr>
-          <p:cNvPr id="8" name="Espace réservé du contenu 7">
-            <a:extLst>
-              <a:ext uri="{FF2B5EF4-FFF2-40B4-BE49-F238E27FC236}">
-                <a16:creationId xmlns:a16="http://schemas.microsoft.com/office/drawing/2014/main" id="{99096E94-B16C-FE26-0714-EDD7E6BA1255}"/>
-              </a:ext>
-            </a:extLst>
-          </p:cNvPr>
-          <p:cNvSpPr>
-            <a:spLocks noGrp="1"/>
-          </p:cNvSpPr>
-          <p:nvPr>
-            <p:ph idx="1"/>
-          </p:nvPr>
-        </p:nvSpPr>
-        <p:spPr>
-          <a:xfrm>
-            <a:off x="838200" y="1690688"/>
-            <a:ext cx="10515600" cy="5167311"/>
-          </a:xfrm>
-        </p:spPr>
-        <p:txBody>
-          <a:bodyPr>
-            <a:normAutofit lnSpcReduction="10000"/>
-          </a:bodyPr>
-          <a:lstStyle/>
-          <a:p>
-            <a:r>
-              <a:rPr lang="fr-BE"/>
-              <a:t>Répertoire (GitHub) : </a:t>
-            </a:r>
-            <a:r>
-              <a:rPr lang="fr-BE">
-                <a:solidFill>
-                  <a:srgbClr val="996633"/>
-                </a:solidFill>
-                <a:latin typeface="Consolas" panose="020B0609020204030204" pitchFamily="49" charset="0"/>
-              </a:rPr>
-              <a:t>/AWebWiz_start_fetch_vuejs</a:t>
-            </a:r>
-          </a:p>
-          <a:p>
-            <a:r>
-              <a:rPr lang="fr-BE"/>
-              <a:t>Fichiers nouveaux ou modifiés</a:t>
-            </a:r>
-          </a:p>
-          <a:p>
-            <a:pPr lvl="1"/>
-            <a:r>
-              <a:rPr lang="en-US">
-                <a:solidFill>
-                  <a:srgbClr val="996633"/>
-                </a:solidFill>
-                <a:latin typeface="Consolas" panose="020B0609020204030204" pitchFamily="49" charset="0"/>
-              </a:rPr>
-              <a:t>/public/index.php</a:t>
-            </a:r>
-            <a:endParaRPr lang="fr-BE">
-              <a:solidFill>
-                <a:srgbClr val="996633"/>
-              </a:solidFill>
-              <a:latin typeface="Consolas" panose="020B0609020204030204" pitchFamily="49" charset="0"/>
-            </a:endParaRPr>
-          </a:p>
-          <a:p>
-            <a:pPr lvl="1"/>
-            <a:r>
-              <a:rPr lang="en-US">
-                <a:solidFill>
-                  <a:srgbClr val="996633"/>
-                </a:solidFill>
-                <a:latin typeface="Consolas" panose="020B0609020204030204" pitchFamily="49" charset="0"/>
-              </a:rPr>
-              <a:t>/app/controller/home.php</a:t>
-            </a:r>
-          </a:p>
-          <a:p>
-            <a:pPr lvl="1"/>
-            <a:r>
-              <a:rPr lang="en-US">
-                <a:solidFill>
-                  <a:srgbClr val="996633"/>
-                </a:solidFill>
-                <a:latin typeface="Consolas" panose="020B0609020204030204" pitchFamily="49" charset="0"/>
-              </a:rPr>
-              <a:t>/app/view/template.php</a:t>
-            </a:r>
-          </a:p>
-          <a:p>
-            <a:pPr lvl="1"/>
-            <a:r>
-              <a:rPr lang="en-US">
-                <a:solidFill>
-                  <a:srgbClr val="996633"/>
-                </a:solidFill>
-                <a:latin typeface="Consolas" panose="020B0609020204030204" pitchFamily="49" charset="0"/>
-              </a:rPr>
-              <a:t>/app/view/home.php</a:t>
-            </a:r>
-          </a:p>
-          <a:p>
-            <a:pPr lvl="1"/>
-            <a:r>
-              <a:rPr lang="en-US">
-                <a:solidFill>
-                  <a:srgbClr val="996633"/>
-                </a:solidFill>
-                <a:latin typeface="Consolas" panose="020B0609020204030204" pitchFamily="49" charset="0"/>
-              </a:rPr>
-              <a:t>/public/js/internal/counter.js</a:t>
-            </a:r>
-          </a:p>
-          <a:p>
-            <a:pPr lvl="1"/>
-            <a:r>
-              <a:rPr lang="en-US">
-                <a:solidFill>
-                  <a:srgbClr val="996633"/>
-                </a:solidFill>
-                <a:latin typeface="Consolas" panose="020B0609020204030204" pitchFamily="49" charset="0"/>
-              </a:rPr>
-              <a:t>/app/controller/counter_fetch.php</a:t>
-            </a:r>
-          </a:p>
-          <a:p>
-            <a:pPr lvl="1"/>
-            <a:r>
-              <a:rPr lang="en-US">
-                <a:solidFill>
-                  <a:srgbClr val="996633"/>
-                </a:solidFill>
-                <a:latin typeface="Consolas" panose="020B0609020204030204" pitchFamily="49" charset="0"/>
-              </a:rPr>
-              <a:t>/public/css/internal/main.css</a:t>
-            </a:r>
-          </a:p>
-        </p:txBody>
-      </p:sp>
-      <p:sp>
-        <p:nvSpPr>
-          <p:cNvPr id="5" name="Espace réservé de la date 4">
-            <a:extLst>
-              <a:ext uri="{FF2B5EF4-FFF2-40B4-BE49-F238E27FC236}">
-                <a16:creationId xmlns:a16="http://schemas.microsoft.com/office/drawing/2014/main" id="{8889A027-BB36-588C-9083-EA9284D33C40}"/>
-              </a:ext>
-            </a:extLst>
-          </p:cNvPr>
-          <p:cNvSpPr>
-            <a:spLocks noGrp="1"/>
-          </p:cNvSpPr>
-          <p:nvPr>
-            <p:ph type="dt" sz="half" idx="10"/>
-          </p:nvPr>
-        </p:nvSpPr>
-        <p:spPr/>
-        <p:txBody>
-          <a:bodyPr/>
-          <a:lstStyle/>
-          <a:p>
-            <a:fld id="{9387EA18-5AD6-45A6-A8E3-163D735A5432}" type="datetime1">
-              <a:rPr lang="fr-BE" smtClean="0"/>
-              <a:t>23-02-26</a:t>
-            </a:fld>
-            <a:endParaRPr lang="fr-BE"/>
-          </a:p>
-        </p:txBody>
-      </p:sp>
-      <p:sp>
-        <p:nvSpPr>
-          <p:cNvPr id="6" name="Espace réservé du numéro de diapositive 5">
-            <a:extLst>
-              <a:ext uri="{FF2B5EF4-FFF2-40B4-BE49-F238E27FC236}">
-                <a16:creationId xmlns:a16="http://schemas.microsoft.com/office/drawing/2014/main" id="{3EE8EB99-1CFC-F81E-DD38-B9B87A1CEE9E}"/>
-              </a:ext>
-            </a:extLst>
-          </p:cNvPr>
-          <p:cNvSpPr>
-            <a:spLocks noGrp="1"/>
-          </p:cNvSpPr>
-          <p:nvPr>
-            <p:ph type="sldNum" sz="quarter" idx="12"/>
-          </p:nvPr>
-        </p:nvSpPr>
-        <p:spPr/>
-        <p:txBody>
-          <a:bodyPr/>
-          <a:lstStyle/>
-          <a:p>
-            <a:fld id="{02C092ED-0E97-497E-99D9-BB9DD7276F53}" type="slidenum">
-              <a:rPr lang="fr-BE" smtClean="0"/>
-              <a:t>43</a:t>
-            </a:fld>
-            <a:endParaRPr lang="fr-BE"/>
-          </a:p>
-        </p:txBody>
-      </p:sp>
-    </p:spTree>
-    <p:extLst>
-      <p:ext uri="{BB962C8B-B14F-4D97-AF65-F5344CB8AC3E}">
-        <p14:creationId xmlns:p14="http://schemas.microsoft.com/office/powerpoint/2010/main" val="2609346794"/>
       </p:ext>
     </p:extLst>
   </p:cSld>
@@ -20750,7 +20876,7 @@
         <p:cNvPr id="1" name="">
           <a:extLst>
             <a:ext uri="{FF2B5EF4-FFF2-40B4-BE49-F238E27FC236}">
-              <a16:creationId xmlns:a16="http://schemas.microsoft.com/office/drawing/2014/main" id="{7D7B0326-5BA8-F3AC-A272-B44D8B044934}"/>
+              <a16:creationId xmlns:a16="http://schemas.microsoft.com/office/drawing/2014/main" id="{C13E4B6D-6580-FA9C-FE29-49D9F3D88959}"/>
             </a:ext>
           </a:extLst>
         </p:cNvPr>
@@ -20767,10 +20893,10 @@
       </p:grpSpPr>
       <p:sp>
         <p:nvSpPr>
-          <p:cNvPr id="2" name="Titre 1">
+          <p:cNvPr id="7" name="Titre 6">
             <a:extLst>
               <a:ext uri="{FF2B5EF4-FFF2-40B4-BE49-F238E27FC236}">
-                <a16:creationId xmlns:a16="http://schemas.microsoft.com/office/drawing/2014/main" id="{B0949200-7C5E-A65A-E98A-77F38865C8EF}"/>
+                <a16:creationId xmlns:a16="http://schemas.microsoft.com/office/drawing/2014/main" id="{6D74B91B-F063-5D01-A6B7-1B9FC103D142}"/>
               </a:ext>
             </a:extLst>
           </p:cNvPr>
@@ -20787,23 +20913,18 @@
           <a:lstStyle/>
           <a:p>
             <a:r>
-              <a:rPr lang="en-US" b="0">
-                <a:solidFill>
-                  <a:srgbClr val="996633"/>
-                </a:solidFill>
-                <a:latin typeface="Consolas" panose="020B0609020204030204" pitchFamily="49" charset="0"/>
-              </a:rPr>
-              <a:t>/public/index.php</a:t>
-            </a:r>
-          </a:p>
-        </p:txBody>
-      </p:sp>
-      <p:sp>
-        <p:nvSpPr>
-          <p:cNvPr id="3" name="Espace réservé du contenu 2">
+              <a:rPr lang="fr-BE"/>
+              <a:t>Mise en place</a:t>
+            </a:r>
+          </a:p>
+        </p:txBody>
+      </p:sp>
+      <p:sp>
+        <p:nvSpPr>
+          <p:cNvPr id="8" name="Espace réservé du contenu 7">
             <a:extLst>
               <a:ext uri="{FF2B5EF4-FFF2-40B4-BE49-F238E27FC236}">
-                <a16:creationId xmlns:a16="http://schemas.microsoft.com/office/drawing/2014/main" id="{00B530F5-0015-AC39-2DDD-333A7788B27F}"/>
+                <a16:creationId xmlns:a16="http://schemas.microsoft.com/office/drawing/2014/main" id="{99096E94-B16C-FE26-0714-EDD7E6BA1255}"/>
               </a:ext>
             </a:extLst>
           </p:cNvPr>
@@ -20814,26 +20935,136 @@
             <p:ph idx="1"/>
           </p:nvPr>
         </p:nvSpPr>
-        <p:spPr/>
+        <p:spPr>
+          <a:xfrm>
+            <a:off x="838200" y="1690688"/>
+            <a:ext cx="10515600" cy="5167311"/>
+          </a:xfrm>
+        </p:spPr>
         <p:txBody>
           <a:bodyPr>
-            <a:normAutofit/>
+            <a:normAutofit lnSpcReduction="10000"/>
           </a:bodyPr>
           <a:lstStyle/>
           <a:p>
             <a:r>
               <a:rPr lang="fr-BE"/>
-              <a:t>Le code du router est enrichi pour intégrer la possibilité pour le serveur de retourner autre chose que du HTML, comme du JSON. </a:t>
-            </a:r>
-          </a:p>
-        </p:txBody>
-      </p:sp>
-      <p:sp>
-        <p:nvSpPr>
-          <p:cNvPr id="4" name="Espace réservé de la date 3">
+              <a:t>Répertoire (GitHub) : </a:t>
+            </a:r>
+            <a:r>
+              <a:rPr lang="fr-BE">
+                <a:solidFill>
+                  <a:srgbClr val="996633"/>
+                </a:solidFill>
+                <a:latin typeface="Consolas" panose="020B0609020204030204" pitchFamily="49" charset="0"/>
+              </a:rPr>
+              <a:t>/AWebWiz_start_fetch_vuejs</a:t>
+            </a:r>
+          </a:p>
+          <a:p>
+            <a:r>
+              <a:rPr lang="fr-BE"/>
+              <a:t>Fichiers nouveaux ou modifiés</a:t>
+            </a:r>
+          </a:p>
+          <a:p>
+            <a:pPr lvl="1"/>
+            <a:r>
+              <a:rPr lang="en-US">
+                <a:solidFill>
+                  <a:srgbClr val="996633"/>
+                </a:solidFill>
+                <a:latin typeface="Consolas" panose="020B0609020204030204" pitchFamily="49" charset="0"/>
+              </a:rPr>
+              <a:t>/public/index.php</a:t>
+            </a:r>
+            <a:endParaRPr lang="fr-BE">
+              <a:solidFill>
+                <a:srgbClr val="996633"/>
+              </a:solidFill>
+              <a:latin typeface="Consolas" panose="020B0609020204030204" pitchFamily="49" charset="0"/>
+            </a:endParaRPr>
+          </a:p>
+          <a:p>
+            <a:pPr lvl="1"/>
+            <a:r>
+              <a:rPr lang="en-US">
+                <a:solidFill>
+                  <a:srgbClr val="996633"/>
+                </a:solidFill>
+                <a:latin typeface="Consolas" panose="020B0609020204030204" pitchFamily="49" charset="0"/>
+              </a:rPr>
+              <a:t>/app/controller/home.php</a:t>
+            </a:r>
+          </a:p>
+          <a:p>
+            <a:pPr lvl="1"/>
+            <a:r>
+              <a:rPr lang="en-US">
+                <a:solidFill>
+                  <a:srgbClr val="996633"/>
+                </a:solidFill>
+                <a:latin typeface="Consolas" panose="020B0609020204030204" pitchFamily="49" charset="0"/>
+              </a:rPr>
+              <a:t>/app/view/template.php</a:t>
+            </a:r>
+          </a:p>
+          <a:p>
+            <a:pPr lvl="1"/>
+            <a:r>
+              <a:rPr lang="en-US">
+                <a:solidFill>
+                  <a:srgbClr val="996633"/>
+                </a:solidFill>
+                <a:latin typeface="Consolas" panose="020B0609020204030204" pitchFamily="49" charset="0"/>
+              </a:rPr>
+              <a:t>/app/view/home.php</a:t>
+            </a:r>
+          </a:p>
+          <a:p>
+            <a:pPr lvl="1"/>
+            <a:r>
+              <a:rPr lang="en-US">
+                <a:solidFill>
+                  <a:srgbClr val="996633"/>
+                </a:solidFill>
+                <a:latin typeface="Consolas" panose="020B0609020204030204" pitchFamily="49" charset="0"/>
+              </a:rPr>
+              <a:t>/public/js/internal/counter.js</a:t>
+            </a:r>
+          </a:p>
+          <a:p>
+            <a:pPr lvl="1"/>
+            <a:r>
+              <a:rPr lang="en-US">
+                <a:solidFill>
+                  <a:srgbClr val="996633"/>
+                </a:solidFill>
+                <a:latin typeface="Consolas" panose="020B0609020204030204" pitchFamily="49" charset="0"/>
+              </a:rPr>
+              <a:t>/app/controller/counter_fetch.php</a:t>
+            </a:r>
+          </a:p>
+          <a:p>
+            <a:pPr lvl="1"/>
+            <a:r>
+              <a:rPr lang="en-US">
+                <a:solidFill>
+                  <a:srgbClr val="996633"/>
+                </a:solidFill>
+                <a:latin typeface="Consolas" panose="020B0609020204030204" pitchFamily="49" charset="0"/>
+              </a:rPr>
+              <a:t>/public/css/internal/main.css</a:t>
+            </a:r>
+          </a:p>
+        </p:txBody>
+      </p:sp>
+      <p:sp>
+        <p:nvSpPr>
+          <p:cNvPr id="5" name="Espace réservé de la date 4">
             <a:extLst>
               <a:ext uri="{FF2B5EF4-FFF2-40B4-BE49-F238E27FC236}">
-                <a16:creationId xmlns:a16="http://schemas.microsoft.com/office/drawing/2014/main" id="{9E4C6628-6D1E-76F3-F8E2-74A227EF8A7F}"/>
+                <a16:creationId xmlns:a16="http://schemas.microsoft.com/office/drawing/2014/main" id="{8889A027-BB36-588C-9083-EA9284D33C40}"/>
               </a:ext>
             </a:extLst>
           </p:cNvPr>
@@ -20849,9 +21080,9 @@
           <a:bodyPr/>
           <a:lstStyle/>
           <a:p>
-            <a:fld id="{50827A15-FE84-4468-BA37-282682579A39}" type="datetime1">
+            <a:fld id="{9387EA18-5AD6-45A6-A8E3-163D735A5432}" type="datetime1">
               <a:rPr lang="fr-BE" smtClean="0"/>
-              <a:t>23-02-26</a:t>
+              <a:t>02-03-26</a:t>
             </a:fld>
             <a:endParaRPr lang="fr-BE"/>
           </a:p>
@@ -20859,10 +21090,10 @@
       </p:sp>
       <p:sp>
         <p:nvSpPr>
-          <p:cNvPr id="5" name="Espace réservé du numéro de diapositive 4">
+          <p:cNvPr id="6" name="Espace réservé du numéro de diapositive 5">
             <a:extLst>
               <a:ext uri="{FF2B5EF4-FFF2-40B4-BE49-F238E27FC236}">
-                <a16:creationId xmlns:a16="http://schemas.microsoft.com/office/drawing/2014/main" id="{E00503FC-2109-0A68-09E7-B605C0D03BED}"/>
+                <a16:creationId xmlns:a16="http://schemas.microsoft.com/office/drawing/2014/main" id="{3EE8EB99-1CFC-F81E-DD38-B9B87A1CEE9E}"/>
               </a:ext>
             </a:extLst>
           </p:cNvPr>
@@ -20889,7 +21120,7 @@
     </p:spTree>
     <p:extLst>
       <p:ext uri="{BB962C8B-B14F-4D97-AF65-F5344CB8AC3E}">
-        <p14:creationId xmlns:p14="http://schemas.microsoft.com/office/powerpoint/2010/main" val="2043233655"/>
+        <p14:creationId xmlns:p14="http://schemas.microsoft.com/office/powerpoint/2010/main" val="2609346794"/>
       </p:ext>
     </p:extLst>
   </p:cSld>
@@ -20919,7 +21150,7 @@
         <p:cNvPr id="1" name="">
           <a:extLst>
             <a:ext uri="{FF2B5EF4-FFF2-40B4-BE49-F238E27FC236}">
-              <a16:creationId xmlns:a16="http://schemas.microsoft.com/office/drawing/2014/main" id="{452AA0CE-FACE-AFEA-5BA9-73E3BE39B40F}"/>
+              <a16:creationId xmlns:a16="http://schemas.microsoft.com/office/drawing/2014/main" id="{7D7B0326-5BA8-F3AC-A272-B44D8B044934}"/>
             </a:ext>
           </a:extLst>
         </p:cNvPr>
@@ -20939,7 +21170,7 @@
           <p:cNvPr id="2" name="Titre 1">
             <a:extLst>
               <a:ext uri="{FF2B5EF4-FFF2-40B4-BE49-F238E27FC236}">
-                <a16:creationId xmlns:a16="http://schemas.microsoft.com/office/drawing/2014/main" id="{F18AE822-3A37-ECB4-4ED5-2DDAA62291F7}"/>
+                <a16:creationId xmlns:a16="http://schemas.microsoft.com/office/drawing/2014/main" id="{B0949200-7C5E-A65A-E98A-77F38865C8EF}"/>
               </a:ext>
             </a:extLst>
           </p:cNvPr>
@@ -20962,14 +21193,8 @@
                 </a:solidFill>
                 <a:latin typeface="Consolas" panose="020B0609020204030204" pitchFamily="49" charset="0"/>
               </a:rPr>
-              <a:t>/app/controller/home.php</a:t>
-            </a:r>
-            <a:endParaRPr lang="fr-BE" b="0">
-              <a:solidFill>
-                <a:srgbClr val="996633"/>
-              </a:solidFill>
-              <a:latin typeface="Consolas" panose="020B0609020204030204" pitchFamily="49" charset="0"/>
-            </a:endParaRPr>
+              <a:t>/public/index.php</a:t>
+            </a:r>
           </a:p>
         </p:txBody>
       </p:sp>
@@ -20978,7 +21203,7 @@
           <p:cNvPr id="3" name="Espace réservé du contenu 2">
             <a:extLst>
               <a:ext uri="{FF2B5EF4-FFF2-40B4-BE49-F238E27FC236}">
-                <a16:creationId xmlns:a16="http://schemas.microsoft.com/office/drawing/2014/main" id="{20E996EC-9C97-9AA7-DF94-BE6473E0B125}"/>
+                <a16:creationId xmlns:a16="http://schemas.microsoft.com/office/drawing/2014/main" id="{00B530F5-0015-AC39-2DDD-333A7788B27F}"/>
               </a:ext>
             </a:extLst>
           </p:cNvPr>
@@ -20991,25 +21216,15 @@
         </p:nvSpPr>
         <p:spPr/>
         <p:txBody>
-          <a:bodyPr/>
+          <a:bodyPr>
+            <a:normAutofit/>
+          </a:bodyPr>
           <a:lstStyle/>
           <a:p>
             <a:r>
               <a:rPr lang="fr-BE"/>
-              <a:t>Appel à la fonction PHP </a:t>
-            </a:r>
-            <a:r>
-              <a:rPr lang="fr-BE">
-                <a:solidFill>
-                  <a:srgbClr val="996633"/>
-                </a:solidFill>
-                <a:latin typeface="Consolas" panose="020B0609020204030204" pitchFamily="49" charset="0"/>
-              </a:rPr>
-              <a:t>html_fetch_sample()</a:t>
-            </a:r>
-          </a:p>
-          <a:p>
-            <a:endParaRPr lang="fr-BE"/>
+              <a:t>Le code du router est enrichi pour intégrer la possibilité pour le serveur de retourner autre chose que du HTML, comme du JSON. </a:t>
+            </a:r>
           </a:p>
         </p:txBody>
       </p:sp>
@@ -21018,7 +21233,7 @@
           <p:cNvPr id="4" name="Espace réservé de la date 3">
             <a:extLst>
               <a:ext uri="{FF2B5EF4-FFF2-40B4-BE49-F238E27FC236}">
-                <a16:creationId xmlns:a16="http://schemas.microsoft.com/office/drawing/2014/main" id="{CD082CFB-0F96-2BBE-ED39-8D237083F4E7}"/>
+                <a16:creationId xmlns:a16="http://schemas.microsoft.com/office/drawing/2014/main" id="{9E4C6628-6D1E-76F3-F8E2-74A227EF8A7F}"/>
               </a:ext>
             </a:extLst>
           </p:cNvPr>
@@ -21036,7 +21251,7 @@
           <a:p>
             <a:fld id="{50827A15-FE84-4468-BA37-282682579A39}" type="datetime1">
               <a:rPr lang="fr-BE" smtClean="0"/>
-              <a:t>23-02-26</a:t>
+              <a:t>02-03-26</a:t>
             </a:fld>
             <a:endParaRPr lang="fr-BE"/>
           </a:p>
@@ -21047,7 +21262,7 @@
           <p:cNvPr id="5" name="Espace réservé du numéro de diapositive 4">
             <a:extLst>
               <a:ext uri="{FF2B5EF4-FFF2-40B4-BE49-F238E27FC236}">
-                <a16:creationId xmlns:a16="http://schemas.microsoft.com/office/drawing/2014/main" id="{81EBF5EE-BA92-B40A-342B-85457E5297E0}"/>
+                <a16:creationId xmlns:a16="http://schemas.microsoft.com/office/drawing/2014/main" id="{E00503FC-2109-0A68-09E7-B605C0D03BED}"/>
               </a:ext>
             </a:extLst>
           </p:cNvPr>
@@ -21074,7 +21289,7 @@
     </p:spTree>
     <p:extLst>
       <p:ext uri="{BB962C8B-B14F-4D97-AF65-F5344CB8AC3E}">
-        <p14:creationId xmlns:p14="http://schemas.microsoft.com/office/powerpoint/2010/main" val="2769373972"/>
+        <p14:creationId xmlns:p14="http://schemas.microsoft.com/office/powerpoint/2010/main" val="2043233655"/>
       </p:ext>
     </p:extLst>
   </p:cSld>
@@ -21101,7 +21316,13 @@
   <p:cSld>
     <p:spTree>
       <p:nvGrpSpPr>
-        <p:cNvPr id="1" name=""/>
+        <p:cNvPr id="1" name="">
+          <a:extLst>
+            <a:ext uri="{FF2B5EF4-FFF2-40B4-BE49-F238E27FC236}">
+              <a16:creationId xmlns:a16="http://schemas.microsoft.com/office/drawing/2014/main" id="{452AA0CE-FACE-AFEA-5BA9-73E3BE39B40F}"/>
+            </a:ext>
+          </a:extLst>
+        </p:cNvPr>
         <p:cNvGrpSpPr/>
         <p:nvPr/>
       </p:nvGrpSpPr>
@@ -21118,7 +21339,7 @@
           <p:cNvPr id="2" name="Titre 1">
             <a:extLst>
               <a:ext uri="{FF2B5EF4-FFF2-40B4-BE49-F238E27FC236}">
-                <a16:creationId xmlns:a16="http://schemas.microsoft.com/office/drawing/2014/main" id="{906EA21C-F9ED-1447-83BB-6C6BEE43F6AA}"/>
+                <a16:creationId xmlns:a16="http://schemas.microsoft.com/office/drawing/2014/main" id="{F18AE822-3A37-ECB4-4ED5-2DDAA62291F7}"/>
               </a:ext>
             </a:extLst>
           </p:cNvPr>
@@ -21141,148 +21362,23 @@
                 </a:solidFill>
                 <a:latin typeface="Consolas" panose="020B0609020204030204" pitchFamily="49" charset="0"/>
               </a:rPr>
-              <a:t>/app/view/template.php</a:t>
-            </a:r>
-          </a:p>
-        </p:txBody>
-      </p:sp>
-      <p:sp>
-        <p:nvSpPr>
-          <p:cNvPr id="3" name="Espace réservé du contenu 2">
-            <a:extLst>
-              <a:ext uri="{FF2B5EF4-FFF2-40B4-BE49-F238E27FC236}">
-                <a16:creationId xmlns:a16="http://schemas.microsoft.com/office/drawing/2014/main" id="{02C9EE14-A50F-B8FF-9D19-4D6C469A6EB3}"/>
-              </a:ext>
-            </a:extLst>
-          </p:cNvPr>
-          <p:cNvSpPr>
-            <a:spLocks noGrp="1"/>
-          </p:cNvSpPr>
-          <p:nvPr>
-            <p:ph idx="1"/>
-          </p:nvPr>
-        </p:nvSpPr>
-        <p:spPr/>
-        <p:txBody>
-          <a:bodyPr>
-            <a:normAutofit/>
-          </a:bodyPr>
-          <a:lstStyle/>
-          <a:p>
-            <a:r>
-              <a:rPr lang="fr-BE"/>
-              <a:t>Inclusion du script </a:t>
-            </a:r>
-            <a:r>
-              <a:rPr lang="fr-BE">
-                <a:solidFill>
-                  <a:srgbClr val="996633"/>
-                </a:solidFill>
-                <a:latin typeface="Consolas" panose="020B0609020204030204" pitchFamily="49" charset="0"/>
-              </a:rPr>
-              <a:t>counter.js</a:t>
-            </a:r>
-            <a:r>
-              <a:rPr lang="fr-BE"/>
-              <a:t> sous </a:t>
-            </a:r>
-            <a:r>
-              <a:rPr lang="fr-BE">
-                <a:solidFill>
-                  <a:srgbClr val="996633"/>
-                </a:solidFill>
-                <a:latin typeface="Consolas" panose="020B0609020204030204" pitchFamily="49" charset="0"/>
-              </a:rPr>
-              <a:t>&lt;head&gt;</a:t>
-            </a:r>
-          </a:p>
-          <a:p>
-            <a:r>
-              <a:rPr lang="fr-BE" sz="3200">
-                <a:solidFill>
-                  <a:srgbClr val="996633"/>
-                </a:solidFill>
-                <a:latin typeface="Consolas" panose="020B0609020204030204" pitchFamily="49" charset="0"/>
-              </a:rPr>
-              <a:t>&lt;head&gt;</a:t>
-            </a:r>
-            <a:br>
-              <a:rPr lang="fr-BE" sz="3200">
-                <a:solidFill>
-                  <a:srgbClr val="996633"/>
-                </a:solidFill>
-                <a:latin typeface="Consolas" panose="020B0609020204030204" pitchFamily="49" charset="0"/>
-              </a:rPr>
-            </a:br>
-            <a:r>
-              <a:rPr lang="fr-BE" sz="3200">
-                <a:solidFill>
-                  <a:srgbClr val="996633"/>
-                </a:solidFill>
-                <a:latin typeface="Consolas" panose="020B0609020204030204" pitchFamily="49" charset="0"/>
-              </a:rPr>
-              <a:t>    …</a:t>
-            </a:r>
-            <a:br>
-              <a:rPr lang="fr-BE" sz="3200">
-                <a:solidFill>
-                  <a:srgbClr val="996633"/>
-                </a:solidFill>
-                <a:latin typeface="Consolas" panose="020B0609020204030204" pitchFamily="49" charset="0"/>
-              </a:rPr>
-            </a:br>
-            <a:r>
-              <a:rPr lang="fr-BE" sz="3200">
-                <a:solidFill>
-                  <a:srgbClr val="996633"/>
-                </a:solidFill>
-                <a:latin typeface="Consolas" panose="020B0609020204030204" pitchFamily="49" charset="0"/>
-              </a:rPr>
-              <a:t>    &lt;script src="./js/internal/counter.js"&gt;…</a:t>
-            </a:r>
-            <a:br>
-              <a:rPr lang="fr-BE" sz="3200">
-                <a:solidFill>
-                  <a:srgbClr val="996633"/>
-                </a:solidFill>
-                <a:latin typeface="Consolas" panose="020B0609020204030204" pitchFamily="49" charset="0"/>
-              </a:rPr>
-            </a:br>
-            <a:r>
-              <a:rPr lang="fr-BE" sz="3200">
-                <a:solidFill>
-                  <a:srgbClr val="996633"/>
-                </a:solidFill>
-                <a:latin typeface="Consolas" panose="020B0609020204030204" pitchFamily="49" charset="0"/>
-              </a:rPr>
-              <a:t>&lt;/head&gt;</a:t>
-            </a:r>
-            <a:br>
-              <a:rPr lang="fr-BE">
-                <a:solidFill>
-                  <a:srgbClr val="996633"/>
-                </a:solidFill>
-                <a:latin typeface="Consolas" panose="020B0609020204030204" pitchFamily="49" charset="0"/>
-              </a:rPr>
-            </a:br>
-            <a:endParaRPr lang="fr-BE">
+              <a:t>/app/controller/home.php</a:t>
+            </a:r>
+            <a:endParaRPr lang="fr-BE" b="0">
               <a:solidFill>
                 <a:srgbClr val="996633"/>
               </a:solidFill>
               <a:latin typeface="Consolas" panose="020B0609020204030204" pitchFamily="49" charset="0"/>
             </a:endParaRPr>
           </a:p>
-          <a:p>
-            <a:endParaRPr lang="fr-BE"/>
-          </a:p>
-        </p:txBody>
-      </p:sp>
-      <p:sp>
-        <p:nvSpPr>
-          <p:cNvPr id="4" name="Espace réservé de la date 3">
+        </p:txBody>
+      </p:sp>
+      <p:sp>
+        <p:nvSpPr>
+          <p:cNvPr id="3" name="Espace réservé du contenu 2">
             <a:extLst>
               <a:ext uri="{FF2B5EF4-FFF2-40B4-BE49-F238E27FC236}">
-                <a16:creationId xmlns:a16="http://schemas.microsoft.com/office/drawing/2014/main" id="{B6C944B1-746A-D2E0-0655-ACAABE5D2766}"/>
+                <a16:creationId xmlns:a16="http://schemas.microsoft.com/office/drawing/2014/main" id="{20E996EC-9C97-9AA7-DF94-BE6473E0B125}"/>
               </a:ext>
             </a:extLst>
           </p:cNvPr>
@@ -21290,7 +21386,7 @@
             <a:spLocks noGrp="1"/>
           </p:cNvSpPr>
           <p:nvPr>
-            <p:ph type="dt" sz="half" idx="10"/>
+            <p:ph idx="1"/>
           </p:nvPr>
         </p:nvSpPr>
         <p:spPr/>
@@ -21298,9 +21394,49 @@
           <a:bodyPr/>
           <a:lstStyle/>
           <a:p>
+            <a:r>
+              <a:rPr lang="fr-BE"/>
+              <a:t>Appel à la fonction PHP </a:t>
+            </a:r>
+            <a:r>
+              <a:rPr lang="fr-BE">
+                <a:solidFill>
+                  <a:srgbClr val="996633"/>
+                </a:solidFill>
+                <a:latin typeface="Consolas" panose="020B0609020204030204" pitchFamily="49" charset="0"/>
+              </a:rPr>
+              <a:t>html_fetch_sample()</a:t>
+            </a:r>
+          </a:p>
+          <a:p>
+            <a:endParaRPr lang="fr-BE"/>
+          </a:p>
+        </p:txBody>
+      </p:sp>
+      <p:sp>
+        <p:nvSpPr>
+          <p:cNvPr id="4" name="Espace réservé de la date 3">
+            <a:extLst>
+              <a:ext uri="{FF2B5EF4-FFF2-40B4-BE49-F238E27FC236}">
+                <a16:creationId xmlns:a16="http://schemas.microsoft.com/office/drawing/2014/main" id="{CD082CFB-0F96-2BBE-ED39-8D237083F4E7}"/>
+              </a:ext>
+            </a:extLst>
+          </p:cNvPr>
+          <p:cNvSpPr>
+            <a:spLocks noGrp="1"/>
+          </p:cNvSpPr>
+          <p:nvPr>
+            <p:ph type="dt" sz="half" idx="10"/>
+          </p:nvPr>
+        </p:nvSpPr>
+        <p:spPr/>
+        <p:txBody>
+          <a:bodyPr/>
+          <a:lstStyle/>
+          <a:p>
             <a:fld id="{50827A15-FE84-4468-BA37-282682579A39}" type="datetime1">
               <a:rPr lang="fr-BE" smtClean="0"/>
-              <a:t>23-02-26</a:t>
+              <a:t>02-03-26</a:t>
             </a:fld>
             <a:endParaRPr lang="fr-BE"/>
           </a:p>
@@ -21311,7 +21447,7 @@
           <p:cNvPr id="5" name="Espace réservé du numéro de diapositive 4">
             <a:extLst>
               <a:ext uri="{FF2B5EF4-FFF2-40B4-BE49-F238E27FC236}">
-                <a16:creationId xmlns:a16="http://schemas.microsoft.com/office/drawing/2014/main" id="{589A3468-182F-597E-E4CF-579677AF896A}"/>
+                <a16:creationId xmlns:a16="http://schemas.microsoft.com/office/drawing/2014/main" id="{81EBF5EE-BA92-B40A-342B-85457E5297E0}"/>
               </a:ext>
             </a:extLst>
           </p:cNvPr>
@@ -21338,7 +21474,7 @@
     </p:spTree>
     <p:extLst>
       <p:ext uri="{BB962C8B-B14F-4D97-AF65-F5344CB8AC3E}">
-        <p14:creationId xmlns:p14="http://schemas.microsoft.com/office/powerpoint/2010/main" val="1012161957"/>
+        <p14:creationId xmlns:p14="http://schemas.microsoft.com/office/powerpoint/2010/main" val="2769373972"/>
       </p:ext>
     </p:extLst>
   </p:cSld>
@@ -21382,7 +21518,7 @@
           <p:cNvPr id="2" name="Titre 1">
             <a:extLst>
               <a:ext uri="{FF2B5EF4-FFF2-40B4-BE49-F238E27FC236}">
-                <a16:creationId xmlns:a16="http://schemas.microsoft.com/office/drawing/2014/main" id="{A72ACF26-8DA0-9202-7817-9988EC8C393B}"/>
+                <a16:creationId xmlns:a16="http://schemas.microsoft.com/office/drawing/2014/main" id="{906EA21C-F9ED-1447-83BB-6C6BEE43F6AA}"/>
               </a:ext>
             </a:extLst>
           </p:cNvPr>
@@ -21405,23 +21541,148 @@
                 </a:solidFill>
                 <a:latin typeface="Consolas" panose="020B0609020204030204" pitchFamily="49" charset="0"/>
               </a:rPr>
-              <a:t>/app/view/home.php</a:t>
-            </a:r>
-            <a:endParaRPr lang="fr-BE" b="0">
+              <a:t>/app/view/template.php</a:t>
+            </a:r>
+          </a:p>
+        </p:txBody>
+      </p:sp>
+      <p:sp>
+        <p:nvSpPr>
+          <p:cNvPr id="3" name="Espace réservé du contenu 2">
+            <a:extLst>
+              <a:ext uri="{FF2B5EF4-FFF2-40B4-BE49-F238E27FC236}">
+                <a16:creationId xmlns:a16="http://schemas.microsoft.com/office/drawing/2014/main" id="{02C9EE14-A50F-B8FF-9D19-4D6C469A6EB3}"/>
+              </a:ext>
+            </a:extLst>
+          </p:cNvPr>
+          <p:cNvSpPr>
+            <a:spLocks noGrp="1"/>
+          </p:cNvSpPr>
+          <p:nvPr>
+            <p:ph idx="1"/>
+          </p:nvPr>
+        </p:nvSpPr>
+        <p:spPr/>
+        <p:txBody>
+          <a:bodyPr>
+            <a:normAutofit/>
+          </a:bodyPr>
+          <a:lstStyle/>
+          <a:p>
+            <a:r>
+              <a:rPr lang="fr-BE"/>
+              <a:t>Inclusion du script </a:t>
+            </a:r>
+            <a:r>
+              <a:rPr lang="fr-BE">
+                <a:solidFill>
+                  <a:srgbClr val="996633"/>
+                </a:solidFill>
+                <a:latin typeface="Consolas" panose="020B0609020204030204" pitchFamily="49" charset="0"/>
+              </a:rPr>
+              <a:t>counter.js</a:t>
+            </a:r>
+            <a:r>
+              <a:rPr lang="fr-BE"/>
+              <a:t> sous </a:t>
+            </a:r>
+            <a:r>
+              <a:rPr lang="fr-BE">
+                <a:solidFill>
+                  <a:srgbClr val="996633"/>
+                </a:solidFill>
+                <a:latin typeface="Consolas" panose="020B0609020204030204" pitchFamily="49" charset="0"/>
+              </a:rPr>
+              <a:t>&lt;head&gt;</a:t>
+            </a:r>
+          </a:p>
+          <a:p>
+            <a:r>
+              <a:rPr lang="fr-BE" sz="3200">
+                <a:solidFill>
+                  <a:srgbClr val="996633"/>
+                </a:solidFill>
+                <a:latin typeface="Consolas" panose="020B0609020204030204" pitchFamily="49" charset="0"/>
+              </a:rPr>
+              <a:t>&lt;head&gt;</a:t>
+            </a:r>
+            <a:br>
+              <a:rPr lang="fr-BE" sz="3200">
+                <a:solidFill>
+                  <a:srgbClr val="996633"/>
+                </a:solidFill>
+                <a:latin typeface="Consolas" panose="020B0609020204030204" pitchFamily="49" charset="0"/>
+              </a:rPr>
+            </a:br>
+            <a:r>
+              <a:rPr lang="fr-BE" sz="3200">
+                <a:solidFill>
+                  <a:srgbClr val="996633"/>
+                </a:solidFill>
+                <a:latin typeface="Consolas" panose="020B0609020204030204" pitchFamily="49" charset="0"/>
+              </a:rPr>
+              <a:t>    …</a:t>
+            </a:r>
+            <a:br>
+              <a:rPr lang="fr-BE" sz="3200">
+                <a:solidFill>
+                  <a:srgbClr val="996633"/>
+                </a:solidFill>
+                <a:latin typeface="Consolas" panose="020B0609020204030204" pitchFamily="49" charset="0"/>
+              </a:rPr>
+            </a:br>
+            <a:r>
+              <a:rPr lang="fr-BE" sz="3200">
+                <a:solidFill>
+                  <a:srgbClr val="996633"/>
+                </a:solidFill>
+                <a:latin typeface="Consolas" panose="020B0609020204030204" pitchFamily="49" charset="0"/>
+              </a:rPr>
+              <a:t>    &lt;script src="./js/internal/counter.js"&gt;…</a:t>
+            </a:r>
+            <a:br>
+              <a:rPr lang="fr-BE" sz="3200">
+                <a:solidFill>
+                  <a:srgbClr val="996633"/>
+                </a:solidFill>
+                <a:latin typeface="Consolas" panose="020B0609020204030204" pitchFamily="49" charset="0"/>
+              </a:rPr>
+            </a:br>
+            <a:r>
+              <a:rPr lang="fr-BE" sz="3200">
+                <a:solidFill>
+                  <a:srgbClr val="996633"/>
+                </a:solidFill>
+                <a:latin typeface="Consolas" panose="020B0609020204030204" pitchFamily="49" charset="0"/>
+              </a:rPr>
+              <a:t>&lt;/head&gt;</a:t>
+            </a:r>
+            <a:br>
+              <a:rPr lang="fr-BE">
+                <a:solidFill>
+                  <a:srgbClr val="996633"/>
+                </a:solidFill>
+                <a:latin typeface="Consolas" panose="020B0609020204030204" pitchFamily="49" charset="0"/>
+              </a:rPr>
+            </a:br>
+            <a:endParaRPr lang="fr-BE">
               <a:solidFill>
                 <a:srgbClr val="996633"/>
               </a:solidFill>
               <a:latin typeface="Consolas" panose="020B0609020204030204" pitchFamily="49" charset="0"/>
             </a:endParaRPr>
           </a:p>
-        </p:txBody>
-      </p:sp>
-      <p:sp>
-        <p:nvSpPr>
-          <p:cNvPr id="3" name="Espace réservé du contenu 2">
+          <a:p>
+            <a:endParaRPr lang="fr-BE"/>
+          </a:p>
+        </p:txBody>
+      </p:sp>
+      <p:sp>
+        <p:nvSpPr>
+          <p:cNvPr id="4" name="Espace réservé de la date 3">
             <a:extLst>
               <a:ext uri="{FF2B5EF4-FFF2-40B4-BE49-F238E27FC236}">
-                <a16:creationId xmlns:a16="http://schemas.microsoft.com/office/drawing/2014/main" id="{C39B9EBE-2ABC-1762-4C9C-264D1848FDF0}"/>
+                <a16:creationId xmlns:a16="http://schemas.microsoft.com/office/drawing/2014/main" id="{B6C944B1-746A-D2E0-0655-ACAABE5D2766}"/>
               </a:ext>
             </a:extLst>
           </p:cNvPr>
@@ -21429,7 +21690,7 @@
             <a:spLocks noGrp="1"/>
           </p:cNvSpPr>
           <p:nvPr>
-            <p:ph idx="1"/>
+            <p:ph type="dt" sz="half" idx="10"/>
           </p:nvPr>
         </p:nvSpPr>
         <p:spPr/>
@@ -21437,74 +21698,9 @@
           <a:bodyPr/>
           <a:lstStyle/>
           <a:p>
-            <a:r>
-              <a:rPr lang="fr-BE"/>
-              <a:t>Déclaration de </a:t>
-            </a:r>
-            <a:r>
-              <a:rPr lang="fr-BE">
-                <a:solidFill>
-                  <a:srgbClr val="996633"/>
-                </a:solidFill>
-                <a:latin typeface="Consolas" panose="020B0609020204030204" pitchFamily="49" charset="0"/>
-              </a:rPr>
-              <a:t>html_fetch_sample()</a:t>
-            </a:r>
-          </a:p>
-          <a:p>
-            <a:pPr lvl="1"/>
-            <a:r>
-              <a:rPr lang="fr-BE">
-                <a:solidFill>
-                  <a:srgbClr val="996633"/>
-                </a:solidFill>
-                <a:latin typeface="Consolas" panose="020B0609020204030204" pitchFamily="49" charset="0"/>
-              </a:rPr>
-              <a:t>button, id="b_compteur"</a:t>
-            </a:r>
-          </a:p>
-          <a:p>
-            <a:pPr lvl="1"/>
-            <a:r>
-              <a:rPr lang="fr-BE">
-                <a:solidFill>
-                  <a:srgbClr val="996633"/>
-                </a:solidFill>
-                <a:latin typeface="Consolas" panose="020B0609020204030204" pitchFamily="49" charset="0"/>
-              </a:rPr>
-              <a:t>span, id="compteur"</a:t>
-            </a:r>
-          </a:p>
-          <a:p>
-            <a:pPr lvl="1"/>
-            <a:endParaRPr lang="fr-BE"/>
-          </a:p>
-        </p:txBody>
-      </p:sp>
-      <p:sp>
-        <p:nvSpPr>
-          <p:cNvPr id="4" name="Espace réservé de la date 3">
-            <a:extLst>
-              <a:ext uri="{FF2B5EF4-FFF2-40B4-BE49-F238E27FC236}">
-                <a16:creationId xmlns:a16="http://schemas.microsoft.com/office/drawing/2014/main" id="{D51F1137-B8CF-A32D-048D-A8AF6232CC17}"/>
-              </a:ext>
-            </a:extLst>
-          </p:cNvPr>
-          <p:cNvSpPr>
-            <a:spLocks noGrp="1"/>
-          </p:cNvSpPr>
-          <p:nvPr>
-            <p:ph type="dt" sz="half" idx="10"/>
-          </p:nvPr>
-        </p:nvSpPr>
-        <p:spPr/>
-        <p:txBody>
-          <a:bodyPr/>
-          <a:lstStyle/>
-          <a:p>
-            <a:fld id="{A122A0FB-B2F5-4CDD-B3CD-9FB3D075AA52}" type="datetime1">
+            <a:fld id="{50827A15-FE84-4468-BA37-282682579A39}" type="datetime1">
               <a:rPr lang="fr-BE" smtClean="0"/>
-              <a:t>23-02-26</a:t>
+              <a:t>02-03-26</a:t>
             </a:fld>
             <a:endParaRPr lang="fr-BE"/>
           </a:p>
@@ -21515,7 +21711,7 @@
           <p:cNvPr id="5" name="Espace réservé du numéro de diapositive 4">
             <a:extLst>
               <a:ext uri="{FF2B5EF4-FFF2-40B4-BE49-F238E27FC236}">
-                <a16:creationId xmlns:a16="http://schemas.microsoft.com/office/drawing/2014/main" id="{E6889981-8764-8AAE-6470-4D251789B2CF}"/>
+                <a16:creationId xmlns:a16="http://schemas.microsoft.com/office/drawing/2014/main" id="{589A3468-182F-597E-E4CF-579677AF896A}"/>
               </a:ext>
             </a:extLst>
           </p:cNvPr>
@@ -21542,7 +21738,7 @@
     </p:spTree>
     <p:extLst>
       <p:ext uri="{BB962C8B-B14F-4D97-AF65-F5344CB8AC3E}">
-        <p14:creationId xmlns:p14="http://schemas.microsoft.com/office/powerpoint/2010/main" val="1445958329"/>
+        <p14:creationId xmlns:p14="http://schemas.microsoft.com/office/powerpoint/2010/main" val="1012161957"/>
       </p:ext>
     </p:extLst>
   </p:cSld>
@@ -21569,13 +21765,7 @@
   <p:cSld>
     <p:spTree>
       <p:nvGrpSpPr>
-        <p:cNvPr id="1" name="">
-          <a:extLst>
-            <a:ext uri="{FF2B5EF4-FFF2-40B4-BE49-F238E27FC236}">
-              <a16:creationId xmlns:a16="http://schemas.microsoft.com/office/drawing/2014/main" id="{2E3C016D-8BAE-6F4F-3457-B5BB5EF35F11}"/>
-            </a:ext>
-          </a:extLst>
-        </p:cNvPr>
+        <p:cNvPr id="1" name=""/>
         <p:cNvGrpSpPr/>
         <p:nvPr/>
       </p:nvGrpSpPr>
@@ -21592,7 +21782,7 @@
           <p:cNvPr id="2" name="Titre 1">
             <a:extLst>
               <a:ext uri="{FF2B5EF4-FFF2-40B4-BE49-F238E27FC236}">
-                <a16:creationId xmlns:a16="http://schemas.microsoft.com/office/drawing/2014/main" id="{371165AE-4F72-3A82-C78F-AB55D070EE7A}"/>
+                <a16:creationId xmlns:a16="http://schemas.microsoft.com/office/drawing/2014/main" id="{A72ACF26-8DA0-9202-7817-9988EC8C393B}"/>
               </a:ext>
             </a:extLst>
           </p:cNvPr>
@@ -21615,8 +21805,14 @@
                 </a:solidFill>
                 <a:latin typeface="Consolas" panose="020B0609020204030204" pitchFamily="49" charset="0"/>
               </a:rPr>
-              <a:t>/public/js/internal/counter.js</a:t>
-            </a:r>
+              <a:t>/app/view/home.php</a:t>
+            </a:r>
+            <a:endParaRPr lang="fr-BE" b="0">
+              <a:solidFill>
+                <a:srgbClr val="996633"/>
+              </a:solidFill>
+              <a:latin typeface="Consolas" panose="020B0609020204030204" pitchFamily="49" charset="0"/>
+            </a:endParaRPr>
           </a:p>
         </p:txBody>
       </p:sp>
@@ -21625,7 +21821,7 @@
           <p:cNvPr id="3" name="Espace réservé du contenu 2">
             <a:extLst>
               <a:ext uri="{FF2B5EF4-FFF2-40B4-BE49-F238E27FC236}">
-                <a16:creationId xmlns:a16="http://schemas.microsoft.com/office/drawing/2014/main" id="{E932E900-7836-F408-8FD4-8CF8A8F9C871}"/>
+                <a16:creationId xmlns:a16="http://schemas.microsoft.com/office/drawing/2014/main" id="{C39B9EBE-2ABC-1762-4C9C-264D1848FDF0}"/>
               </a:ext>
             </a:extLst>
           </p:cNvPr>
@@ -21638,14 +21834,12 @@
         </p:nvSpPr>
         <p:spPr/>
         <p:txBody>
-          <a:bodyPr>
-            <a:normAutofit/>
-          </a:bodyPr>
+          <a:bodyPr/>
           <a:lstStyle/>
           <a:p>
             <a:r>
               <a:rPr lang="fr-BE"/>
-              <a:t>Définition des évènements sur le bouton </a:t>
+              <a:t>Déclaration de </a:t>
             </a:r>
             <a:r>
               <a:rPr lang="fr-BE">
@@ -21654,58 +21848,35 @@
                 </a:solidFill>
                 <a:latin typeface="Consolas" panose="020B0609020204030204" pitchFamily="49" charset="0"/>
               </a:rPr>
-              <a:t>b_compteur</a:t>
+              <a:t>html_fetch_sample()</a:t>
             </a:r>
           </a:p>
           <a:p>
             <a:pPr lvl="1"/>
             <a:r>
-              <a:rPr lang="fr-BE"/>
-              <a:t>click</a:t>
+              <a:rPr lang="fr-BE">
+                <a:solidFill>
+                  <a:srgbClr val="996633"/>
+                </a:solidFill>
+                <a:latin typeface="Consolas" panose="020B0609020204030204" pitchFamily="49" charset="0"/>
+              </a:rPr>
+              <a:t>button, id="b_compteur"</a:t>
             </a:r>
           </a:p>
           <a:p>
             <a:pPr lvl="1"/>
             <a:r>
-              <a:rPr lang="fr-BE"/>
-              <a:t>callback : </a:t>
-            </a:r>
-            <a:r>
               <a:rPr lang="fr-BE">
                 <a:solidFill>
                   <a:srgbClr val="996633"/>
                 </a:solidFill>
                 <a:latin typeface="Consolas" panose="020B0609020204030204" pitchFamily="49" charset="0"/>
               </a:rPr>
-              <a:t>getset_counter("increment")</a:t>
-            </a:r>
-          </a:p>
-          <a:p>
-            <a:r>
-              <a:rPr lang="fr-BE"/>
-              <a:t>Initialisation du compteur (chargement de la page)</a:t>
+              <a:t>span, id="compteur"</a:t>
             </a:r>
           </a:p>
           <a:p>
             <a:pPr lvl="1"/>
-            <a:r>
-              <a:rPr lang="fr-BE"/>
-              <a:t>appel à </a:t>
-            </a:r>
-            <a:r>
-              <a:rPr lang="fr-BE">
-                <a:solidFill>
-                  <a:srgbClr val="996633"/>
-                </a:solidFill>
-                <a:latin typeface="Consolas" panose="020B0609020204030204" pitchFamily="49" charset="0"/>
-              </a:rPr>
-              <a:t>getset_counter("get");</a:t>
-            </a:r>
-          </a:p>
-          <a:p>
-            <a:endParaRPr lang="fr-BE"/>
-          </a:p>
-          <a:p>
             <a:endParaRPr lang="fr-BE"/>
           </a:p>
         </p:txBody>
@@ -21715,7 +21886,7 @@
           <p:cNvPr id="4" name="Espace réservé de la date 3">
             <a:extLst>
               <a:ext uri="{FF2B5EF4-FFF2-40B4-BE49-F238E27FC236}">
-                <a16:creationId xmlns:a16="http://schemas.microsoft.com/office/drawing/2014/main" id="{2EFF85E2-0CCD-4C21-F799-876FC23A4AED}"/>
+                <a16:creationId xmlns:a16="http://schemas.microsoft.com/office/drawing/2014/main" id="{D51F1137-B8CF-A32D-048D-A8AF6232CC17}"/>
               </a:ext>
             </a:extLst>
           </p:cNvPr>
@@ -21733,7 +21904,7 @@
           <a:p>
             <a:fld id="{A122A0FB-B2F5-4CDD-B3CD-9FB3D075AA52}" type="datetime1">
               <a:rPr lang="fr-BE" smtClean="0"/>
-              <a:t>23-02-26</a:t>
+              <a:t>02-03-26</a:t>
             </a:fld>
             <a:endParaRPr lang="fr-BE"/>
           </a:p>
@@ -21744,7 +21915,7 @@
           <p:cNvPr id="5" name="Espace réservé du numéro de diapositive 4">
             <a:extLst>
               <a:ext uri="{FF2B5EF4-FFF2-40B4-BE49-F238E27FC236}">
-                <a16:creationId xmlns:a16="http://schemas.microsoft.com/office/drawing/2014/main" id="{B4C00060-C998-ACA5-068A-D82B34F08B08}"/>
+                <a16:creationId xmlns:a16="http://schemas.microsoft.com/office/drawing/2014/main" id="{E6889981-8764-8AAE-6470-4D251789B2CF}"/>
               </a:ext>
             </a:extLst>
           </p:cNvPr>
@@ -21771,7 +21942,7 @@
     </p:spTree>
     <p:extLst>
       <p:ext uri="{BB962C8B-B14F-4D97-AF65-F5344CB8AC3E}">
-        <p14:creationId xmlns:p14="http://schemas.microsoft.com/office/powerpoint/2010/main" val="134501863"/>
+        <p14:creationId xmlns:p14="http://schemas.microsoft.com/office/powerpoint/2010/main" val="1445958329"/>
       </p:ext>
     </p:extLst>
   </p:cSld>
@@ -21801,7 +21972,7 @@
         <p:cNvPr id="1" name="">
           <a:extLst>
             <a:ext uri="{FF2B5EF4-FFF2-40B4-BE49-F238E27FC236}">
-              <a16:creationId xmlns:a16="http://schemas.microsoft.com/office/drawing/2014/main" id="{D7E703C5-0047-2712-BD90-262D9E54711B}"/>
+              <a16:creationId xmlns:a16="http://schemas.microsoft.com/office/drawing/2014/main" id="{2E3C016D-8BAE-6F4F-3457-B5BB5EF35F11}"/>
             </a:ext>
           </a:extLst>
         </p:cNvPr>
@@ -21821,7 +21992,7 @@
           <p:cNvPr id="2" name="Titre 1">
             <a:extLst>
               <a:ext uri="{FF2B5EF4-FFF2-40B4-BE49-F238E27FC236}">
-                <a16:creationId xmlns:a16="http://schemas.microsoft.com/office/drawing/2014/main" id="{3BA6C1AA-ED32-DD12-0D9E-3511D26D1D36}"/>
+                <a16:creationId xmlns:a16="http://schemas.microsoft.com/office/drawing/2014/main" id="{371165AE-4F72-3A82-C78F-AB55D070EE7A}"/>
               </a:ext>
             </a:extLst>
           </p:cNvPr>
@@ -21854,7 +22025,7 @@
           <p:cNvPr id="3" name="Espace réservé du contenu 2">
             <a:extLst>
               <a:ext uri="{FF2B5EF4-FFF2-40B4-BE49-F238E27FC236}">
-                <a16:creationId xmlns:a16="http://schemas.microsoft.com/office/drawing/2014/main" id="{D3FC5672-56B2-3C3F-2CFF-2458EC8169F5}"/>
+                <a16:creationId xmlns:a16="http://schemas.microsoft.com/office/drawing/2014/main" id="{E932E900-7836-F408-8FD4-8CF8A8F9C871}"/>
               </a:ext>
             </a:extLst>
           </p:cNvPr>
@@ -21865,21 +22036,16 @@
             <p:ph idx="1"/>
           </p:nvPr>
         </p:nvSpPr>
-        <p:spPr>
-          <a:xfrm>
-            <a:off x="838200" y="1690689"/>
-            <a:ext cx="10515600" cy="5030786"/>
-          </a:xfrm>
-        </p:spPr>
+        <p:spPr/>
         <p:txBody>
           <a:bodyPr>
-            <a:normAutofit fontScale="92500" lnSpcReduction="10000"/>
+            <a:normAutofit/>
           </a:bodyPr>
           <a:lstStyle/>
           <a:p>
             <a:r>
               <a:rPr lang="fr-BE"/>
-              <a:t>Déclaration de la fonction JS </a:t>
+              <a:t>Définition des évènements sur le bouton </a:t>
             </a:r>
             <a:r>
               <a:rPr lang="fr-BE">
@@ -21888,26 +22054,43 @@
                 </a:solidFill>
                 <a:latin typeface="Consolas" panose="020B0609020204030204" pitchFamily="49" charset="0"/>
               </a:rPr>
-              <a:t>getset_counter(action)</a:t>
+              <a:t>b_compteur</a:t>
             </a:r>
           </a:p>
           <a:p>
             <a:pPr lvl="1"/>
             <a:r>
+              <a:rPr lang="fr-BE"/>
+              <a:t>click</a:t>
+            </a:r>
+          </a:p>
+          <a:p>
+            <a:pPr lvl="1"/>
+            <a:r>
+              <a:rPr lang="fr-BE"/>
+              <a:t>callback : </a:t>
+            </a:r>
+            <a:r>
               <a:rPr lang="fr-BE">
                 <a:solidFill>
                   <a:srgbClr val="996633"/>
                 </a:solidFill>
                 <a:latin typeface="Consolas" panose="020B0609020204030204" pitchFamily="49" charset="0"/>
               </a:rPr>
-              <a:t>param </a:t>
-            </a:r>
-          </a:p>
-          <a:p>
-            <a:pPr lvl="2"/>
+              <a:t>getset_counter("increment")</a:t>
+            </a:r>
+          </a:p>
+          <a:p>
             <a:r>
               <a:rPr lang="fr-BE"/>
-              <a:t>contient e.a. : </a:t>
+              <a:t>Initialisation du compteur (chargement de la page)</a:t>
+            </a:r>
+          </a:p>
+          <a:p>
+            <a:pPr lvl="1"/>
+            <a:r>
+              <a:rPr lang="fr-BE"/>
+              <a:t>appel à </a:t>
             </a:r>
             <a:r>
               <a:rPr lang="fr-BE">
@@ -21916,169 +22099,7 @@
                 </a:solidFill>
                 <a:latin typeface="Consolas" panose="020B0609020204030204" pitchFamily="49" charset="0"/>
               </a:rPr>
-              <a:t>{</a:t>
-            </a:r>
-            <a:br>
-              <a:rPr lang="fr-BE">
-                <a:solidFill>
-                  <a:srgbClr val="996633"/>
-                </a:solidFill>
-                <a:latin typeface="Consolas" panose="020B0609020204030204" pitchFamily="49" charset="0"/>
-              </a:rPr>
-            </a:br>
-            <a:r>
-              <a:rPr lang="fr-BE">
-                <a:solidFill>
-                  <a:srgbClr val="996633"/>
-                </a:solidFill>
-                <a:latin typeface="Consolas" panose="020B0609020204030204" pitchFamily="49" charset="0"/>
-              </a:rPr>
-              <a:t>    header : "application/json",</a:t>
-            </a:r>
-            <a:br>
-              <a:rPr lang="fr-BE">
-                <a:solidFill>
-                  <a:srgbClr val="996633"/>
-                </a:solidFill>
-                <a:latin typeface="Consolas" panose="020B0609020204030204" pitchFamily="49" charset="0"/>
-              </a:rPr>
-            </a:br>
-            <a:r>
-              <a:rPr lang="fr-BE">
-                <a:solidFill>
-                  <a:srgbClr val="996633"/>
-                </a:solidFill>
-                <a:latin typeface="Consolas" panose="020B0609020204030204" pitchFamily="49" charset="0"/>
-              </a:rPr>
-              <a:t>    page : "counter_fetch",</a:t>
-            </a:r>
-            <a:br>
-              <a:rPr lang="fr-BE">
-                <a:solidFill>
-                  <a:srgbClr val="996633"/>
-                </a:solidFill>
-                <a:latin typeface="Consolas" panose="020B0609020204030204" pitchFamily="49" charset="0"/>
-              </a:rPr>
-            </a:br>
-            <a:r>
-              <a:rPr lang="fr-BE">
-                <a:solidFill>
-                  <a:srgbClr val="996633"/>
-                </a:solidFill>
-                <a:latin typeface="Consolas" panose="020B0609020204030204" pitchFamily="49" charset="0"/>
-              </a:rPr>
-              <a:t>}</a:t>
-            </a:r>
-          </a:p>
-          <a:p>
-            <a:pPr lvl="2"/>
-            <a:r>
-              <a:rPr lang="fr-BE"/>
-              <a:t>aiguillage de la requête sur le serveur </a:t>
-            </a:r>
-          </a:p>
-          <a:p>
-            <a:pPr lvl="1"/>
-            <a:r>
-              <a:rPr lang="fr-BE">
-                <a:solidFill>
-                  <a:srgbClr val="996633"/>
-                </a:solidFill>
-                <a:latin typeface="Consolas" panose="020B0609020204030204" pitchFamily="49" charset="0"/>
-              </a:rPr>
-              <a:t>fetch</a:t>
-            </a:r>
-          </a:p>
-          <a:p>
-            <a:pPr lvl="2"/>
-            <a:r>
-              <a:rPr lang="fr-BE"/>
-              <a:t>URL : </a:t>
-            </a:r>
-            <a:r>
-              <a:rPr lang="fr-BE">
-                <a:solidFill>
-                  <a:srgbClr val="996633"/>
-                </a:solidFill>
-                <a:latin typeface="Consolas" panose="020B0609020204030204" pitchFamily="49" charset="0"/>
-              </a:rPr>
-              <a:t>window.location.pathname</a:t>
-            </a:r>
-            <a:r>
-              <a:rPr lang="fr-BE"/>
-              <a:t>, càd le path courant</a:t>
-            </a:r>
-          </a:p>
-          <a:p>
-            <a:pPr lvl="2"/>
-            <a:r>
-              <a:rPr lang="fr-BE"/>
-              <a:t>envoie </a:t>
-            </a:r>
-            <a:r>
-              <a:rPr lang="fr-BE">
-                <a:solidFill>
-                  <a:srgbClr val="996633"/>
-                </a:solidFill>
-                <a:latin typeface="Consolas" panose="020B0609020204030204" pitchFamily="49" charset="0"/>
-              </a:rPr>
-              <a:t>param</a:t>
-            </a:r>
-          </a:p>
-          <a:p>
-            <a:pPr lvl="2"/>
-            <a:r>
-              <a:rPr lang="fr-BE"/>
-              <a:t>reçoit du </a:t>
-            </a:r>
-            <a:r>
-              <a:rPr lang="fr-BE">
-                <a:solidFill>
-                  <a:srgbClr val="996633"/>
-                </a:solidFill>
-                <a:latin typeface="Consolas" panose="020B0609020204030204" pitchFamily="49" charset="0"/>
-              </a:rPr>
-              <a:t>JSON</a:t>
-            </a:r>
-            <a:r>
-              <a:rPr lang="fr-BE"/>
-              <a:t> en retour</a:t>
-            </a:r>
-          </a:p>
-          <a:p>
-            <a:pPr lvl="2"/>
-            <a:r>
-              <a:rPr lang="fr-BE"/>
-              <a:t>valide le </a:t>
-            </a:r>
-            <a:r>
-              <a:rPr lang="fr-BE">
-                <a:solidFill>
-                  <a:srgbClr val="996633"/>
-                </a:solidFill>
-                <a:latin typeface="Consolas" panose="020B0609020204030204" pitchFamily="49" charset="0"/>
-              </a:rPr>
-              <a:t>JSON</a:t>
-            </a:r>
-          </a:p>
-          <a:p>
-            <a:pPr lvl="2"/>
-            <a:r>
-              <a:rPr lang="fr-BE"/>
-              <a:t>traite le </a:t>
-            </a:r>
-            <a:r>
-              <a:rPr lang="fr-BE">
-                <a:solidFill>
-                  <a:srgbClr val="996633"/>
-                </a:solidFill>
-                <a:latin typeface="Consolas" panose="020B0609020204030204" pitchFamily="49" charset="0"/>
-              </a:rPr>
-              <a:t>JSON</a:t>
-            </a:r>
-            <a:r>
-              <a:rPr lang="fr-BE"/>
-              <a:t> : affichage de la nouvelle valeur du compteur</a:t>
+              <a:t>getset_counter("get");</a:t>
             </a:r>
           </a:p>
           <a:p>
@@ -22094,7 +22115,7 @@
           <p:cNvPr id="4" name="Espace réservé de la date 3">
             <a:extLst>
               <a:ext uri="{FF2B5EF4-FFF2-40B4-BE49-F238E27FC236}">
-                <a16:creationId xmlns:a16="http://schemas.microsoft.com/office/drawing/2014/main" id="{B0542EAF-0EE2-3600-1CAB-139ECCE4201E}"/>
+                <a16:creationId xmlns:a16="http://schemas.microsoft.com/office/drawing/2014/main" id="{2EFF85E2-0CCD-4C21-F799-876FC23A4AED}"/>
               </a:ext>
             </a:extLst>
           </p:cNvPr>
@@ -22112,7 +22133,7 @@
           <a:p>
             <a:fld id="{A122A0FB-B2F5-4CDD-B3CD-9FB3D075AA52}" type="datetime1">
               <a:rPr lang="fr-BE" smtClean="0"/>
-              <a:t>23-02-26</a:t>
+              <a:t>02-03-26</a:t>
             </a:fld>
             <a:endParaRPr lang="fr-BE"/>
           </a:p>
@@ -22123,7 +22144,7 @@
           <p:cNvPr id="5" name="Espace réservé du numéro de diapositive 4">
             <a:extLst>
               <a:ext uri="{FF2B5EF4-FFF2-40B4-BE49-F238E27FC236}">
-                <a16:creationId xmlns:a16="http://schemas.microsoft.com/office/drawing/2014/main" id="{CC553969-90DF-0DAC-6B28-C08F4C0B7A49}"/>
+                <a16:creationId xmlns:a16="http://schemas.microsoft.com/office/drawing/2014/main" id="{B4C00060-C998-ACA5-068A-D82B34F08B08}"/>
               </a:ext>
             </a:extLst>
           </p:cNvPr>
@@ -22150,7 +22171,7 @@
     </p:spTree>
     <p:extLst>
       <p:ext uri="{BB962C8B-B14F-4D97-AF65-F5344CB8AC3E}">
-        <p14:creationId xmlns:p14="http://schemas.microsoft.com/office/powerpoint/2010/main" val="2818028877"/>
+        <p14:creationId xmlns:p14="http://schemas.microsoft.com/office/powerpoint/2010/main" val="134501863"/>
       </p:ext>
     </p:extLst>
   </p:cSld>
@@ -22441,7 +22462,7 @@
         <p:cNvPr id="1" name="">
           <a:extLst>
             <a:ext uri="{FF2B5EF4-FFF2-40B4-BE49-F238E27FC236}">
-              <a16:creationId xmlns:a16="http://schemas.microsoft.com/office/drawing/2014/main" id="{6273970B-404A-2177-7E6A-1F6EAE4A6EF5}"/>
+              <a16:creationId xmlns:a16="http://schemas.microsoft.com/office/drawing/2014/main" id="{D7E703C5-0047-2712-BD90-262D9E54711B}"/>
             </a:ext>
           </a:extLst>
         </p:cNvPr>
@@ -22461,7 +22482,7 @@
           <p:cNvPr id="2" name="Titre 1">
             <a:extLst>
               <a:ext uri="{FF2B5EF4-FFF2-40B4-BE49-F238E27FC236}">
-                <a16:creationId xmlns:a16="http://schemas.microsoft.com/office/drawing/2014/main" id="{53EAFCF3-5DE1-158C-E4B3-FEA9E62BB761}"/>
+                <a16:creationId xmlns:a16="http://schemas.microsoft.com/office/drawing/2014/main" id="{3BA6C1AA-ED32-DD12-0D9E-3511D26D1D36}"/>
               </a:ext>
             </a:extLst>
           </p:cNvPr>
@@ -22484,7 +22505,7 @@
                 </a:solidFill>
                 <a:latin typeface="Consolas" panose="020B0609020204030204" pitchFamily="49" charset="0"/>
               </a:rPr>
-              <a:t>/app/controller/counter_fetch.php</a:t>
+              <a:t>/public/js/internal/counter.js</a:t>
             </a:r>
           </a:p>
         </p:txBody>
@@ -22494,7 +22515,7 @@
           <p:cNvPr id="3" name="Espace réservé du contenu 2">
             <a:extLst>
               <a:ext uri="{FF2B5EF4-FFF2-40B4-BE49-F238E27FC236}">
-                <a16:creationId xmlns:a16="http://schemas.microsoft.com/office/drawing/2014/main" id="{95231676-90B7-F528-5E26-A7F53179E3B2}"/>
+                <a16:creationId xmlns:a16="http://schemas.microsoft.com/office/drawing/2014/main" id="{D3FC5672-56B2-3C3F-2CFF-2458EC8169F5}"/>
               </a:ext>
             </a:extLst>
           </p:cNvPr>
@@ -22519,7 +22540,7 @@
           <a:p>
             <a:r>
               <a:rPr lang="fr-BE"/>
-              <a:t>Déclaration fonction PHP </a:t>
+              <a:t>Déclaration de la fonction JS </a:t>
             </a:r>
             <a:r>
               <a:rPr lang="fr-BE">
@@ -22528,40 +22549,148 @@
                 </a:solidFill>
                 <a:latin typeface="Consolas" panose="020B0609020204030204" pitchFamily="49" charset="0"/>
               </a:rPr>
-              <a:t>main_counter_fetch()</a:t>
-            </a:r>
-          </a:p>
-          <a:p>
+              <a:t>getset_counter(action)</a:t>
+            </a:r>
+          </a:p>
+          <a:p>
+            <a:pPr lvl="1"/>
+            <a:r>
+              <a:rPr lang="fr-BE">
+                <a:solidFill>
+                  <a:srgbClr val="996633"/>
+                </a:solidFill>
+                <a:latin typeface="Consolas" panose="020B0609020204030204" pitchFamily="49" charset="0"/>
+              </a:rPr>
+              <a:t>param </a:t>
+            </a:r>
+          </a:p>
+          <a:p>
+            <a:pPr lvl="2"/>
             <a:r>
               <a:rPr lang="fr-BE"/>
-              <a:t>Traitement du compteur </a:t>
+              <a:t>contient e.a. : </a:t>
+            </a:r>
+            <a:r>
+              <a:rPr lang="fr-BE">
+                <a:solidFill>
+                  <a:srgbClr val="996633"/>
+                </a:solidFill>
+                <a:latin typeface="Consolas" panose="020B0609020204030204" pitchFamily="49" charset="0"/>
+              </a:rPr>
+              <a:t>{</a:t>
+            </a:r>
+            <a:br>
+              <a:rPr lang="fr-BE">
+                <a:solidFill>
+                  <a:srgbClr val="996633"/>
+                </a:solidFill>
+                <a:latin typeface="Consolas" panose="020B0609020204030204" pitchFamily="49" charset="0"/>
+              </a:rPr>
+            </a:br>
+            <a:r>
+              <a:rPr lang="fr-BE">
+                <a:solidFill>
+                  <a:srgbClr val="996633"/>
+                </a:solidFill>
+                <a:latin typeface="Consolas" panose="020B0609020204030204" pitchFamily="49" charset="0"/>
+              </a:rPr>
+              <a:t>    header : "application/json",</a:t>
+            </a:r>
+            <a:br>
+              <a:rPr lang="fr-BE">
+                <a:solidFill>
+                  <a:srgbClr val="996633"/>
+                </a:solidFill>
+                <a:latin typeface="Consolas" panose="020B0609020204030204" pitchFamily="49" charset="0"/>
+              </a:rPr>
+            </a:br>
+            <a:r>
+              <a:rPr lang="fr-BE">
+                <a:solidFill>
+                  <a:srgbClr val="996633"/>
+                </a:solidFill>
+                <a:latin typeface="Consolas" panose="020B0609020204030204" pitchFamily="49" charset="0"/>
+              </a:rPr>
+              <a:t>    page : "counter_fetch",</a:t>
+            </a:r>
+            <a:br>
+              <a:rPr lang="fr-BE">
+                <a:solidFill>
+                  <a:srgbClr val="996633"/>
+                </a:solidFill>
+                <a:latin typeface="Consolas" panose="020B0609020204030204" pitchFamily="49" charset="0"/>
+              </a:rPr>
+            </a:br>
+            <a:r>
+              <a:rPr lang="fr-BE">
+                <a:solidFill>
+                  <a:srgbClr val="996633"/>
+                </a:solidFill>
+                <a:latin typeface="Consolas" panose="020B0609020204030204" pitchFamily="49" charset="0"/>
+              </a:rPr>
+              <a:t>}</a:t>
+            </a:r>
+          </a:p>
+          <a:p>
+            <a:pPr lvl="2"/>
+            <a:r>
+              <a:rPr lang="fr-BE"/>
+              <a:t>aiguillage de la requête sur le serveur </a:t>
             </a:r>
           </a:p>
           <a:p>
             <a:pPr lvl="1"/>
             <a:r>
+              <a:rPr lang="fr-BE">
+                <a:solidFill>
+                  <a:srgbClr val="996633"/>
+                </a:solidFill>
+                <a:latin typeface="Consolas" panose="020B0609020204030204" pitchFamily="49" charset="0"/>
+              </a:rPr>
+              <a:t>fetch</a:t>
+            </a:r>
+          </a:p>
+          <a:p>
+            <a:pPr lvl="2"/>
+            <a:r>
               <a:rPr lang="fr-BE"/>
-              <a:t>incrémentation, </a:t>
-            </a:r>
-          </a:p>
-          <a:p>
-            <a:pPr lvl="1"/>
+              <a:t>URL : </a:t>
+            </a:r>
+            <a:r>
+              <a:rPr lang="fr-BE">
+                <a:solidFill>
+                  <a:srgbClr val="996633"/>
+                </a:solidFill>
+                <a:latin typeface="Consolas" panose="020B0609020204030204" pitchFamily="49" charset="0"/>
+              </a:rPr>
+              <a:t>window.location.pathname</a:t>
+            </a:r>
             <a:r>
               <a:rPr lang="fr-BE"/>
-              <a:t>sauvegarde, etc.</a:t>
-            </a:r>
-          </a:p>
-          <a:p>
+              <a:t>, càd le path courant</a:t>
+            </a:r>
+          </a:p>
+          <a:p>
+            <a:pPr lvl="2"/>
             <a:r>
               <a:rPr lang="fr-BE"/>
-              <a:t>Création d'un assoc array pour le retour </a:t>
-            </a:r>
-          </a:p>
-          <a:p>
-            <a:pPr lvl="1"/>
+              <a:t>envoie </a:t>
+            </a:r>
+            <a:r>
+              <a:rPr lang="fr-BE">
+                <a:solidFill>
+                  <a:srgbClr val="996633"/>
+                </a:solidFill>
+                <a:latin typeface="Consolas" panose="020B0609020204030204" pitchFamily="49" charset="0"/>
+              </a:rPr>
+              <a:t>param</a:t>
+            </a:r>
+          </a:p>
+          <a:p>
+            <a:pPr lvl="2"/>
             <a:r>
               <a:rPr lang="fr-BE"/>
-              <a:t>conversion en JSON (</a:t>
+              <a:t>reçoit du </a:t>
             </a:r>
             <a:r>
               <a:rPr lang="fr-BE">
@@ -22570,52 +22699,54 @@
                 </a:solidFill>
                 <a:latin typeface="Consolas" panose="020B0609020204030204" pitchFamily="49" charset="0"/>
               </a:rPr>
-              <a:t>json_encode</a:t>
+              <a:t>JSON</a:t>
             </a:r>
             <a:r>
               <a:rPr lang="fr-BE"/>
-              <a:t>)</a:t>
-            </a:r>
-          </a:p>
-          <a:p>
-            <a:pPr lvl="1"/>
+              <a:t> en retour</a:t>
+            </a:r>
+          </a:p>
+          <a:p>
+            <a:pPr lvl="2"/>
             <a:r>
               <a:rPr lang="fr-BE"/>
-              <a:t>return</a:t>
-            </a:r>
-          </a:p>
-          <a:p>
+              <a:t>valide le </a:t>
+            </a:r>
+            <a:r>
+              <a:rPr lang="fr-BE">
+                <a:solidFill>
+                  <a:srgbClr val="996633"/>
+                </a:solidFill>
+                <a:latin typeface="Consolas" panose="020B0609020204030204" pitchFamily="49" charset="0"/>
+              </a:rPr>
+              <a:t>JSON</a:t>
+            </a:r>
+          </a:p>
+          <a:p>
+            <a:pPr lvl="2"/>
             <a:r>
               <a:rPr lang="fr-BE"/>
-              <a:t>Remarques : </a:t>
-            </a:r>
-          </a:p>
-          <a:p>
-            <a:pPr lvl="1"/>
+              <a:t>traite le </a:t>
+            </a:r>
+            <a:r>
+              <a:rPr lang="fr-BE">
+                <a:solidFill>
+                  <a:srgbClr val="996633"/>
+                </a:solidFill>
+                <a:latin typeface="Consolas" panose="020B0609020204030204" pitchFamily="49" charset="0"/>
+              </a:rPr>
+              <a:t>JSON</a:t>
+            </a:r>
             <a:r>
               <a:rPr lang="fr-BE"/>
-              <a:t>La fonction retourne uniquement le tableau (JSON encodé). </a:t>
-            </a:r>
-          </a:p>
-          <a:p>
-            <a:pPr lvl="1"/>
-            <a:r>
-              <a:rPr lang="fr-BE"/>
-              <a:t>L'en-tête est défini dans </a:t>
-            </a:r>
-            <a:r>
-              <a:rPr lang="fr-BE">
-                <a:solidFill>
-                  <a:srgbClr val="996633"/>
-                </a:solidFill>
-                <a:latin typeface="Consolas" panose="020B0609020204030204" pitchFamily="49" charset="0"/>
-              </a:rPr>
-              <a:t>index.php</a:t>
-            </a:r>
-            <a:r>
-              <a:rPr lang="fr-BE"/>
-              <a:t>.</a:t>
-            </a:r>
+              <a:t> : affichage de la nouvelle valeur du compteur</a:t>
+            </a:r>
+          </a:p>
+          <a:p>
+            <a:endParaRPr lang="fr-BE"/>
+          </a:p>
+          <a:p>
+            <a:endParaRPr lang="fr-BE"/>
           </a:p>
         </p:txBody>
       </p:sp>
@@ -22624,7 +22755,7 @@
           <p:cNvPr id="4" name="Espace réservé de la date 3">
             <a:extLst>
               <a:ext uri="{FF2B5EF4-FFF2-40B4-BE49-F238E27FC236}">
-                <a16:creationId xmlns:a16="http://schemas.microsoft.com/office/drawing/2014/main" id="{4CCBC116-A652-572B-6AE8-6BAE6A21DB89}"/>
+                <a16:creationId xmlns:a16="http://schemas.microsoft.com/office/drawing/2014/main" id="{B0542EAF-0EE2-3600-1CAB-139ECCE4201E}"/>
               </a:ext>
             </a:extLst>
           </p:cNvPr>
@@ -22642,7 +22773,7 @@
           <a:p>
             <a:fld id="{A122A0FB-B2F5-4CDD-B3CD-9FB3D075AA52}" type="datetime1">
               <a:rPr lang="fr-BE" smtClean="0"/>
-              <a:t>23-02-26</a:t>
+              <a:t>02-03-26</a:t>
             </a:fld>
             <a:endParaRPr lang="fr-BE"/>
           </a:p>
@@ -22653,7 +22784,7 @@
           <p:cNvPr id="5" name="Espace réservé du numéro de diapositive 4">
             <a:extLst>
               <a:ext uri="{FF2B5EF4-FFF2-40B4-BE49-F238E27FC236}">
-                <a16:creationId xmlns:a16="http://schemas.microsoft.com/office/drawing/2014/main" id="{E654294C-4685-862A-8209-A7BC00417E45}"/>
+                <a16:creationId xmlns:a16="http://schemas.microsoft.com/office/drawing/2014/main" id="{CC553969-90DF-0DAC-6B28-C08F4C0B7A49}"/>
               </a:ext>
             </a:extLst>
           </p:cNvPr>
@@ -22680,7 +22811,7 @@
     </p:spTree>
     <p:extLst>
       <p:ext uri="{BB962C8B-B14F-4D97-AF65-F5344CB8AC3E}">
-        <p14:creationId xmlns:p14="http://schemas.microsoft.com/office/powerpoint/2010/main" val="3346158291"/>
+        <p14:creationId xmlns:p14="http://schemas.microsoft.com/office/powerpoint/2010/main" val="2818028877"/>
       </p:ext>
     </p:extLst>
   </p:cSld>
@@ -22707,7 +22838,13 @@
   <p:cSld>
     <p:spTree>
       <p:nvGrpSpPr>
-        <p:cNvPr id="1" name=""/>
+        <p:cNvPr id="1" name="">
+          <a:extLst>
+            <a:ext uri="{FF2B5EF4-FFF2-40B4-BE49-F238E27FC236}">
+              <a16:creationId xmlns:a16="http://schemas.microsoft.com/office/drawing/2014/main" id="{6273970B-404A-2177-7E6A-1F6EAE4A6EF5}"/>
+            </a:ext>
+          </a:extLst>
+        </p:cNvPr>
         <p:cNvGrpSpPr/>
         <p:nvPr/>
       </p:nvGrpSpPr>
@@ -22724,7 +22861,7 @@
           <p:cNvPr id="2" name="Titre 1">
             <a:extLst>
               <a:ext uri="{FF2B5EF4-FFF2-40B4-BE49-F238E27FC236}">
-                <a16:creationId xmlns:a16="http://schemas.microsoft.com/office/drawing/2014/main" id="{00066692-82BF-65F0-D513-334FE34E8DC3}"/>
+                <a16:creationId xmlns:a16="http://schemas.microsoft.com/office/drawing/2014/main" id="{53EAFCF3-5DE1-158C-E4B3-FEA9E62BB761}"/>
               </a:ext>
             </a:extLst>
           </p:cNvPr>
@@ -22741,8 +22878,13 @@
           <a:lstStyle/>
           <a:p>
             <a:r>
-              <a:rPr lang="fr-BE"/>
-              <a:t>Exo : Ajouter des fonctionalités</a:t>
+              <a:rPr lang="en-US" b="0">
+                <a:solidFill>
+                  <a:srgbClr val="996633"/>
+                </a:solidFill>
+                <a:latin typeface="Consolas" panose="020B0609020204030204" pitchFamily="49" charset="0"/>
+              </a:rPr>
+              <a:t>/app/controller/counter_fetch.php</a:t>
             </a:r>
           </a:p>
         </p:txBody>
@@ -22752,7 +22894,7 @@
           <p:cNvPr id="3" name="Espace réservé du contenu 2">
             <a:extLst>
               <a:ext uri="{FF2B5EF4-FFF2-40B4-BE49-F238E27FC236}">
-                <a16:creationId xmlns:a16="http://schemas.microsoft.com/office/drawing/2014/main" id="{598AF4A0-CFF3-2100-8C68-D2BBBB15D506}"/>
+                <a16:creationId xmlns:a16="http://schemas.microsoft.com/office/drawing/2014/main" id="{95231676-90B7-F528-5E26-A7F53179E3B2}"/>
               </a:ext>
             </a:extLst>
           </p:cNvPr>
@@ -22763,26 +22905,116 @@
             <p:ph idx="1"/>
           </p:nvPr>
         </p:nvSpPr>
-        <p:spPr/>
-        <p:txBody>
-          <a:bodyPr/>
+        <p:spPr>
+          <a:xfrm>
+            <a:off x="838200" y="1690689"/>
+            <a:ext cx="10515600" cy="5030786"/>
+          </a:xfrm>
+        </p:spPr>
+        <p:txBody>
+          <a:bodyPr>
+            <a:normAutofit fontScale="92500" lnSpcReduction="10000"/>
+          </a:bodyPr>
           <a:lstStyle/>
           <a:p>
             <a:r>
               <a:rPr lang="fr-BE"/>
-              <a:t>Ajouter un bouton "decrement". </a:t>
+              <a:t>Déclaration fonction PHP </a:t>
+            </a:r>
+            <a:r>
+              <a:rPr lang="fr-BE">
+                <a:solidFill>
+                  <a:srgbClr val="996633"/>
+                </a:solidFill>
+                <a:latin typeface="Consolas" panose="020B0609020204030204" pitchFamily="49" charset="0"/>
+              </a:rPr>
+              <a:t>main_counter_fetch()</a:t>
             </a:r>
           </a:p>
           <a:p>
             <a:r>
               <a:rPr lang="fr-BE"/>
-              <a:t>Ajouter un bouton "reset" qui initialise le compteur à 0.</a:t>
-            </a:r>
-          </a:p>
-          <a:p>
+              <a:t>Traitement du compteur </a:t>
+            </a:r>
+          </a:p>
+          <a:p>
+            <a:pPr lvl="1"/>
             <a:r>
               <a:rPr lang="fr-BE"/>
-              <a:t>Ajouter un bouton "reset to value" qui initialise le compteur à une valeur donnée en input field.</a:t>
+              <a:t>incrémentation, </a:t>
+            </a:r>
+          </a:p>
+          <a:p>
+            <a:pPr lvl="1"/>
+            <a:r>
+              <a:rPr lang="fr-BE"/>
+              <a:t>sauvegarde, etc.</a:t>
+            </a:r>
+          </a:p>
+          <a:p>
+            <a:r>
+              <a:rPr lang="fr-BE"/>
+              <a:t>Création d'un assoc array pour le retour </a:t>
+            </a:r>
+          </a:p>
+          <a:p>
+            <a:pPr lvl="1"/>
+            <a:r>
+              <a:rPr lang="fr-BE"/>
+              <a:t>conversion en JSON (</a:t>
+            </a:r>
+            <a:r>
+              <a:rPr lang="fr-BE">
+                <a:solidFill>
+                  <a:srgbClr val="996633"/>
+                </a:solidFill>
+                <a:latin typeface="Consolas" panose="020B0609020204030204" pitchFamily="49" charset="0"/>
+              </a:rPr>
+              <a:t>json_encode</a:t>
+            </a:r>
+            <a:r>
+              <a:rPr lang="fr-BE"/>
+              <a:t>)</a:t>
+            </a:r>
+          </a:p>
+          <a:p>
+            <a:pPr lvl="1"/>
+            <a:r>
+              <a:rPr lang="fr-BE"/>
+              <a:t>return</a:t>
+            </a:r>
+          </a:p>
+          <a:p>
+            <a:r>
+              <a:rPr lang="fr-BE"/>
+              <a:t>Remarques : </a:t>
+            </a:r>
+          </a:p>
+          <a:p>
+            <a:pPr lvl="1"/>
+            <a:r>
+              <a:rPr lang="fr-BE"/>
+              <a:t>La fonction retourne uniquement le tableau (JSON encodé). </a:t>
+            </a:r>
+          </a:p>
+          <a:p>
+            <a:pPr lvl="1"/>
+            <a:r>
+              <a:rPr lang="fr-BE"/>
+              <a:t>L'en-tête est défini dans </a:t>
+            </a:r>
+            <a:r>
+              <a:rPr lang="fr-BE">
+                <a:solidFill>
+                  <a:srgbClr val="996633"/>
+                </a:solidFill>
+                <a:latin typeface="Consolas" panose="020B0609020204030204" pitchFamily="49" charset="0"/>
+              </a:rPr>
+              <a:t>index.php</a:t>
+            </a:r>
+            <a:r>
+              <a:rPr lang="fr-BE"/>
+              <a:t>.</a:t>
             </a:r>
           </a:p>
         </p:txBody>
@@ -22792,7 +23024,7 @@
           <p:cNvPr id="4" name="Espace réservé de la date 3">
             <a:extLst>
               <a:ext uri="{FF2B5EF4-FFF2-40B4-BE49-F238E27FC236}">
-                <a16:creationId xmlns:a16="http://schemas.microsoft.com/office/drawing/2014/main" id="{741F8F30-A7F6-EBB9-8F2A-9F7ADB717B36}"/>
+                <a16:creationId xmlns:a16="http://schemas.microsoft.com/office/drawing/2014/main" id="{4CCBC116-A652-572B-6AE8-6BAE6A21DB89}"/>
               </a:ext>
             </a:extLst>
           </p:cNvPr>
@@ -22808,9 +23040,9 @@
           <a:bodyPr/>
           <a:lstStyle/>
           <a:p>
-            <a:fld id="{37F37411-EAF2-495B-A447-CD3DFBFB071E}" type="datetime1">
+            <a:fld id="{A122A0FB-B2F5-4CDD-B3CD-9FB3D075AA52}" type="datetime1">
               <a:rPr lang="fr-BE" smtClean="0"/>
-              <a:t>23-02-26</a:t>
+              <a:t>02-03-26</a:t>
             </a:fld>
             <a:endParaRPr lang="fr-BE"/>
           </a:p>
@@ -22821,7 +23053,7 @@
           <p:cNvPr id="5" name="Espace réservé du numéro de diapositive 4">
             <a:extLst>
               <a:ext uri="{FF2B5EF4-FFF2-40B4-BE49-F238E27FC236}">
-                <a16:creationId xmlns:a16="http://schemas.microsoft.com/office/drawing/2014/main" id="{BAF0F882-CF67-E8C6-3773-C008EFF60762}"/>
+                <a16:creationId xmlns:a16="http://schemas.microsoft.com/office/drawing/2014/main" id="{E654294C-4685-862A-8209-A7BC00417E45}"/>
               </a:ext>
             </a:extLst>
           </p:cNvPr>
@@ -22848,7 +23080,7 @@
     </p:spTree>
     <p:extLst>
       <p:ext uri="{BB962C8B-B14F-4D97-AF65-F5344CB8AC3E}">
-        <p14:creationId xmlns:p14="http://schemas.microsoft.com/office/powerpoint/2010/main" val="1456183106"/>
+        <p14:creationId xmlns:p14="http://schemas.microsoft.com/office/powerpoint/2010/main" val="3346158291"/>
       </p:ext>
     </p:extLst>
   </p:cSld>
@@ -22875,6 +23107,174 @@
   <p:cSld>
     <p:spTree>
       <p:nvGrpSpPr>
+        <p:cNvPr id="1" name=""/>
+        <p:cNvGrpSpPr/>
+        <p:nvPr/>
+      </p:nvGrpSpPr>
+      <p:grpSpPr>
+        <a:xfrm>
+          <a:off x="0" y="0"/>
+          <a:ext cx="0" cy="0"/>
+          <a:chOff x="0" y="0"/>
+          <a:chExt cx="0" cy="0"/>
+        </a:xfrm>
+      </p:grpSpPr>
+      <p:sp>
+        <p:nvSpPr>
+          <p:cNvPr id="2" name="Titre 1">
+            <a:extLst>
+              <a:ext uri="{FF2B5EF4-FFF2-40B4-BE49-F238E27FC236}">
+                <a16:creationId xmlns:a16="http://schemas.microsoft.com/office/drawing/2014/main" id="{00066692-82BF-65F0-D513-334FE34E8DC3}"/>
+              </a:ext>
+            </a:extLst>
+          </p:cNvPr>
+          <p:cNvSpPr>
+            <a:spLocks noGrp="1"/>
+          </p:cNvSpPr>
+          <p:nvPr>
+            <p:ph type="title"/>
+          </p:nvPr>
+        </p:nvSpPr>
+        <p:spPr/>
+        <p:txBody>
+          <a:bodyPr/>
+          <a:lstStyle/>
+          <a:p>
+            <a:r>
+              <a:rPr lang="fr-BE"/>
+              <a:t>Exo : Ajouter des fonctionalités</a:t>
+            </a:r>
+          </a:p>
+        </p:txBody>
+      </p:sp>
+      <p:sp>
+        <p:nvSpPr>
+          <p:cNvPr id="3" name="Espace réservé du contenu 2">
+            <a:extLst>
+              <a:ext uri="{FF2B5EF4-FFF2-40B4-BE49-F238E27FC236}">
+                <a16:creationId xmlns:a16="http://schemas.microsoft.com/office/drawing/2014/main" id="{598AF4A0-CFF3-2100-8C68-D2BBBB15D506}"/>
+              </a:ext>
+            </a:extLst>
+          </p:cNvPr>
+          <p:cNvSpPr>
+            <a:spLocks noGrp="1"/>
+          </p:cNvSpPr>
+          <p:nvPr>
+            <p:ph idx="1"/>
+          </p:nvPr>
+        </p:nvSpPr>
+        <p:spPr/>
+        <p:txBody>
+          <a:bodyPr/>
+          <a:lstStyle/>
+          <a:p>
+            <a:r>
+              <a:rPr lang="fr-BE"/>
+              <a:t>Ajouter un bouton "decrement". </a:t>
+            </a:r>
+          </a:p>
+          <a:p>
+            <a:r>
+              <a:rPr lang="fr-BE"/>
+              <a:t>Ajouter un bouton "reset" qui initialise le compteur à 0.</a:t>
+            </a:r>
+          </a:p>
+          <a:p>
+            <a:r>
+              <a:rPr lang="fr-BE"/>
+              <a:t>Ajouter un bouton "reset to value" qui initialise le compteur à une valeur donnée en input field.</a:t>
+            </a:r>
+          </a:p>
+        </p:txBody>
+      </p:sp>
+      <p:sp>
+        <p:nvSpPr>
+          <p:cNvPr id="4" name="Espace réservé de la date 3">
+            <a:extLst>
+              <a:ext uri="{FF2B5EF4-FFF2-40B4-BE49-F238E27FC236}">
+                <a16:creationId xmlns:a16="http://schemas.microsoft.com/office/drawing/2014/main" id="{741F8F30-A7F6-EBB9-8F2A-9F7ADB717B36}"/>
+              </a:ext>
+            </a:extLst>
+          </p:cNvPr>
+          <p:cNvSpPr>
+            <a:spLocks noGrp="1"/>
+          </p:cNvSpPr>
+          <p:nvPr>
+            <p:ph type="dt" sz="half" idx="10"/>
+          </p:nvPr>
+        </p:nvSpPr>
+        <p:spPr/>
+        <p:txBody>
+          <a:bodyPr/>
+          <a:lstStyle/>
+          <a:p>
+            <a:fld id="{37F37411-EAF2-495B-A447-CD3DFBFB071E}" type="datetime1">
+              <a:rPr lang="fr-BE" smtClean="0"/>
+              <a:t>02-03-26</a:t>
+            </a:fld>
+            <a:endParaRPr lang="fr-BE"/>
+          </a:p>
+        </p:txBody>
+      </p:sp>
+      <p:sp>
+        <p:nvSpPr>
+          <p:cNvPr id="5" name="Espace réservé du numéro de diapositive 4">
+            <a:extLst>
+              <a:ext uri="{FF2B5EF4-FFF2-40B4-BE49-F238E27FC236}">
+                <a16:creationId xmlns:a16="http://schemas.microsoft.com/office/drawing/2014/main" id="{BAF0F882-CF67-E8C6-3773-C008EFF60762}"/>
+              </a:ext>
+            </a:extLst>
+          </p:cNvPr>
+          <p:cNvSpPr>
+            <a:spLocks noGrp="1"/>
+          </p:cNvSpPr>
+          <p:nvPr>
+            <p:ph type="sldNum" sz="quarter" idx="12"/>
+          </p:nvPr>
+        </p:nvSpPr>
+        <p:spPr/>
+        <p:txBody>
+          <a:bodyPr/>
+          <a:lstStyle/>
+          <a:p>
+            <a:fld id="{02C092ED-0E97-497E-99D9-BB9DD7276F53}" type="slidenum">
+              <a:rPr lang="fr-BE" smtClean="0"/>
+              <a:t>52</a:t>
+            </a:fld>
+            <a:endParaRPr lang="fr-BE"/>
+          </a:p>
+        </p:txBody>
+      </p:sp>
+    </p:spTree>
+    <p:extLst>
+      <p:ext uri="{BB962C8B-B14F-4D97-AF65-F5344CB8AC3E}">
+        <p14:creationId xmlns:p14="http://schemas.microsoft.com/office/powerpoint/2010/main" val="1456183106"/>
+      </p:ext>
+    </p:extLst>
+  </p:cSld>
+  <p:clrMapOvr>
+    <a:masterClrMapping/>
+  </p:clrMapOvr>
+  <mc:AlternateContent xmlns:mc="http://schemas.openxmlformats.org/markup-compatibility/2006" xmlns:p14="http://schemas.microsoft.com/office/powerpoint/2010/main">
+    <mc:Choice Requires="p14">
+      <p:transition spd="slow">
+        <p14:reveal/>
+      </p:transition>
+    </mc:Choice>
+    <mc:Fallback xmlns="">
+      <p:transition spd="slow">
+        <p:fade/>
+      </p:transition>
+    </mc:Fallback>
+  </mc:AlternateContent>
+</p:sld>
+</file>
+
+<file path=ppt/slides/slide53.xml><?xml version="1.0" encoding="utf-8"?>
+<p:sld xmlns:a="http://schemas.openxmlformats.org/drawingml/2006/main" xmlns:r="http://schemas.openxmlformats.org/officeDocument/2006/relationships" xmlns:p="http://schemas.openxmlformats.org/presentationml/2006/main">
+  <p:cSld>
+    <p:spTree>
+      <p:nvGrpSpPr>
         <p:cNvPr id="1" name="">
           <a:extLst>
             <a:ext uri="{FF2B5EF4-FFF2-40B4-BE49-F238E27FC236}">
@@ -22984,7 +23384,7 @@
           <a:p>
             <a:fld id="{47EA6130-C364-45FF-ADCC-7D6C28140105}" type="datetime1">
               <a:rPr lang="fr-BE" smtClean="0"/>
-              <a:t>23-02-26</a:t>
+              <a:t>02-03-26</a:t>
             </a:fld>
             <a:endParaRPr lang="fr-BE"/>
           </a:p>
@@ -23013,7 +23413,7 @@
           <a:p>
             <a:fld id="{02C092ED-0E97-497E-99D9-BB9DD7276F53}" type="slidenum">
               <a:rPr lang="fr-BE" smtClean="0"/>
-              <a:t>52</a:t>
+              <a:t>53</a:t>
             </a:fld>
             <a:endParaRPr lang="fr-BE"/>
           </a:p>
@@ -23116,7 +23516,7 @@
 </p:sld>
 </file>
 
-<file path=ppt/slides/slide53.xml><?xml version="1.0" encoding="utf-8"?>
+<file path=ppt/slides/slide54.xml><?xml version="1.0" encoding="utf-8"?>
 <p:sld xmlns:a="http://schemas.openxmlformats.org/drawingml/2006/main" xmlns:r="http://schemas.openxmlformats.org/officeDocument/2006/relationships" xmlns:p="http://schemas.openxmlformats.org/presentationml/2006/main">
   <p:cSld>
     <p:spTree>
@@ -23300,7 +23700,7 @@
           <a:p>
             <a:fld id="{9387EA18-5AD6-45A6-A8E3-163D735A5432}" type="datetime1">
               <a:rPr lang="fr-BE" smtClean="0"/>
-              <a:t>23-02-26</a:t>
+              <a:t>02-03-26</a:t>
             </a:fld>
             <a:endParaRPr lang="fr-BE"/>
           </a:p>
@@ -23329,7 +23729,7 @@
           <a:p>
             <a:fld id="{02C092ED-0E97-497E-99D9-BB9DD7276F53}" type="slidenum">
               <a:rPr lang="fr-BE" smtClean="0"/>
-              <a:t>53</a:t>
+              <a:t>54</a:t>
             </a:fld>
             <a:endParaRPr lang="fr-BE"/>
           </a:p>
@@ -23339,191 +23739,6 @@
     <p:extLst>
       <p:ext uri="{BB962C8B-B14F-4D97-AF65-F5344CB8AC3E}">
         <p14:creationId xmlns:p14="http://schemas.microsoft.com/office/powerpoint/2010/main" val="3081737979"/>
-      </p:ext>
-    </p:extLst>
-  </p:cSld>
-  <p:clrMapOvr>
-    <a:masterClrMapping/>
-  </p:clrMapOvr>
-  <mc:AlternateContent xmlns:mc="http://schemas.openxmlformats.org/markup-compatibility/2006" xmlns:p14="http://schemas.microsoft.com/office/powerpoint/2010/main">
-    <mc:Choice Requires="p14">
-      <p:transition spd="slow">
-        <p14:reveal/>
-      </p:transition>
-    </mc:Choice>
-    <mc:Fallback xmlns="">
-      <p:transition spd="slow">
-        <p:fade/>
-      </p:transition>
-    </mc:Fallback>
-  </mc:AlternateContent>
-</p:sld>
-</file>
-
-<file path=ppt/slides/slide54.xml><?xml version="1.0" encoding="utf-8"?>
-<p:sld xmlns:a="http://schemas.openxmlformats.org/drawingml/2006/main" xmlns:r="http://schemas.openxmlformats.org/officeDocument/2006/relationships" xmlns:p="http://schemas.openxmlformats.org/presentationml/2006/main">
-  <p:cSld>
-    <p:spTree>
-      <p:nvGrpSpPr>
-        <p:cNvPr id="1" name="">
-          <a:extLst>
-            <a:ext uri="{FF2B5EF4-FFF2-40B4-BE49-F238E27FC236}">
-              <a16:creationId xmlns:a16="http://schemas.microsoft.com/office/drawing/2014/main" id="{EF59D98E-8B42-4FF1-C504-DC73F8FD1CCE}"/>
-            </a:ext>
-          </a:extLst>
-        </p:cNvPr>
-        <p:cNvGrpSpPr/>
-        <p:nvPr/>
-      </p:nvGrpSpPr>
-      <p:grpSpPr>
-        <a:xfrm>
-          <a:off x="0" y="0"/>
-          <a:ext cx="0" cy="0"/>
-          <a:chOff x="0" y="0"/>
-          <a:chExt cx="0" cy="0"/>
-        </a:xfrm>
-      </p:grpSpPr>
-      <p:sp>
-        <p:nvSpPr>
-          <p:cNvPr id="2" name="Titre 1">
-            <a:extLst>
-              <a:ext uri="{FF2B5EF4-FFF2-40B4-BE49-F238E27FC236}">
-                <a16:creationId xmlns:a16="http://schemas.microsoft.com/office/drawing/2014/main" id="{0E5F3A76-EBF4-7532-9A39-29D52EE609E6}"/>
-              </a:ext>
-            </a:extLst>
-          </p:cNvPr>
-          <p:cNvSpPr>
-            <a:spLocks noGrp="1"/>
-          </p:cNvSpPr>
-          <p:nvPr>
-            <p:ph type="title"/>
-          </p:nvPr>
-        </p:nvSpPr>
-        <p:spPr/>
-        <p:txBody>
-          <a:bodyPr/>
-          <a:lstStyle/>
-          <a:p>
-            <a:r>
-              <a:rPr lang="en-US" b="0">
-                <a:solidFill>
-                  <a:srgbClr val="996633"/>
-                </a:solidFill>
-                <a:latin typeface="Consolas" panose="020B0609020204030204" pitchFamily="49" charset="0"/>
-              </a:rPr>
-              <a:t>/app/controller/home.php</a:t>
-            </a:r>
-            <a:endParaRPr lang="fr-BE" b="0">
-              <a:solidFill>
-                <a:srgbClr val="996633"/>
-              </a:solidFill>
-              <a:latin typeface="Consolas" panose="020B0609020204030204" pitchFamily="49" charset="0"/>
-            </a:endParaRPr>
-          </a:p>
-        </p:txBody>
-      </p:sp>
-      <p:sp>
-        <p:nvSpPr>
-          <p:cNvPr id="3" name="Espace réservé du contenu 2">
-            <a:extLst>
-              <a:ext uri="{FF2B5EF4-FFF2-40B4-BE49-F238E27FC236}">
-                <a16:creationId xmlns:a16="http://schemas.microsoft.com/office/drawing/2014/main" id="{537561E9-A85D-9A30-0F8F-6A05D010B1E4}"/>
-              </a:ext>
-            </a:extLst>
-          </p:cNvPr>
-          <p:cNvSpPr>
-            <a:spLocks noGrp="1"/>
-          </p:cNvSpPr>
-          <p:nvPr>
-            <p:ph idx="1"/>
-          </p:nvPr>
-        </p:nvSpPr>
-        <p:spPr/>
-        <p:txBody>
-          <a:bodyPr/>
-          <a:lstStyle/>
-          <a:p>
-            <a:r>
-              <a:rPr lang="fr-BE"/>
-              <a:t>Appel à la fonction PHP </a:t>
-            </a:r>
-            <a:r>
-              <a:rPr lang="fr-BE">
-                <a:solidFill>
-                  <a:srgbClr val="996633"/>
-                </a:solidFill>
-                <a:latin typeface="Consolas" panose="020B0609020204030204" pitchFamily="49" charset="0"/>
-              </a:rPr>
-              <a:t>vuejs_fetch_sample()</a:t>
-            </a:r>
-          </a:p>
-          <a:p>
-            <a:endParaRPr lang="fr-BE"/>
-          </a:p>
-        </p:txBody>
-      </p:sp>
-      <p:sp>
-        <p:nvSpPr>
-          <p:cNvPr id="4" name="Espace réservé de la date 3">
-            <a:extLst>
-              <a:ext uri="{FF2B5EF4-FFF2-40B4-BE49-F238E27FC236}">
-                <a16:creationId xmlns:a16="http://schemas.microsoft.com/office/drawing/2014/main" id="{EBFD45BD-51A6-FB51-ABB3-F039FC1E48FD}"/>
-              </a:ext>
-            </a:extLst>
-          </p:cNvPr>
-          <p:cNvSpPr>
-            <a:spLocks noGrp="1"/>
-          </p:cNvSpPr>
-          <p:nvPr>
-            <p:ph type="dt" sz="half" idx="10"/>
-          </p:nvPr>
-        </p:nvSpPr>
-        <p:spPr/>
-        <p:txBody>
-          <a:bodyPr/>
-          <a:lstStyle/>
-          <a:p>
-            <a:fld id="{50827A15-FE84-4468-BA37-282682579A39}" type="datetime1">
-              <a:rPr lang="fr-BE" smtClean="0"/>
-              <a:t>23-02-26</a:t>
-            </a:fld>
-            <a:endParaRPr lang="fr-BE"/>
-          </a:p>
-        </p:txBody>
-      </p:sp>
-      <p:sp>
-        <p:nvSpPr>
-          <p:cNvPr id="5" name="Espace réservé du numéro de diapositive 4">
-            <a:extLst>
-              <a:ext uri="{FF2B5EF4-FFF2-40B4-BE49-F238E27FC236}">
-                <a16:creationId xmlns:a16="http://schemas.microsoft.com/office/drawing/2014/main" id="{543072F8-9329-2611-2E36-72923E07431E}"/>
-              </a:ext>
-            </a:extLst>
-          </p:cNvPr>
-          <p:cNvSpPr>
-            <a:spLocks noGrp="1"/>
-          </p:cNvSpPr>
-          <p:nvPr>
-            <p:ph type="sldNum" sz="quarter" idx="12"/>
-          </p:nvPr>
-        </p:nvSpPr>
-        <p:spPr/>
-        <p:txBody>
-          <a:bodyPr/>
-          <a:lstStyle/>
-          <a:p>
-            <a:fld id="{02C092ED-0E97-497E-99D9-BB9DD7276F53}" type="slidenum">
-              <a:rPr lang="fr-BE" smtClean="0"/>
-              <a:t>54</a:t>
-            </a:fld>
-            <a:endParaRPr lang="fr-BE"/>
-          </a:p>
-        </p:txBody>
-      </p:sp>
-    </p:spTree>
-    <p:extLst>
-      <p:ext uri="{BB962C8B-B14F-4D97-AF65-F5344CB8AC3E}">
-        <p14:creationId xmlns:p14="http://schemas.microsoft.com/office/powerpoint/2010/main" val="3525659687"/>
       </p:ext>
     </p:extLst>
   </p:cSld>
@@ -23553,7 +23768,7 @@
         <p:cNvPr id="1" name="">
           <a:extLst>
             <a:ext uri="{FF2B5EF4-FFF2-40B4-BE49-F238E27FC236}">
-              <a16:creationId xmlns:a16="http://schemas.microsoft.com/office/drawing/2014/main" id="{33D924BA-112F-47C6-6DAF-C34B4B9C60C7}"/>
+              <a16:creationId xmlns:a16="http://schemas.microsoft.com/office/drawing/2014/main" id="{EF59D98E-8B42-4FF1-C504-DC73F8FD1CCE}"/>
             </a:ext>
           </a:extLst>
         </p:cNvPr>
@@ -23573,7 +23788,7 @@
           <p:cNvPr id="2" name="Titre 1">
             <a:extLst>
               <a:ext uri="{FF2B5EF4-FFF2-40B4-BE49-F238E27FC236}">
-                <a16:creationId xmlns:a16="http://schemas.microsoft.com/office/drawing/2014/main" id="{8DE9A5F8-1C2A-8D86-E601-C256E52E9550}"/>
+                <a16:creationId xmlns:a16="http://schemas.microsoft.com/office/drawing/2014/main" id="{0E5F3A76-EBF4-7532-9A39-29D52EE609E6}"/>
               </a:ext>
             </a:extLst>
           </p:cNvPr>
@@ -23596,216 +23811,23 @@
                 </a:solidFill>
                 <a:latin typeface="Consolas" panose="020B0609020204030204" pitchFamily="49" charset="0"/>
               </a:rPr>
-              <a:t>/app/view/template.php</a:t>
-            </a:r>
-          </a:p>
-        </p:txBody>
-      </p:sp>
-      <p:sp>
-        <p:nvSpPr>
-          <p:cNvPr id="3" name="Espace réservé du contenu 2">
-            <a:extLst>
-              <a:ext uri="{FF2B5EF4-FFF2-40B4-BE49-F238E27FC236}">
-                <a16:creationId xmlns:a16="http://schemas.microsoft.com/office/drawing/2014/main" id="{242A4D8F-4609-AB56-EC77-2DB48865019A}"/>
-              </a:ext>
-            </a:extLst>
-          </p:cNvPr>
-          <p:cNvSpPr>
-            <a:spLocks noGrp="1"/>
-          </p:cNvSpPr>
-          <p:nvPr>
-            <p:ph idx="1"/>
-          </p:nvPr>
-        </p:nvSpPr>
-        <p:spPr/>
-        <p:txBody>
-          <a:bodyPr>
-            <a:normAutofit lnSpcReduction="10000"/>
-          </a:bodyPr>
-          <a:lstStyle/>
-          <a:p>
-            <a:r>
-              <a:rPr lang="fr-BE"/>
-              <a:t>Inclusion des scripts de </a:t>
-            </a:r>
-            <a:r>
-              <a:rPr lang="fr-BE">
-                <a:solidFill>
-                  <a:srgbClr val="996633"/>
-                </a:solidFill>
-                <a:latin typeface="Consolas" panose="020B0609020204030204" pitchFamily="49" charset="0"/>
-              </a:rPr>
-              <a:t>Vue.js</a:t>
-            </a:r>
-            <a:r>
-              <a:rPr lang="fr-BE"/>
-              <a:t> sous </a:t>
-            </a:r>
-            <a:r>
-              <a:rPr lang="fr-BE">
-                <a:solidFill>
-                  <a:srgbClr val="996633"/>
-                </a:solidFill>
-                <a:latin typeface="Consolas" panose="020B0609020204030204" pitchFamily="49" charset="0"/>
-              </a:rPr>
-              <a:t>&lt;head&gt;</a:t>
-            </a:r>
-          </a:p>
-          <a:p>
-            <a:r>
-              <a:rPr lang="fr-BE" sz="3200">
-                <a:solidFill>
-                  <a:srgbClr val="996633"/>
-                </a:solidFill>
-                <a:latin typeface="Consolas" panose="020B0609020204030204" pitchFamily="49" charset="0"/>
-              </a:rPr>
-              <a:t>&lt;head&gt;</a:t>
-            </a:r>
-            <a:br>
-              <a:rPr lang="fr-BE" sz="3200">
-                <a:solidFill>
-                  <a:srgbClr val="996633"/>
-                </a:solidFill>
-                <a:latin typeface="Consolas" panose="020B0609020204030204" pitchFamily="49" charset="0"/>
-              </a:rPr>
-            </a:br>
-            <a:r>
-              <a:rPr lang="fr-BE" sz="3200">
-                <a:solidFill>
-                  <a:srgbClr val="996633"/>
-                </a:solidFill>
-                <a:latin typeface="Consolas" panose="020B0609020204030204" pitchFamily="49" charset="0"/>
-              </a:rPr>
-              <a:t>    …</a:t>
-            </a:r>
-            <a:br>
-              <a:rPr lang="fr-BE" sz="3200">
-                <a:solidFill>
-                  <a:srgbClr val="996633"/>
-                </a:solidFill>
-                <a:latin typeface="Consolas" panose="020B0609020204030204" pitchFamily="49" charset="0"/>
-              </a:rPr>
-            </a:br>
-            <a:r>
-              <a:rPr lang="fr-BE" sz="3200">
-                <a:solidFill>
-                  <a:srgbClr val="996633"/>
-                </a:solidFill>
-                <a:latin typeface="Consolas" panose="020B0609020204030204" pitchFamily="49" charset="0"/>
-              </a:rPr>
-              <a:t>    &lt;script src="./js/vue.js/vue.global.js"&gt;…</a:t>
-            </a:r>
-            <a:br>
-              <a:rPr lang="fr-BE" sz="3200">
-                <a:solidFill>
-                  <a:srgbClr val="996633"/>
-                </a:solidFill>
-                <a:latin typeface="Consolas" panose="020B0609020204030204" pitchFamily="49" charset="0"/>
-              </a:rPr>
-            </a:br>
-            <a:r>
-              <a:rPr lang="fr-BE" sz="3200">
-                <a:solidFill>
-                  <a:srgbClr val="996633"/>
-                </a:solidFill>
-                <a:latin typeface="Consolas" panose="020B0609020204030204" pitchFamily="49" charset="0"/>
-              </a:rPr>
-              <a:t>    &lt;script type="importmap"&gt; …</a:t>
-            </a:r>
-            <a:br>
-              <a:rPr lang="fr-BE" sz="3200">
-                <a:solidFill>
-                  <a:srgbClr val="996633"/>
-                </a:solidFill>
-                <a:latin typeface="Consolas" panose="020B0609020204030204" pitchFamily="49" charset="0"/>
-              </a:rPr>
-            </a:br>
-            <a:r>
-              <a:rPr lang="fr-BE" sz="3200">
-                <a:solidFill>
-                  <a:srgbClr val="996633"/>
-                </a:solidFill>
-                <a:latin typeface="Consolas" panose="020B0609020204030204" pitchFamily="49" charset="0"/>
-              </a:rPr>
-              <a:t>    &lt;script type="module" </a:t>
-            </a:r>
-            <a:br>
-              <a:rPr lang="fr-BE" sz="3200">
-                <a:solidFill>
-                  <a:srgbClr val="996633"/>
-                </a:solidFill>
-                <a:latin typeface="Consolas" panose="020B0609020204030204" pitchFamily="49" charset="0"/>
-              </a:rPr>
-            </a:br>
-            <a:r>
-              <a:rPr lang="fr-BE" sz="3200">
-                <a:solidFill>
-                  <a:srgbClr val="996633"/>
-                </a:solidFill>
-                <a:latin typeface="Consolas" panose="020B0609020204030204" pitchFamily="49" charset="0"/>
-              </a:rPr>
-              <a:t>       src="./js/internal/vuejs_fetch_app.js" </a:t>
-            </a:r>
-            <a:br>
-              <a:rPr lang="fr-BE" sz="3200">
-                <a:solidFill>
-                  <a:srgbClr val="996633"/>
-                </a:solidFill>
-                <a:latin typeface="Consolas" panose="020B0609020204030204" pitchFamily="49" charset="0"/>
-              </a:rPr>
-            </a:br>
-            <a:r>
-              <a:rPr lang="fr-BE" sz="3200">
-                <a:solidFill>
-                  <a:srgbClr val="996633"/>
-                </a:solidFill>
-                <a:latin typeface="Consolas" panose="020B0609020204030204" pitchFamily="49" charset="0"/>
-              </a:rPr>
-              <a:t>       defer&gt; …</a:t>
-            </a:r>
-            <a:br>
-              <a:rPr lang="fr-BE" sz="3200">
-                <a:solidFill>
-                  <a:srgbClr val="996633"/>
-                </a:solidFill>
-                <a:latin typeface="Consolas" panose="020B0609020204030204" pitchFamily="49" charset="0"/>
-              </a:rPr>
-            </a:br>
-            <a:r>
-              <a:rPr lang="fr-BE" sz="3200">
-                <a:solidFill>
-                  <a:srgbClr val="996633"/>
-                </a:solidFill>
-                <a:latin typeface="Consolas" panose="020B0609020204030204" pitchFamily="49" charset="0"/>
-              </a:rPr>
-              <a:t>&lt;/head&gt;</a:t>
-            </a:r>
-            <a:br>
-              <a:rPr lang="fr-BE">
-                <a:solidFill>
-                  <a:srgbClr val="996633"/>
-                </a:solidFill>
-                <a:latin typeface="Consolas" panose="020B0609020204030204" pitchFamily="49" charset="0"/>
-              </a:rPr>
-            </a:br>
-            <a:endParaRPr lang="fr-BE">
+              <a:t>/app/controller/home.php</a:t>
+            </a:r>
+            <a:endParaRPr lang="fr-BE" b="0">
               <a:solidFill>
                 <a:srgbClr val="996633"/>
               </a:solidFill>
               <a:latin typeface="Consolas" panose="020B0609020204030204" pitchFamily="49" charset="0"/>
             </a:endParaRPr>
           </a:p>
-          <a:p>
-            <a:endParaRPr lang="fr-BE"/>
-          </a:p>
-        </p:txBody>
-      </p:sp>
-      <p:sp>
-        <p:nvSpPr>
-          <p:cNvPr id="4" name="Espace réservé de la date 3">
+        </p:txBody>
+      </p:sp>
+      <p:sp>
+        <p:nvSpPr>
+          <p:cNvPr id="3" name="Espace réservé du contenu 2">
             <a:extLst>
               <a:ext uri="{FF2B5EF4-FFF2-40B4-BE49-F238E27FC236}">
-                <a16:creationId xmlns:a16="http://schemas.microsoft.com/office/drawing/2014/main" id="{C3F0D258-F36D-CF3C-51F3-4EBD5B98B97B}"/>
+                <a16:creationId xmlns:a16="http://schemas.microsoft.com/office/drawing/2014/main" id="{537561E9-A85D-9A30-0F8F-6A05D010B1E4}"/>
               </a:ext>
             </a:extLst>
           </p:cNvPr>
@@ -23813,7 +23835,7 @@
             <a:spLocks noGrp="1"/>
           </p:cNvSpPr>
           <p:nvPr>
-            <p:ph type="dt" sz="half" idx="10"/>
+            <p:ph idx="1"/>
           </p:nvPr>
         </p:nvSpPr>
         <p:spPr/>
@@ -23821,9 +23843,49 @@
           <a:bodyPr/>
           <a:lstStyle/>
           <a:p>
+            <a:r>
+              <a:rPr lang="fr-BE"/>
+              <a:t>Appel à la fonction PHP </a:t>
+            </a:r>
+            <a:r>
+              <a:rPr lang="fr-BE">
+                <a:solidFill>
+                  <a:srgbClr val="996633"/>
+                </a:solidFill>
+                <a:latin typeface="Consolas" panose="020B0609020204030204" pitchFamily="49" charset="0"/>
+              </a:rPr>
+              <a:t>vuejs_fetch_sample()</a:t>
+            </a:r>
+          </a:p>
+          <a:p>
+            <a:endParaRPr lang="fr-BE"/>
+          </a:p>
+        </p:txBody>
+      </p:sp>
+      <p:sp>
+        <p:nvSpPr>
+          <p:cNvPr id="4" name="Espace réservé de la date 3">
+            <a:extLst>
+              <a:ext uri="{FF2B5EF4-FFF2-40B4-BE49-F238E27FC236}">
+                <a16:creationId xmlns:a16="http://schemas.microsoft.com/office/drawing/2014/main" id="{EBFD45BD-51A6-FB51-ABB3-F039FC1E48FD}"/>
+              </a:ext>
+            </a:extLst>
+          </p:cNvPr>
+          <p:cNvSpPr>
+            <a:spLocks noGrp="1"/>
+          </p:cNvSpPr>
+          <p:nvPr>
+            <p:ph type="dt" sz="half" idx="10"/>
+          </p:nvPr>
+        </p:nvSpPr>
+        <p:spPr/>
+        <p:txBody>
+          <a:bodyPr/>
+          <a:lstStyle/>
+          <a:p>
             <a:fld id="{50827A15-FE84-4468-BA37-282682579A39}" type="datetime1">
               <a:rPr lang="fr-BE" smtClean="0"/>
-              <a:t>23-02-26</a:t>
+              <a:t>02-03-26</a:t>
             </a:fld>
             <a:endParaRPr lang="fr-BE"/>
           </a:p>
@@ -23834,7 +23896,7 @@
           <p:cNvPr id="5" name="Espace réservé du numéro de diapositive 4">
             <a:extLst>
               <a:ext uri="{FF2B5EF4-FFF2-40B4-BE49-F238E27FC236}">
-                <a16:creationId xmlns:a16="http://schemas.microsoft.com/office/drawing/2014/main" id="{B07CE6E0-2FC2-233E-D66F-2EBF02BD37C8}"/>
+                <a16:creationId xmlns:a16="http://schemas.microsoft.com/office/drawing/2014/main" id="{543072F8-9329-2611-2E36-72923E07431E}"/>
               </a:ext>
             </a:extLst>
           </p:cNvPr>
@@ -23861,7 +23923,7 @@
     </p:spTree>
     <p:extLst>
       <p:ext uri="{BB962C8B-B14F-4D97-AF65-F5344CB8AC3E}">
-        <p14:creationId xmlns:p14="http://schemas.microsoft.com/office/powerpoint/2010/main" val="4200574128"/>
+        <p14:creationId xmlns:p14="http://schemas.microsoft.com/office/powerpoint/2010/main" val="3525659687"/>
       </p:ext>
     </p:extLst>
   </p:cSld>
@@ -23891,7 +23953,7 @@
         <p:cNvPr id="1" name="">
           <a:extLst>
             <a:ext uri="{FF2B5EF4-FFF2-40B4-BE49-F238E27FC236}">
-              <a16:creationId xmlns:a16="http://schemas.microsoft.com/office/drawing/2014/main" id="{4D39AF88-EEAE-60D3-659F-361097269702}"/>
+              <a16:creationId xmlns:a16="http://schemas.microsoft.com/office/drawing/2014/main" id="{33D924BA-112F-47C6-6DAF-C34B4B9C60C7}"/>
             </a:ext>
           </a:extLst>
         </p:cNvPr>
@@ -23911,7 +23973,7 @@
           <p:cNvPr id="2" name="Titre 1">
             <a:extLst>
               <a:ext uri="{FF2B5EF4-FFF2-40B4-BE49-F238E27FC236}">
-                <a16:creationId xmlns:a16="http://schemas.microsoft.com/office/drawing/2014/main" id="{C9B951CA-1393-6725-8AAB-AB74F60A3140}"/>
+                <a16:creationId xmlns:a16="http://schemas.microsoft.com/office/drawing/2014/main" id="{8DE9A5F8-1C2A-8D86-E601-C256E52E9550}"/>
               </a:ext>
             </a:extLst>
           </p:cNvPr>
@@ -23934,23 +23996,216 @@
                 </a:solidFill>
                 <a:latin typeface="Consolas" panose="020B0609020204030204" pitchFamily="49" charset="0"/>
               </a:rPr>
-              <a:t>/app/view/home.php</a:t>
-            </a:r>
-            <a:endParaRPr lang="fr-BE" b="0">
+              <a:t>/app/view/template.php</a:t>
+            </a:r>
+          </a:p>
+        </p:txBody>
+      </p:sp>
+      <p:sp>
+        <p:nvSpPr>
+          <p:cNvPr id="3" name="Espace réservé du contenu 2">
+            <a:extLst>
+              <a:ext uri="{FF2B5EF4-FFF2-40B4-BE49-F238E27FC236}">
+                <a16:creationId xmlns:a16="http://schemas.microsoft.com/office/drawing/2014/main" id="{242A4D8F-4609-AB56-EC77-2DB48865019A}"/>
+              </a:ext>
+            </a:extLst>
+          </p:cNvPr>
+          <p:cNvSpPr>
+            <a:spLocks noGrp="1"/>
+          </p:cNvSpPr>
+          <p:nvPr>
+            <p:ph idx="1"/>
+          </p:nvPr>
+        </p:nvSpPr>
+        <p:spPr/>
+        <p:txBody>
+          <a:bodyPr>
+            <a:normAutofit lnSpcReduction="10000"/>
+          </a:bodyPr>
+          <a:lstStyle/>
+          <a:p>
+            <a:r>
+              <a:rPr lang="fr-BE"/>
+              <a:t>Inclusion des scripts de </a:t>
+            </a:r>
+            <a:r>
+              <a:rPr lang="fr-BE">
+                <a:solidFill>
+                  <a:srgbClr val="996633"/>
+                </a:solidFill>
+                <a:latin typeface="Consolas" panose="020B0609020204030204" pitchFamily="49" charset="0"/>
+              </a:rPr>
+              <a:t>Vue.js</a:t>
+            </a:r>
+            <a:r>
+              <a:rPr lang="fr-BE"/>
+              <a:t> sous </a:t>
+            </a:r>
+            <a:r>
+              <a:rPr lang="fr-BE">
+                <a:solidFill>
+                  <a:srgbClr val="996633"/>
+                </a:solidFill>
+                <a:latin typeface="Consolas" panose="020B0609020204030204" pitchFamily="49" charset="0"/>
+              </a:rPr>
+              <a:t>&lt;head&gt;</a:t>
+            </a:r>
+          </a:p>
+          <a:p>
+            <a:r>
+              <a:rPr lang="fr-BE" sz="3200">
+                <a:solidFill>
+                  <a:srgbClr val="996633"/>
+                </a:solidFill>
+                <a:latin typeface="Consolas" panose="020B0609020204030204" pitchFamily="49" charset="0"/>
+              </a:rPr>
+              <a:t>&lt;head&gt;</a:t>
+            </a:r>
+            <a:br>
+              <a:rPr lang="fr-BE" sz="3200">
+                <a:solidFill>
+                  <a:srgbClr val="996633"/>
+                </a:solidFill>
+                <a:latin typeface="Consolas" panose="020B0609020204030204" pitchFamily="49" charset="0"/>
+              </a:rPr>
+            </a:br>
+            <a:r>
+              <a:rPr lang="fr-BE" sz="3200">
+                <a:solidFill>
+                  <a:srgbClr val="996633"/>
+                </a:solidFill>
+                <a:latin typeface="Consolas" panose="020B0609020204030204" pitchFamily="49" charset="0"/>
+              </a:rPr>
+              <a:t>    …</a:t>
+            </a:r>
+            <a:br>
+              <a:rPr lang="fr-BE" sz="3200">
+                <a:solidFill>
+                  <a:srgbClr val="996633"/>
+                </a:solidFill>
+                <a:latin typeface="Consolas" panose="020B0609020204030204" pitchFamily="49" charset="0"/>
+              </a:rPr>
+            </a:br>
+            <a:r>
+              <a:rPr lang="fr-BE" sz="3200">
+                <a:solidFill>
+                  <a:srgbClr val="996633"/>
+                </a:solidFill>
+                <a:latin typeface="Consolas" panose="020B0609020204030204" pitchFamily="49" charset="0"/>
+              </a:rPr>
+              <a:t>    &lt;script src="./js/vue.js/vue.global.js"&gt;…</a:t>
+            </a:r>
+            <a:br>
+              <a:rPr lang="fr-BE" sz="3200">
+                <a:solidFill>
+                  <a:srgbClr val="996633"/>
+                </a:solidFill>
+                <a:latin typeface="Consolas" panose="020B0609020204030204" pitchFamily="49" charset="0"/>
+              </a:rPr>
+            </a:br>
+            <a:r>
+              <a:rPr lang="fr-BE" sz="3200">
+                <a:solidFill>
+                  <a:srgbClr val="996633"/>
+                </a:solidFill>
+                <a:latin typeface="Consolas" panose="020B0609020204030204" pitchFamily="49" charset="0"/>
+              </a:rPr>
+              <a:t>    &lt;script type="importmap"&gt; …</a:t>
+            </a:r>
+            <a:br>
+              <a:rPr lang="fr-BE" sz="3200">
+                <a:solidFill>
+                  <a:srgbClr val="996633"/>
+                </a:solidFill>
+                <a:latin typeface="Consolas" panose="020B0609020204030204" pitchFamily="49" charset="0"/>
+              </a:rPr>
+            </a:br>
+            <a:r>
+              <a:rPr lang="fr-BE" sz="3200">
+                <a:solidFill>
+                  <a:srgbClr val="996633"/>
+                </a:solidFill>
+                <a:latin typeface="Consolas" panose="020B0609020204030204" pitchFamily="49" charset="0"/>
+              </a:rPr>
+              <a:t>    &lt;script type="module" </a:t>
+            </a:r>
+            <a:br>
+              <a:rPr lang="fr-BE" sz="3200">
+                <a:solidFill>
+                  <a:srgbClr val="996633"/>
+                </a:solidFill>
+                <a:latin typeface="Consolas" panose="020B0609020204030204" pitchFamily="49" charset="0"/>
+              </a:rPr>
+            </a:br>
+            <a:r>
+              <a:rPr lang="fr-BE" sz="3200">
+                <a:solidFill>
+                  <a:srgbClr val="996633"/>
+                </a:solidFill>
+                <a:latin typeface="Consolas" panose="020B0609020204030204" pitchFamily="49" charset="0"/>
+              </a:rPr>
+              <a:t>       src="./js/internal/vuejs_fetch_app.js" </a:t>
+            </a:r>
+            <a:br>
+              <a:rPr lang="fr-BE" sz="3200">
+                <a:solidFill>
+                  <a:srgbClr val="996633"/>
+                </a:solidFill>
+                <a:latin typeface="Consolas" panose="020B0609020204030204" pitchFamily="49" charset="0"/>
+              </a:rPr>
+            </a:br>
+            <a:r>
+              <a:rPr lang="fr-BE" sz="3200">
+                <a:solidFill>
+                  <a:srgbClr val="996633"/>
+                </a:solidFill>
+                <a:latin typeface="Consolas" panose="020B0609020204030204" pitchFamily="49" charset="0"/>
+              </a:rPr>
+              <a:t>       defer&gt; …</a:t>
+            </a:r>
+            <a:br>
+              <a:rPr lang="fr-BE" sz="3200">
+                <a:solidFill>
+                  <a:srgbClr val="996633"/>
+                </a:solidFill>
+                <a:latin typeface="Consolas" panose="020B0609020204030204" pitchFamily="49" charset="0"/>
+              </a:rPr>
+            </a:br>
+            <a:r>
+              <a:rPr lang="fr-BE" sz="3200">
+                <a:solidFill>
+                  <a:srgbClr val="996633"/>
+                </a:solidFill>
+                <a:latin typeface="Consolas" panose="020B0609020204030204" pitchFamily="49" charset="0"/>
+              </a:rPr>
+              <a:t>&lt;/head&gt;</a:t>
+            </a:r>
+            <a:br>
+              <a:rPr lang="fr-BE">
+                <a:solidFill>
+                  <a:srgbClr val="996633"/>
+                </a:solidFill>
+                <a:latin typeface="Consolas" panose="020B0609020204030204" pitchFamily="49" charset="0"/>
+              </a:rPr>
+            </a:br>
+            <a:endParaRPr lang="fr-BE">
               <a:solidFill>
                 <a:srgbClr val="996633"/>
               </a:solidFill>
               <a:latin typeface="Consolas" panose="020B0609020204030204" pitchFamily="49" charset="0"/>
             </a:endParaRPr>
           </a:p>
-        </p:txBody>
-      </p:sp>
-      <p:sp>
-        <p:nvSpPr>
-          <p:cNvPr id="3" name="Espace réservé du contenu 2">
+          <a:p>
+            <a:endParaRPr lang="fr-BE"/>
+          </a:p>
+        </p:txBody>
+      </p:sp>
+      <p:sp>
+        <p:nvSpPr>
+          <p:cNvPr id="4" name="Espace réservé de la date 3">
             <a:extLst>
               <a:ext uri="{FF2B5EF4-FFF2-40B4-BE49-F238E27FC236}">
-                <a16:creationId xmlns:a16="http://schemas.microsoft.com/office/drawing/2014/main" id="{B68EC0BA-B4D5-3E9B-2CAE-4D4A334B925E}"/>
+                <a16:creationId xmlns:a16="http://schemas.microsoft.com/office/drawing/2014/main" id="{C3F0D258-F36D-CF3C-51F3-4EBD5B98B97B}"/>
               </a:ext>
             </a:extLst>
           </p:cNvPr>
@@ -23958,7 +24213,7 @@
             <a:spLocks noGrp="1"/>
           </p:cNvSpPr>
           <p:nvPr>
-            <p:ph idx="1"/>
+            <p:ph type="dt" sz="half" idx="10"/>
           </p:nvPr>
         </p:nvSpPr>
         <p:spPr/>
@@ -23966,62 +24221,9 @@
           <a:bodyPr/>
           <a:lstStyle/>
           <a:p>
-            <a:r>
-              <a:rPr lang="fr-BE"/>
-              <a:t>Déclaration de </a:t>
-            </a:r>
-            <a:r>
-              <a:rPr lang="fr-BE">
-                <a:solidFill>
-                  <a:srgbClr val="996633"/>
-                </a:solidFill>
-                <a:latin typeface="Consolas" panose="020B0609020204030204" pitchFamily="49" charset="0"/>
-              </a:rPr>
-              <a:t>vuejs_fetch_sample()</a:t>
-            </a:r>
-          </a:p>
-          <a:p>
-            <a:pPr lvl="1"/>
-            <a:r>
-              <a:rPr lang="fr-BE"/>
-              <a:t>composant </a:t>
-            </a:r>
-            <a:r>
-              <a:rPr lang="fr-BE">
-                <a:solidFill>
-                  <a:srgbClr val="996633"/>
-                </a:solidFill>
-                <a:latin typeface="Consolas" panose="020B0609020204030204" pitchFamily="49" charset="0"/>
-              </a:rPr>
-              <a:t>Counter</a:t>
-            </a:r>
-          </a:p>
-        </p:txBody>
-      </p:sp>
-      <p:sp>
-        <p:nvSpPr>
-          <p:cNvPr id="4" name="Espace réservé de la date 3">
-            <a:extLst>
-              <a:ext uri="{FF2B5EF4-FFF2-40B4-BE49-F238E27FC236}">
-                <a16:creationId xmlns:a16="http://schemas.microsoft.com/office/drawing/2014/main" id="{4AAA9EF7-F057-0996-E353-7280FD7F5226}"/>
-              </a:ext>
-            </a:extLst>
-          </p:cNvPr>
-          <p:cNvSpPr>
-            <a:spLocks noGrp="1"/>
-          </p:cNvSpPr>
-          <p:nvPr>
-            <p:ph type="dt" sz="half" idx="10"/>
-          </p:nvPr>
-        </p:nvSpPr>
-        <p:spPr/>
-        <p:txBody>
-          <a:bodyPr/>
-          <a:lstStyle/>
-          <a:p>
-            <a:fld id="{A122A0FB-B2F5-4CDD-B3CD-9FB3D075AA52}" type="datetime1">
+            <a:fld id="{50827A15-FE84-4468-BA37-282682579A39}" type="datetime1">
               <a:rPr lang="fr-BE" smtClean="0"/>
-              <a:t>23-02-26</a:t>
+              <a:t>02-03-26</a:t>
             </a:fld>
             <a:endParaRPr lang="fr-BE"/>
           </a:p>
@@ -24032,7 +24234,7 @@
           <p:cNvPr id="5" name="Espace réservé du numéro de diapositive 4">
             <a:extLst>
               <a:ext uri="{FF2B5EF4-FFF2-40B4-BE49-F238E27FC236}">
-                <a16:creationId xmlns:a16="http://schemas.microsoft.com/office/drawing/2014/main" id="{ED88CBAD-FE5D-E11A-3BD0-8BA04AD303A3}"/>
+                <a16:creationId xmlns:a16="http://schemas.microsoft.com/office/drawing/2014/main" id="{B07CE6E0-2FC2-233E-D66F-2EBF02BD37C8}"/>
               </a:ext>
             </a:extLst>
           </p:cNvPr>
@@ -24059,7 +24261,7 @@
     </p:spTree>
     <p:extLst>
       <p:ext uri="{BB962C8B-B14F-4D97-AF65-F5344CB8AC3E}">
-        <p14:creationId xmlns:p14="http://schemas.microsoft.com/office/powerpoint/2010/main" val="2725678107"/>
+        <p14:creationId xmlns:p14="http://schemas.microsoft.com/office/powerpoint/2010/main" val="4200574128"/>
       </p:ext>
     </p:extLst>
   </p:cSld>
@@ -24086,7 +24288,13 @@
   <p:cSld>
     <p:spTree>
       <p:nvGrpSpPr>
-        <p:cNvPr id="1" name=""/>
+        <p:cNvPr id="1" name="">
+          <a:extLst>
+            <a:ext uri="{FF2B5EF4-FFF2-40B4-BE49-F238E27FC236}">
+              <a16:creationId xmlns:a16="http://schemas.microsoft.com/office/drawing/2014/main" id="{4D39AF88-EEAE-60D3-659F-361097269702}"/>
+            </a:ext>
+          </a:extLst>
+        </p:cNvPr>
         <p:cNvGrpSpPr/>
         <p:nvPr/>
       </p:nvGrpSpPr>
@@ -24103,7 +24311,7 @@
           <p:cNvPr id="2" name="Titre 1">
             <a:extLst>
               <a:ext uri="{FF2B5EF4-FFF2-40B4-BE49-F238E27FC236}">
-                <a16:creationId xmlns:a16="http://schemas.microsoft.com/office/drawing/2014/main" id="{ECCC4369-648B-3564-9BB3-A6F189FE7C83}"/>
+                <a16:creationId xmlns:a16="http://schemas.microsoft.com/office/drawing/2014/main" id="{C9B951CA-1393-6725-8AAB-AB74F60A3140}"/>
               </a:ext>
             </a:extLst>
           </p:cNvPr>
@@ -24116,20 +24324,24 @@
         </p:nvSpPr>
         <p:spPr/>
         <p:txBody>
-          <a:bodyPr>
-            <a:normAutofit/>
-          </a:bodyPr>
+          <a:bodyPr/>
           <a:lstStyle/>
           <a:p>
             <a:r>
-              <a:rPr lang="fr-BE" b="0">
+              <a:rPr lang="en-US" b="0">
                 <a:solidFill>
                   <a:srgbClr val="996633"/>
                 </a:solidFill>
                 <a:latin typeface="Consolas" panose="020B0609020204030204" pitchFamily="49" charset="0"/>
               </a:rPr>
-              <a:t>/public/components/app.js</a:t>
-            </a:r>
+              <a:t>/app/view/home.php</a:t>
+            </a:r>
+            <a:endParaRPr lang="fr-BE" b="0">
+              <a:solidFill>
+                <a:srgbClr val="996633"/>
+              </a:solidFill>
+              <a:latin typeface="Consolas" panose="020B0609020204030204" pitchFamily="49" charset="0"/>
+            </a:endParaRPr>
           </a:p>
         </p:txBody>
       </p:sp>
@@ -24138,7 +24350,7 @@
           <p:cNvPr id="3" name="Espace réservé du contenu 2">
             <a:extLst>
               <a:ext uri="{FF2B5EF4-FFF2-40B4-BE49-F238E27FC236}">
-                <a16:creationId xmlns:a16="http://schemas.microsoft.com/office/drawing/2014/main" id="{5475D1FB-A3E6-70A9-97C2-4C55A8064E49}"/>
+                <a16:creationId xmlns:a16="http://schemas.microsoft.com/office/drawing/2014/main" id="{B68EC0BA-B4D5-3E9B-2CAE-4D4A334B925E}"/>
               </a:ext>
             </a:extLst>
           </p:cNvPr>
@@ -24156,7 +24368,7 @@
           <a:p>
             <a:r>
               <a:rPr lang="fr-BE"/>
-              <a:t>création de l'application </a:t>
+              <a:t>Déclaration de </a:t>
             </a:r>
             <a:r>
               <a:rPr lang="fr-BE">
@@ -24165,13 +24377,14 @@
                 </a:solidFill>
                 <a:latin typeface="Consolas" panose="020B0609020204030204" pitchFamily="49" charset="0"/>
               </a:rPr>
-              <a:t>Vue.js</a:t>
-            </a:r>
-          </a:p>
-          <a:p>
+              <a:t>vuejs_fetch_sample()</a:t>
+            </a:r>
+          </a:p>
+          <a:p>
+            <a:pPr lvl="1"/>
             <a:r>
               <a:rPr lang="fr-BE"/>
-              <a:t>inclusion du composant </a:t>
+              <a:t>composant </a:t>
             </a:r>
             <a:r>
               <a:rPr lang="fr-BE">
@@ -24182,24 +24395,6 @@
               </a:rPr>
               <a:t>Counter</a:t>
             </a:r>
-          </a:p>
-          <a:p>
-            <a:r>
-              <a:rPr lang="fr-BE"/>
-              <a:t>montage sur </a:t>
-            </a:r>
-            <a:r>
-              <a:rPr lang="fr-BE">
-                <a:solidFill>
-                  <a:srgbClr val="996633"/>
-                </a:solidFill>
-                <a:latin typeface="Consolas" panose="020B0609020204030204" pitchFamily="49" charset="0"/>
-              </a:rPr>
-              <a:t>section#vuejs_fetch_sample</a:t>
-            </a:r>
-          </a:p>
-          <a:p>
-            <a:endParaRPr lang="fr-BE"/>
           </a:p>
         </p:txBody>
       </p:sp>
@@ -24208,7 +24403,7 @@
           <p:cNvPr id="4" name="Espace réservé de la date 3">
             <a:extLst>
               <a:ext uri="{FF2B5EF4-FFF2-40B4-BE49-F238E27FC236}">
-                <a16:creationId xmlns:a16="http://schemas.microsoft.com/office/drawing/2014/main" id="{16734A9F-447D-E4B7-3ED0-85F7DECBEFB8}"/>
+                <a16:creationId xmlns:a16="http://schemas.microsoft.com/office/drawing/2014/main" id="{4AAA9EF7-F057-0996-E353-7280FD7F5226}"/>
               </a:ext>
             </a:extLst>
           </p:cNvPr>
@@ -24224,9 +24419,9 @@
           <a:bodyPr/>
           <a:lstStyle/>
           <a:p>
-            <a:fld id="{2140972F-57CB-443C-B641-8EBD15AC09D7}" type="datetime1">
+            <a:fld id="{A122A0FB-B2F5-4CDD-B3CD-9FB3D075AA52}" type="datetime1">
               <a:rPr lang="fr-BE" smtClean="0"/>
-              <a:t>23-02-26</a:t>
+              <a:t>02-03-26</a:t>
             </a:fld>
             <a:endParaRPr lang="fr-BE"/>
           </a:p>
@@ -24237,7 +24432,7 @@
           <p:cNvPr id="5" name="Espace réservé du numéro de diapositive 4">
             <a:extLst>
               <a:ext uri="{FF2B5EF4-FFF2-40B4-BE49-F238E27FC236}">
-                <a16:creationId xmlns:a16="http://schemas.microsoft.com/office/drawing/2014/main" id="{D31CDDC5-9576-A498-5176-BA532B26C27C}"/>
+                <a16:creationId xmlns:a16="http://schemas.microsoft.com/office/drawing/2014/main" id="{ED88CBAD-FE5D-E11A-3BD0-8BA04AD303A3}"/>
               </a:ext>
             </a:extLst>
           </p:cNvPr>
@@ -24264,7 +24459,7 @@
     </p:spTree>
     <p:extLst>
       <p:ext uri="{BB962C8B-B14F-4D97-AF65-F5344CB8AC3E}">
-        <p14:creationId xmlns:p14="http://schemas.microsoft.com/office/powerpoint/2010/main" val="3418025285"/>
+        <p14:creationId xmlns:p14="http://schemas.microsoft.com/office/powerpoint/2010/main" val="2725678107"/>
       </p:ext>
     </p:extLst>
   </p:cSld>
@@ -24291,13 +24486,7 @@
   <p:cSld>
     <p:spTree>
       <p:nvGrpSpPr>
-        <p:cNvPr id="1" name="">
-          <a:extLst>
-            <a:ext uri="{FF2B5EF4-FFF2-40B4-BE49-F238E27FC236}">
-              <a16:creationId xmlns:a16="http://schemas.microsoft.com/office/drawing/2014/main" id="{34E50043-747C-7DA9-2F60-E608AF55E8C7}"/>
-            </a:ext>
-          </a:extLst>
-        </p:cNvPr>
+        <p:cNvPr id="1" name=""/>
         <p:cNvGrpSpPr/>
         <p:nvPr/>
       </p:nvGrpSpPr>
@@ -24314,7 +24503,7 @@
           <p:cNvPr id="2" name="Titre 1">
             <a:extLst>
               <a:ext uri="{FF2B5EF4-FFF2-40B4-BE49-F238E27FC236}">
-                <a16:creationId xmlns:a16="http://schemas.microsoft.com/office/drawing/2014/main" id="{057EA503-553D-8568-1258-631E2342937A}"/>
+                <a16:creationId xmlns:a16="http://schemas.microsoft.com/office/drawing/2014/main" id="{ECCC4369-648B-3564-9BB3-A6F189FE7C83}"/>
               </a:ext>
             </a:extLst>
           </p:cNvPr>
@@ -24333,31 +24522,13 @@
           <a:lstStyle/>
           <a:p>
             <a:r>
-              <a:rPr lang="en-US" b="0">
+              <a:rPr lang="fr-BE" b="0">
                 <a:solidFill>
                   <a:srgbClr val="996633"/>
                 </a:solidFill>
                 <a:latin typeface="Consolas" panose="020B0609020204030204" pitchFamily="49" charset="0"/>
               </a:rPr>
-              <a:t>/public/</a:t>
-            </a:r>
-            <a:r>
-              <a:rPr lang="fr-BE" b="0">
-                <a:solidFill>
-                  <a:srgbClr val="996633"/>
-                </a:solidFill>
-                <a:latin typeface="Consolas" panose="020B0609020204030204" pitchFamily="49" charset="0"/>
-              </a:rPr>
-              <a:t>components</a:t>
-            </a:r>
-            <a:r>
-              <a:rPr lang="en-US" b="0">
-                <a:solidFill>
-                  <a:srgbClr val="996633"/>
-                </a:solidFill>
-                <a:latin typeface="Consolas" panose="020B0609020204030204" pitchFamily="49" charset="0"/>
-              </a:rPr>
-              <a:t>/counter.js</a:t>
+              <a:t>/public/components/app.js</a:t>
             </a:r>
           </a:p>
         </p:txBody>
@@ -24367,7 +24538,7 @@
           <p:cNvPr id="3" name="Espace réservé du contenu 2">
             <a:extLst>
               <a:ext uri="{FF2B5EF4-FFF2-40B4-BE49-F238E27FC236}">
-                <a16:creationId xmlns:a16="http://schemas.microsoft.com/office/drawing/2014/main" id="{7E441FC3-EAE6-3CB0-768F-CADFAB441F1D}"/>
+                <a16:creationId xmlns:a16="http://schemas.microsoft.com/office/drawing/2014/main" id="{5475D1FB-A3E6-70A9-97C2-4C55A8064E49}"/>
               </a:ext>
             </a:extLst>
           </p:cNvPr>
@@ -24380,30 +24551,42 @@
         </p:nvSpPr>
         <p:spPr/>
         <p:txBody>
-          <a:bodyPr>
-            <a:normAutofit fontScale="92500" lnSpcReduction="20000"/>
-          </a:bodyPr>
+          <a:bodyPr/>
           <a:lstStyle/>
           <a:p>
             <a:r>
+              <a:rPr lang="fr-BE"/>
+              <a:t>création de l'application </a:t>
+            </a:r>
+            <a:r>
               <a:rPr lang="fr-BE">
                 <a:solidFill>
                   <a:srgbClr val="996633"/>
                 </a:solidFill>
                 <a:latin typeface="Consolas" panose="020B0609020204030204" pitchFamily="49" charset="0"/>
               </a:rPr>
-              <a:t>template</a:t>
-            </a:r>
+              <a:t>Vue.js</a:t>
+            </a:r>
+          </a:p>
+          <a:p>
             <a:r>
               <a:rPr lang="fr-BE"/>
-              <a:t> </a:t>
-            </a:r>
-          </a:p>
-          <a:p>
-            <a:pPr lvl="1"/>
+              <a:t>inclusion du composant </a:t>
+            </a:r>
+            <a:r>
+              <a:rPr lang="fr-BE">
+                <a:solidFill>
+                  <a:srgbClr val="996633"/>
+                </a:solidFill>
+                <a:latin typeface="Consolas" panose="020B0609020204030204" pitchFamily="49" charset="0"/>
+              </a:rPr>
+              <a:t>Counter</a:t>
+            </a:r>
+          </a:p>
+          <a:p>
             <a:r>
               <a:rPr lang="fr-BE"/>
-              <a:t>bouton : évènement </a:t>
+              <a:t>montage sur </a:t>
             </a:r>
             <a:r>
               <a:rPr lang="fr-BE">
@@ -24412,126 +24595,7 @@
                 </a:solidFill>
                 <a:latin typeface="Consolas" panose="020B0609020204030204" pitchFamily="49" charset="0"/>
               </a:rPr>
-              <a:t>click</a:t>
-            </a:r>
-            <a:r>
-              <a:rPr lang="fr-BE"/>
-              <a:t> vers méthode </a:t>
-            </a:r>
-            <a:r>
-              <a:rPr lang="fr-BE">
-                <a:solidFill>
-                  <a:srgbClr val="996633"/>
-                </a:solidFill>
-                <a:latin typeface="Consolas" panose="020B0609020204030204" pitchFamily="49" charset="0"/>
-              </a:rPr>
-              <a:t>fetchCounter</a:t>
-            </a:r>
-          </a:p>
-          <a:p>
-            <a:pPr lvl="1"/>
-            <a:r>
-              <a:rPr lang="fr-BE"/>
-              <a:t>var </a:t>
-            </a:r>
-            <a:r>
-              <a:rPr lang="fr-BE">
-                <a:solidFill>
-                  <a:srgbClr val="996633"/>
-                </a:solidFill>
-                <a:latin typeface="Consolas" panose="020B0609020204030204" pitchFamily="49" charset="0"/>
-              </a:rPr>
-              <a:t>compteur_vuejs</a:t>
-            </a:r>
-            <a:endParaRPr lang="fr-BE"/>
-          </a:p>
-          <a:p>
-            <a:r>
-              <a:rPr lang="fr-BE">
-                <a:solidFill>
-                  <a:srgbClr val="996633"/>
-                </a:solidFill>
-                <a:latin typeface="Consolas" panose="020B0609020204030204" pitchFamily="49" charset="0"/>
-              </a:rPr>
-              <a:t>data</a:t>
-            </a:r>
-          </a:p>
-          <a:p>
-            <a:pPr lvl="1"/>
-            <a:r>
-              <a:rPr lang="fr-BE"/>
-              <a:t>initialisation de </a:t>
-            </a:r>
-            <a:r>
-              <a:rPr lang="fr-BE">
-                <a:solidFill>
-                  <a:srgbClr val="996633"/>
-                </a:solidFill>
-                <a:latin typeface="Consolas" panose="020B0609020204030204" pitchFamily="49" charset="0"/>
-              </a:rPr>
-              <a:t>compteur_vuejs</a:t>
-            </a:r>
-          </a:p>
-          <a:p>
-            <a:r>
-              <a:rPr lang="fr-BE">
-                <a:solidFill>
-                  <a:srgbClr val="996633"/>
-                </a:solidFill>
-                <a:latin typeface="Consolas" panose="020B0609020204030204" pitchFamily="49" charset="0"/>
-              </a:rPr>
-              <a:t>methods</a:t>
-            </a:r>
-          </a:p>
-          <a:p>
-            <a:pPr lvl="1"/>
-            <a:r>
-              <a:rPr lang="fr-BE">
-                <a:solidFill>
-                  <a:srgbClr val="996633"/>
-                </a:solidFill>
-                <a:latin typeface="Consolas" panose="020B0609020204030204" pitchFamily="49" charset="0"/>
-              </a:rPr>
-              <a:t>fetchCounter</a:t>
-            </a:r>
-            <a:r>
-              <a:rPr lang="fr-BE"/>
-              <a:t>, cf description en section précédente (</a:t>
-            </a:r>
-            <a:r>
-              <a:rPr lang="fr-BE">
-                <a:solidFill>
-                  <a:srgbClr val="996633"/>
-                </a:solidFill>
-                <a:latin typeface="Consolas" panose="020B0609020204030204" pitchFamily="49" charset="0"/>
-              </a:rPr>
-              <a:t>counter.js</a:t>
-            </a:r>
-            <a:r>
-              <a:rPr lang="fr-BE"/>
-              <a:t>)</a:t>
-            </a:r>
-          </a:p>
-          <a:p>
-            <a:r>
-              <a:rPr lang="fr-BE">
-                <a:solidFill>
-                  <a:srgbClr val="996633"/>
-                </a:solidFill>
-                <a:latin typeface="Consolas" panose="020B0609020204030204" pitchFamily="49" charset="0"/>
-              </a:rPr>
-              <a:t>mounted</a:t>
-            </a:r>
-            <a:r>
-              <a:rPr lang="fr-BE"/>
-              <a:t> </a:t>
-            </a:r>
-          </a:p>
-          <a:p>
-            <a:pPr lvl="1"/>
-            <a:r>
-              <a:rPr lang="fr-BE"/>
-              <a:t>pour initialiser le compteur au chargement de la page </a:t>
+              <a:t>section#vuejs_fetch_sample</a:t>
             </a:r>
           </a:p>
           <a:p>
@@ -24544,7 +24608,7 @@
           <p:cNvPr id="4" name="Espace réservé de la date 3">
             <a:extLst>
               <a:ext uri="{FF2B5EF4-FFF2-40B4-BE49-F238E27FC236}">
-                <a16:creationId xmlns:a16="http://schemas.microsoft.com/office/drawing/2014/main" id="{0492E905-86EF-4781-28C2-9144A786274A}"/>
+                <a16:creationId xmlns:a16="http://schemas.microsoft.com/office/drawing/2014/main" id="{16734A9F-447D-E4B7-3ED0-85F7DECBEFB8}"/>
               </a:ext>
             </a:extLst>
           </p:cNvPr>
@@ -24560,9 +24624,9 @@
           <a:bodyPr/>
           <a:lstStyle/>
           <a:p>
-            <a:fld id="{A122A0FB-B2F5-4CDD-B3CD-9FB3D075AA52}" type="datetime1">
+            <a:fld id="{2140972F-57CB-443C-B641-8EBD15AC09D7}" type="datetime1">
               <a:rPr lang="fr-BE" smtClean="0"/>
-              <a:t>23-02-26</a:t>
+              <a:t>02-03-26</a:t>
             </a:fld>
             <a:endParaRPr lang="fr-BE"/>
           </a:p>
@@ -24573,7 +24637,7 @@
           <p:cNvPr id="5" name="Espace réservé du numéro de diapositive 4">
             <a:extLst>
               <a:ext uri="{FF2B5EF4-FFF2-40B4-BE49-F238E27FC236}">
-                <a16:creationId xmlns:a16="http://schemas.microsoft.com/office/drawing/2014/main" id="{62BF7B26-DD60-0DBE-23CA-DD04777C71A7}"/>
+                <a16:creationId xmlns:a16="http://schemas.microsoft.com/office/drawing/2014/main" id="{D31CDDC5-9576-A498-5176-BA532B26C27C}"/>
               </a:ext>
             </a:extLst>
           </p:cNvPr>
@@ -24600,7 +24664,7 @@
     </p:spTree>
     <p:extLst>
       <p:ext uri="{BB962C8B-B14F-4D97-AF65-F5344CB8AC3E}">
-        <p14:creationId xmlns:p14="http://schemas.microsoft.com/office/powerpoint/2010/main" val="4144316152"/>
+        <p14:creationId xmlns:p14="http://schemas.microsoft.com/office/powerpoint/2010/main" val="3418025285"/>
       </p:ext>
     </p:extLst>
   </p:cSld>
@@ -24630,7 +24694,7 @@
         <p:cNvPr id="1" name="">
           <a:extLst>
             <a:ext uri="{FF2B5EF4-FFF2-40B4-BE49-F238E27FC236}">
-              <a16:creationId xmlns:a16="http://schemas.microsoft.com/office/drawing/2014/main" id="{86CA2058-D4B9-AD98-E1B8-9E982E603F76}"/>
+              <a16:creationId xmlns:a16="http://schemas.microsoft.com/office/drawing/2014/main" id="{34E50043-747C-7DA9-2F60-E608AF55E8C7}"/>
             </a:ext>
           </a:extLst>
         </p:cNvPr>
@@ -24650,7 +24714,7 @@
           <p:cNvPr id="2" name="Titre 1">
             <a:extLst>
               <a:ext uri="{FF2B5EF4-FFF2-40B4-BE49-F238E27FC236}">
-                <a16:creationId xmlns:a16="http://schemas.microsoft.com/office/drawing/2014/main" id="{0EE6E6F3-8EE8-4173-9CBF-F2F4AC6CAB02}"/>
+                <a16:creationId xmlns:a16="http://schemas.microsoft.com/office/drawing/2014/main" id="{057EA503-553D-8568-1258-631E2342937A}"/>
               </a:ext>
             </a:extLst>
           </p:cNvPr>
@@ -24663,12 +24727,37 @@
         </p:nvSpPr>
         <p:spPr/>
         <p:txBody>
-          <a:bodyPr/>
+          <a:bodyPr>
+            <a:normAutofit/>
+          </a:bodyPr>
           <a:lstStyle/>
           <a:p>
             <a:r>
-              <a:rPr lang="fr-BE"/>
-              <a:t>Exo : Ajouter des fonctionalités</a:t>
+              <a:rPr lang="en-US" b="0">
+                <a:solidFill>
+                  <a:srgbClr val="996633"/>
+                </a:solidFill>
+                <a:latin typeface="Consolas" panose="020B0609020204030204" pitchFamily="49" charset="0"/>
+              </a:rPr>
+              <a:t>/public/</a:t>
+            </a:r>
+            <a:r>
+              <a:rPr lang="fr-BE" b="0">
+                <a:solidFill>
+                  <a:srgbClr val="996633"/>
+                </a:solidFill>
+                <a:latin typeface="Consolas" panose="020B0609020204030204" pitchFamily="49" charset="0"/>
+              </a:rPr>
+              <a:t>components</a:t>
+            </a:r>
+            <a:r>
+              <a:rPr lang="en-US" b="0">
+                <a:solidFill>
+                  <a:srgbClr val="996633"/>
+                </a:solidFill>
+                <a:latin typeface="Consolas" panose="020B0609020204030204" pitchFamily="49" charset="0"/>
+              </a:rPr>
+              <a:t>/counter.js</a:t>
             </a:r>
           </a:p>
         </p:txBody>
@@ -24678,7 +24767,7 @@
           <p:cNvPr id="3" name="Espace réservé du contenu 2">
             <a:extLst>
               <a:ext uri="{FF2B5EF4-FFF2-40B4-BE49-F238E27FC236}">
-                <a16:creationId xmlns:a16="http://schemas.microsoft.com/office/drawing/2014/main" id="{C0932E22-2CB8-F5DB-2826-685BC7173A66}"/>
+                <a16:creationId xmlns:a16="http://schemas.microsoft.com/office/drawing/2014/main" id="{7E441FC3-EAE6-3CB0-768F-CADFAB441F1D}"/>
               </a:ext>
             </a:extLst>
           </p:cNvPr>
@@ -24691,25 +24780,162 @@
         </p:nvSpPr>
         <p:spPr/>
         <p:txBody>
-          <a:bodyPr/>
+          <a:bodyPr>
+            <a:normAutofit fontScale="92500" lnSpcReduction="20000"/>
+          </a:bodyPr>
           <a:lstStyle/>
           <a:p>
             <a:r>
+              <a:rPr lang="fr-BE">
+                <a:solidFill>
+                  <a:srgbClr val="996633"/>
+                </a:solidFill>
+                <a:latin typeface="Consolas" panose="020B0609020204030204" pitchFamily="49" charset="0"/>
+              </a:rPr>
+              <a:t>template</a:t>
+            </a:r>
+            <a:r>
               <a:rPr lang="fr-BE"/>
-              <a:t>Ajouter un bouton "decrement". </a:t>
-            </a:r>
-          </a:p>
-          <a:p>
+              <a:t> </a:t>
+            </a:r>
+          </a:p>
+          <a:p>
+            <a:pPr lvl="1"/>
             <a:r>
               <a:rPr lang="fr-BE"/>
-              <a:t>Ajouter un bouton "reset" qui initialise le compteur à 0.</a:t>
-            </a:r>
-          </a:p>
-          <a:p>
+              <a:t>bouton : évènement </a:t>
+            </a:r>
+            <a:r>
+              <a:rPr lang="fr-BE">
+                <a:solidFill>
+                  <a:srgbClr val="996633"/>
+                </a:solidFill>
+                <a:latin typeface="Consolas" panose="020B0609020204030204" pitchFamily="49" charset="0"/>
+              </a:rPr>
+              <a:t>click</a:t>
+            </a:r>
             <a:r>
               <a:rPr lang="fr-BE"/>
-              <a:t>Ajouter un bouton "reset to value" qui initialise le compteur à une valeur donnée en input field.</a:t>
-            </a:r>
+              <a:t> vers méthode </a:t>
+            </a:r>
+            <a:r>
+              <a:rPr lang="fr-BE">
+                <a:solidFill>
+                  <a:srgbClr val="996633"/>
+                </a:solidFill>
+                <a:latin typeface="Consolas" panose="020B0609020204030204" pitchFamily="49" charset="0"/>
+              </a:rPr>
+              <a:t>fetchCounter</a:t>
+            </a:r>
+          </a:p>
+          <a:p>
+            <a:pPr lvl="1"/>
+            <a:r>
+              <a:rPr lang="fr-BE"/>
+              <a:t>var </a:t>
+            </a:r>
+            <a:r>
+              <a:rPr lang="fr-BE">
+                <a:solidFill>
+                  <a:srgbClr val="996633"/>
+                </a:solidFill>
+                <a:latin typeface="Consolas" panose="020B0609020204030204" pitchFamily="49" charset="0"/>
+              </a:rPr>
+              <a:t>compteur_vuejs</a:t>
+            </a:r>
+            <a:endParaRPr lang="fr-BE"/>
+          </a:p>
+          <a:p>
+            <a:r>
+              <a:rPr lang="fr-BE">
+                <a:solidFill>
+                  <a:srgbClr val="996633"/>
+                </a:solidFill>
+                <a:latin typeface="Consolas" panose="020B0609020204030204" pitchFamily="49" charset="0"/>
+              </a:rPr>
+              <a:t>data</a:t>
+            </a:r>
+          </a:p>
+          <a:p>
+            <a:pPr lvl="1"/>
+            <a:r>
+              <a:rPr lang="fr-BE"/>
+              <a:t>initialisation de </a:t>
+            </a:r>
+            <a:r>
+              <a:rPr lang="fr-BE">
+                <a:solidFill>
+                  <a:srgbClr val="996633"/>
+                </a:solidFill>
+                <a:latin typeface="Consolas" panose="020B0609020204030204" pitchFamily="49" charset="0"/>
+              </a:rPr>
+              <a:t>compteur_vuejs</a:t>
+            </a:r>
+          </a:p>
+          <a:p>
+            <a:r>
+              <a:rPr lang="fr-BE">
+                <a:solidFill>
+                  <a:srgbClr val="996633"/>
+                </a:solidFill>
+                <a:latin typeface="Consolas" panose="020B0609020204030204" pitchFamily="49" charset="0"/>
+              </a:rPr>
+              <a:t>methods</a:t>
+            </a:r>
+          </a:p>
+          <a:p>
+            <a:pPr lvl="1"/>
+            <a:r>
+              <a:rPr lang="fr-BE">
+                <a:solidFill>
+                  <a:srgbClr val="996633"/>
+                </a:solidFill>
+                <a:latin typeface="Consolas" panose="020B0609020204030204" pitchFamily="49" charset="0"/>
+              </a:rPr>
+              <a:t>fetchCounter</a:t>
+            </a:r>
+            <a:r>
+              <a:rPr lang="fr-BE"/>
+              <a:t>, cf description en section précédente (</a:t>
+            </a:r>
+            <a:r>
+              <a:rPr lang="fr-BE">
+                <a:solidFill>
+                  <a:srgbClr val="996633"/>
+                </a:solidFill>
+                <a:latin typeface="Consolas" panose="020B0609020204030204" pitchFamily="49" charset="0"/>
+              </a:rPr>
+              <a:t>counter.js</a:t>
+            </a:r>
+            <a:r>
+              <a:rPr lang="fr-BE"/>
+              <a:t>)</a:t>
+            </a:r>
+          </a:p>
+          <a:p>
+            <a:r>
+              <a:rPr lang="fr-BE">
+                <a:solidFill>
+                  <a:srgbClr val="996633"/>
+                </a:solidFill>
+                <a:latin typeface="Consolas" panose="020B0609020204030204" pitchFamily="49" charset="0"/>
+              </a:rPr>
+              <a:t>mounted</a:t>
+            </a:r>
+            <a:r>
+              <a:rPr lang="fr-BE"/>
+              <a:t> </a:t>
+            </a:r>
+          </a:p>
+          <a:p>
+            <a:pPr lvl="1"/>
+            <a:r>
+              <a:rPr lang="fr-BE"/>
+              <a:t>pour initialiser le compteur au chargement de la page </a:t>
+            </a:r>
+          </a:p>
+          <a:p>
+            <a:endParaRPr lang="fr-BE"/>
           </a:p>
         </p:txBody>
       </p:sp>
@@ -24718,7 +24944,7 @@
           <p:cNvPr id="4" name="Espace réservé de la date 3">
             <a:extLst>
               <a:ext uri="{FF2B5EF4-FFF2-40B4-BE49-F238E27FC236}">
-                <a16:creationId xmlns:a16="http://schemas.microsoft.com/office/drawing/2014/main" id="{CE90EDDA-9DB2-F21E-E292-9B4F893853A0}"/>
+                <a16:creationId xmlns:a16="http://schemas.microsoft.com/office/drawing/2014/main" id="{0492E905-86EF-4781-28C2-9144A786274A}"/>
               </a:ext>
             </a:extLst>
           </p:cNvPr>
@@ -24734,9 +24960,9 @@
           <a:bodyPr/>
           <a:lstStyle/>
           <a:p>
-            <a:fld id="{37F37411-EAF2-495B-A447-CD3DFBFB071E}" type="datetime1">
+            <a:fld id="{A122A0FB-B2F5-4CDD-B3CD-9FB3D075AA52}" type="datetime1">
               <a:rPr lang="fr-BE" smtClean="0"/>
-              <a:t>23-02-26</a:t>
+              <a:t>02-03-26</a:t>
             </a:fld>
             <a:endParaRPr lang="fr-BE"/>
           </a:p>
@@ -24747,7 +24973,7 @@
           <p:cNvPr id="5" name="Espace réservé du numéro de diapositive 4">
             <a:extLst>
               <a:ext uri="{FF2B5EF4-FFF2-40B4-BE49-F238E27FC236}">
-                <a16:creationId xmlns:a16="http://schemas.microsoft.com/office/drawing/2014/main" id="{8EB8BD6B-FCF2-EEBE-FB04-036CA1D96F79}"/>
+                <a16:creationId xmlns:a16="http://schemas.microsoft.com/office/drawing/2014/main" id="{62BF7B26-DD60-0DBE-23CA-DD04777C71A7}"/>
               </a:ext>
             </a:extLst>
           </p:cNvPr>
@@ -24774,7 +25000,7 @@
     </p:spTree>
     <p:extLst>
       <p:ext uri="{BB962C8B-B14F-4D97-AF65-F5344CB8AC3E}">
-        <p14:creationId xmlns:p14="http://schemas.microsoft.com/office/powerpoint/2010/main" val="2305890552"/>
+        <p14:creationId xmlns:p14="http://schemas.microsoft.com/office/powerpoint/2010/main" val="4144316152"/>
       </p:ext>
     </p:extLst>
   </p:cSld>
@@ -25163,6 +25389,180 @@
 </file>
 
 <file path=ppt/slides/slide60.xml><?xml version="1.0" encoding="utf-8"?>
+<p:sld xmlns:a="http://schemas.openxmlformats.org/drawingml/2006/main" xmlns:r="http://schemas.openxmlformats.org/officeDocument/2006/relationships" xmlns:p="http://schemas.openxmlformats.org/presentationml/2006/main">
+  <p:cSld>
+    <p:spTree>
+      <p:nvGrpSpPr>
+        <p:cNvPr id="1" name="">
+          <a:extLst>
+            <a:ext uri="{FF2B5EF4-FFF2-40B4-BE49-F238E27FC236}">
+              <a16:creationId xmlns:a16="http://schemas.microsoft.com/office/drawing/2014/main" id="{86CA2058-D4B9-AD98-E1B8-9E982E603F76}"/>
+            </a:ext>
+          </a:extLst>
+        </p:cNvPr>
+        <p:cNvGrpSpPr/>
+        <p:nvPr/>
+      </p:nvGrpSpPr>
+      <p:grpSpPr>
+        <a:xfrm>
+          <a:off x="0" y="0"/>
+          <a:ext cx="0" cy="0"/>
+          <a:chOff x="0" y="0"/>
+          <a:chExt cx="0" cy="0"/>
+        </a:xfrm>
+      </p:grpSpPr>
+      <p:sp>
+        <p:nvSpPr>
+          <p:cNvPr id="2" name="Titre 1">
+            <a:extLst>
+              <a:ext uri="{FF2B5EF4-FFF2-40B4-BE49-F238E27FC236}">
+                <a16:creationId xmlns:a16="http://schemas.microsoft.com/office/drawing/2014/main" id="{0EE6E6F3-8EE8-4173-9CBF-F2F4AC6CAB02}"/>
+              </a:ext>
+            </a:extLst>
+          </p:cNvPr>
+          <p:cNvSpPr>
+            <a:spLocks noGrp="1"/>
+          </p:cNvSpPr>
+          <p:nvPr>
+            <p:ph type="title"/>
+          </p:nvPr>
+        </p:nvSpPr>
+        <p:spPr/>
+        <p:txBody>
+          <a:bodyPr/>
+          <a:lstStyle/>
+          <a:p>
+            <a:r>
+              <a:rPr lang="fr-BE"/>
+              <a:t>Exo : Ajouter des fonctionalités</a:t>
+            </a:r>
+          </a:p>
+        </p:txBody>
+      </p:sp>
+      <p:sp>
+        <p:nvSpPr>
+          <p:cNvPr id="3" name="Espace réservé du contenu 2">
+            <a:extLst>
+              <a:ext uri="{FF2B5EF4-FFF2-40B4-BE49-F238E27FC236}">
+                <a16:creationId xmlns:a16="http://schemas.microsoft.com/office/drawing/2014/main" id="{C0932E22-2CB8-F5DB-2826-685BC7173A66}"/>
+              </a:ext>
+            </a:extLst>
+          </p:cNvPr>
+          <p:cNvSpPr>
+            <a:spLocks noGrp="1"/>
+          </p:cNvSpPr>
+          <p:nvPr>
+            <p:ph idx="1"/>
+          </p:nvPr>
+        </p:nvSpPr>
+        <p:spPr/>
+        <p:txBody>
+          <a:bodyPr/>
+          <a:lstStyle/>
+          <a:p>
+            <a:r>
+              <a:rPr lang="fr-BE"/>
+              <a:t>Ajouter un bouton "decrement". </a:t>
+            </a:r>
+          </a:p>
+          <a:p>
+            <a:r>
+              <a:rPr lang="fr-BE"/>
+              <a:t>Ajouter un bouton "reset" qui initialise le compteur à 0.</a:t>
+            </a:r>
+          </a:p>
+          <a:p>
+            <a:r>
+              <a:rPr lang="fr-BE"/>
+              <a:t>Ajouter un bouton "reset to value" qui initialise le compteur à une valeur donnée en input field.</a:t>
+            </a:r>
+          </a:p>
+        </p:txBody>
+      </p:sp>
+      <p:sp>
+        <p:nvSpPr>
+          <p:cNvPr id="4" name="Espace réservé de la date 3">
+            <a:extLst>
+              <a:ext uri="{FF2B5EF4-FFF2-40B4-BE49-F238E27FC236}">
+                <a16:creationId xmlns:a16="http://schemas.microsoft.com/office/drawing/2014/main" id="{CE90EDDA-9DB2-F21E-E292-9B4F893853A0}"/>
+              </a:ext>
+            </a:extLst>
+          </p:cNvPr>
+          <p:cNvSpPr>
+            <a:spLocks noGrp="1"/>
+          </p:cNvSpPr>
+          <p:nvPr>
+            <p:ph type="dt" sz="half" idx="10"/>
+          </p:nvPr>
+        </p:nvSpPr>
+        <p:spPr/>
+        <p:txBody>
+          <a:bodyPr/>
+          <a:lstStyle/>
+          <a:p>
+            <a:fld id="{37F37411-EAF2-495B-A447-CD3DFBFB071E}" type="datetime1">
+              <a:rPr lang="fr-BE" smtClean="0"/>
+              <a:t>02-03-26</a:t>
+            </a:fld>
+            <a:endParaRPr lang="fr-BE"/>
+          </a:p>
+        </p:txBody>
+      </p:sp>
+      <p:sp>
+        <p:nvSpPr>
+          <p:cNvPr id="5" name="Espace réservé du numéro de diapositive 4">
+            <a:extLst>
+              <a:ext uri="{FF2B5EF4-FFF2-40B4-BE49-F238E27FC236}">
+                <a16:creationId xmlns:a16="http://schemas.microsoft.com/office/drawing/2014/main" id="{8EB8BD6B-FCF2-EEBE-FB04-036CA1D96F79}"/>
+              </a:ext>
+            </a:extLst>
+          </p:cNvPr>
+          <p:cNvSpPr>
+            <a:spLocks noGrp="1"/>
+          </p:cNvSpPr>
+          <p:nvPr>
+            <p:ph type="sldNum" sz="quarter" idx="12"/>
+          </p:nvPr>
+        </p:nvSpPr>
+        <p:spPr/>
+        <p:txBody>
+          <a:bodyPr/>
+          <a:lstStyle/>
+          <a:p>
+            <a:fld id="{02C092ED-0E97-497E-99D9-BB9DD7276F53}" type="slidenum">
+              <a:rPr lang="fr-BE" smtClean="0"/>
+              <a:t>60</a:t>
+            </a:fld>
+            <a:endParaRPr lang="fr-BE"/>
+          </a:p>
+        </p:txBody>
+      </p:sp>
+    </p:spTree>
+    <p:extLst>
+      <p:ext uri="{BB962C8B-B14F-4D97-AF65-F5344CB8AC3E}">
+        <p14:creationId xmlns:p14="http://schemas.microsoft.com/office/powerpoint/2010/main" val="2305890552"/>
+      </p:ext>
+    </p:extLst>
+  </p:cSld>
+  <p:clrMapOvr>
+    <a:masterClrMapping/>
+  </p:clrMapOvr>
+  <mc:AlternateContent xmlns:mc="http://schemas.openxmlformats.org/markup-compatibility/2006" xmlns:p14="http://schemas.microsoft.com/office/powerpoint/2010/main">
+    <mc:Choice Requires="p14">
+      <p:transition spd="slow">
+        <p14:reveal/>
+      </p:transition>
+    </mc:Choice>
+    <mc:Fallback xmlns="">
+      <p:transition spd="slow">
+        <p:fade/>
+      </p:transition>
+    </mc:Fallback>
+  </mc:AlternateContent>
+</p:sld>
+</file>
+
+<file path=ppt/slides/slide61.xml><?xml version="1.0" encoding="utf-8"?>
 <p:sld xmlns:a="http://schemas.openxmlformats.org/drawingml/2006/main" xmlns:r="http://schemas.openxmlformats.org/officeDocument/2006/relationships" xmlns:p="http://schemas.openxmlformats.org/presentationml/2006/main">
   <p:cSld>
     <p:spTree>

--- a/syllabus/27_requête_asynchrone/syllabus_27_async.pptx
+++ b/syllabus/27_requête_asynchrone/syllabus_27_async.pptx
@@ -6074,6 +6074,10 @@
             <a:br>
               <a:rPr lang="fr-BE" dirty="0"/>
             </a:br>
+            <a:r>
+              <a:rPr lang="fr-BE"/>
+              <a:t/>
+            </a:r>
             <a:br>
               <a:rPr lang="fr-BE"/>
             </a:br>
@@ -6194,12 +6198,19 @@
         <p14:reveal/>
       </p:transition>
     </mc:Choice>
-    <mc:Fallback xmlns="" xmlns:mv="urn:schemas-microsoft-com:mac:vml" xmlns:c="http://schemas.openxmlformats.org/drawingml/2006/chart" xmlns:dgm="http://schemas.openxmlformats.org/drawingml/2006/diagram" xmlns:o="urn:schemas-microsoft-com:office:office" xmlns:v="urn:schemas-microsoft-com:vml" xmlns:pvml="urn:schemas-microsoft-com:office:powerpoint" xmlns:com="http://schemas.openxmlformats.org/drawingml/2006/compatibility" xmlns:p15="http://schemas.microsoft.com/office/powerpoint/2012/main" xmlns:ahyp="http://schemas.microsoft.com/office/drawing/2018/hyperlinkcolor">
+    <mc:Fallback xmlns:ahyp="http://schemas.microsoft.com/office/drawing/2018/hyperlinkcolor" xmlns:p15="http://schemas.microsoft.com/office/powerpoint/2012/main" xmlns:com="http://schemas.openxmlformats.org/drawingml/2006/compatibility" xmlns:pvml="urn:schemas-microsoft-com:office:powerpoint" xmlns:v="urn:schemas-microsoft-com:vml" xmlns:o="urn:schemas-microsoft-com:office:office" xmlns:dgm="http://schemas.openxmlformats.org/drawingml/2006/diagram" xmlns:c="http://schemas.openxmlformats.org/drawingml/2006/chart" xmlns:mv="urn:schemas-microsoft-com:mac:vml" xmlns="">
       <p:transition spd="med">
         <p:fade/>
       </p:transition>
     </mc:Fallback>
   </mc:AlternateContent>
+  <p:timing>
+    <p:tnLst>
+      <p:par>
+        <p:cTn id="1" dur="indefinite" restart="never" nodeType="tmRoot"/>
+      </p:par>
+    </p:tnLst>
+  </p:timing>
 </p:sld>
 </file>
 
@@ -6543,6 +6554,13 @@
       </p:transition>
     </mc:Fallback>
   </mc:AlternateContent>
+  <p:timing>
+    <p:tnLst>
+      <p:par>
+        <p:cTn id="1" dur="indefinite" restart="never" nodeType="tmRoot"/>
+      </p:par>
+    </p:tnLst>
+  </p:timing>
 </p:sld>
 </file>
 
@@ -6814,6 +6832,13 @@
       </p:transition>
     </mc:Fallback>
   </mc:AlternateContent>
+  <p:timing>
+    <p:tnLst>
+      <p:par>
+        <p:cTn id="1" dur="indefinite" restart="never" nodeType="tmRoot"/>
+      </p:par>
+    </p:tnLst>
+  </p:timing>
 </p:sld>
 </file>
 
@@ -7144,6 +7169,13 @@
       </p:transition>
     </mc:Fallback>
   </mc:AlternateContent>
+  <p:timing>
+    <p:tnLst>
+      <p:par>
+        <p:cTn id="1" dur="indefinite" restart="never" nodeType="tmRoot"/>
+      </p:par>
+    </p:tnLst>
+  </p:timing>
 </p:sld>
 </file>
 
@@ -7239,7 +7271,7 @@
         <p:spPr/>
         <p:txBody>
           <a:bodyPr>
-            <a:normAutofit fontScale="62500" lnSpcReduction="20000"/>
+            <a:normAutofit fontScale="70000" lnSpcReduction="20000"/>
           </a:bodyPr>
           <a:lstStyle/>
           <a:p>
@@ -7542,6 +7574,13 @@
       </p:transition>
     </mc:Fallback>
   </mc:AlternateContent>
+  <p:timing>
+    <p:tnLst>
+      <p:par>
+        <p:cTn id="1" dur="indefinite" restart="never" nodeType="tmRoot"/>
+      </p:par>
+    </p:tnLst>
+  </p:timing>
 </p:sld>
 </file>
 
@@ -7744,6 +7783,13 @@
       </p:transition>
     </mc:Fallback>
   </mc:AlternateContent>
+  <p:timing>
+    <p:tnLst>
+      <p:par>
+        <p:cTn id="1" dur="indefinite" restart="never" nodeType="tmRoot"/>
+      </p:par>
+    </p:tnLst>
+  </p:timing>
 </p:sld>
 </file>
 
@@ -7931,6 +7977,13 @@
       </p:transition>
     </mc:Fallback>
   </mc:AlternateContent>
+  <p:timing>
+    <p:tnLst>
+      <p:par>
+        <p:cTn id="1" dur="indefinite" restart="never" nodeType="tmRoot"/>
+      </p:par>
+    </p:tnLst>
+  </p:timing>
 </p:sld>
 </file>
 
@@ -9350,6 +9403,15 @@
               </a:rPr>
               <a:t>param</a:t>
             </a:r>
+            <a:r>
+              <a:rPr lang="fr-BE" dirty="0">
+                <a:solidFill>
+                  <a:schemeClr val="accent5"/>
+                </a:solidFill>
+                <a:latin typeface="Consolas" panose="020B0609020204030204" pitchFamily="49" charset="0"/>
+              </a:rPr>
+              <a:t/>
+            </a:r>
             <a:br>
               <a:rPr lang="fr-BE" dirty="0">
                 <a:solidFill>
@@ -9882,12 +9944,19 @@
         <p14:reveal/>
       </p:transition>
     </mc:Choice>
-    <mc:Fallback xmlns:ahyp="http://schemas.microsoft.com/office/drawing/2018/hyperlinkcolor" xmlns:p15="http://schemas.microsoft.com/office/powerpoint/2012/main" xmlns:com="http://schemas.openxmlformats.org/drawingml/2006/compatibility" xmlns:pvml="urn:schemas-microsoft-com:office:powerpoint" xmlns:v="urn:schemas-microsoft-com:vml" xmlns:o="urn:schemas-microsoft-com:office:office" xmlns:dgm="http://schemas.openxmlformats.org/drawingml/2006/diagram" xmlns:c="http://schemas.openxmlformats.org/drawingml/2006/chart" xmlns:mv="urn:schemas-microsoft-com:mac:vml" xmlns="">
+    <mc:Fallback xmlns="" xmlns:mv="urn:schemas-microsoft-com:mac:vml" xmlns:c="http://schemas.openxmlformats.org/drawingml/2006/chart" xmlns:dgm="http://schemas.openxmlformats.org/drawingml/2006/diagram" xmlns:o="urn:schemas-microsoft-com:office:office" xmlns:v="urn:schemas-microsoft-com:vml" xmlns:pvml="urn:schemas-microsoft-com:office:powerpoint" xmlns:com="http://schemas.openxmlformats.org/drawingml/2006/compatibility" xmlns:p15="http://schemas.microsoft.com/office/powerpoint/2012/main" xmlns:ahyp="http://schemas.microsoft.com/office/drawing/2018/hyperlinkcolor">
       <p:transition spd="med">
         <p:fade/>
       </p:transition>
     </mc:Fallback>
   </mc:AlternateContent>
+  <p:timing>
+    <p:tnLst>
+      <p:par>
+        <p:cTn id="1" dur="indefinite" restart="never" nodeType="tmRoot"/>
+      </p:par>
+    </p:tnLst>
+  </p:timing>
 </p:sld>
 </file>
 
@@ -10675,7 +10744,7 @@
               </a:rPr>
               <a:t>"html" </a:t>
             </a:r>
-            <a:br>
+            <a:r>
               <a:rPr lang="fr-BE" dirty="0">
                 <a:solidFill>
                   <a:schemeClr val="accent1">
@@ -10684,8 +10753,9 @@
                 </a:solidFill>
                 <a:latin typeface="Consolas" panose="020B0609020204030204" pitchFamily="49" charset="0"/>
               </a:rPr>
-            </a:br>
-            <a:r>
+              <a:t/>
+            </a:r>
+            <a:br>
               <a:rPr lang="fr-BE" dirty="0">
                 <a:solidFill>
                   <a:schemeClr val="accent1">
@@ -10694,6 +10764,16 @@
                 </a:solidFill>
                 <a:latin typeface="Consolas" panose="020B0609020204030204" pitchFamily="49" charset="0"/>
               </a:rPr>
+            </a:br>
+            <a:r>
+              <a:rPr lang="fr-BE" dirty="0">
+                <a:solidFill>
+                  <a:schemeClr val="accent1">
+                    <a:lumMod val="75000"/>
+                  </a:schemeClr>
+                </a:solidFill>
+                <a:latin typeface="Consolas" panose="020B0609020204030204" pitchFamily="49" charset="0"/>
+              </a:rPr>
               <a:t>  </a:t>
             </a:r>
             <a:r>
@@ -10706,6 +10786,15 @@
                 <a:latin typeface="Consolas" panose="020B0609020204030204" pitchFamily="49" charset="0"/>
               </a:rPr>
               <a:t>);</a:t>
+            </a:r>
+            <a:r>
+              <a:rPr lang="fr-BE" dirty="0">
+                <a:solidFill>
+                  <a:schemeClr val="accent5"/>
+                </a:solidFill>
+                <a:latin typeface="Consolas" panose="020B0609020204030204" pitchFamily="49" charset="0"/>
+              </a:rPr>
+              <a:t/>
             </a:r>
             <a:br>
               <a:rPr lang="fr-BE" dirty="0">
@@ -12743,6 +12832,13 @@
       </p:transition>
     </mc:Fallback>
   </mc:AlternateContent>
+  <p:timing>
+    <p:tnLst>
+      <p:par>
+        <p:cTn id="1" dur="indefinite" restart="never" nodeType="tmRoot"/>
+      </p:par>
+    </p:tnLst>
+  </p:timing>
 </p:sld>
 </file>
 
@@ -15868,7 +15964,7 @@
                 <a:hlinkClick r:id="rId2">
                   <a:extLst>
                     <a:ext uri="{A12FA001-AC4F-418D-AE19-62706E023703}">
-                      <ahyp:hlinkClr xmlns:ahyp="http://schemas.microsoft.com/office/drawing/2018/hyperlinkcolor" val="tx"/>
+                      <ahyp:hlinkClr xmlns:ahyp="http://schemas.microsoft.com/office/drawing/2018/hyperlinkcolor" xmlns="" val="tx"/>
                     </a:ext>
                   </a:extLst>
                 </a:hlinkClick>
@@ -15921,7 +16017,7 @@
                 <a:hlinkClick r:id="rId3">
                   <a:extLst>
                     <a:ext uri="{A12FA001-AC4F-418D-AE19-62706E023703}">
-                      <ahyp:hlinkClr xmlns:ahyp="http://schemas.microsoft.com/office/drawing/2018/hyperlinkcolor" val="tx"/>
+                      <ahyp:hlinkClr xmlns:ahyp="http://schemas.microsoft.com/office/drawing/2018/hyperlinkcolor" xmlns="" val="tx"/>
                     </a:ext>
                   </a:extLst>
                 </a:hlinkClick>
@@ -15965,7 +16061,7 @@
                 <a:hlinkClick r:id="rId2">
                   <a:extLst>
                     <a:ext uri="{A12FA001-AC4F-418D-AE19-62706E023703}">
-                      <ahyp:hlinkClr xmlns:ahyp="http://schemas.microsoft.com/office/drawing/2018/hyperlinkcolor" val="tx"/>
+                      <ahyp:hlinkClr xmlns:ahyp="http://schemas.microsoft.com/office/drawing/2018/hyperlinkcolor" xmlns="" val="tx"/>
                     </a:ext>
                   </a:extLst>
                 </a:hlinkClick>
@@ -16128,6 +16224,13 @@
       </p:transition>
     </mc:Fallback>
   </mc:AlternateContent>
+  <p:timing>
+    <p:tnLst>
+      <p:par>
+        <p:cTn id="1" dur="indefinite" restart="never" nodeType="tmRoot"/>
+      </p:par>
+    </p:tnLst>
+  </p:timing>
 </p:sld>
 </file>
 
@@ -16315,6 +16418,13 @@
       </p:transition>
     </mc:Fallback>
   </mc:AlternateContent>
+  <p:timing>
+    <p:tnLst>
+      <p:par>
+        <p:cTn id="1" dur="indefinite" restart="never" nodeType="tmRoot"/>
+      </p:par>
+    </p:tnLst>
+  </p:timing>
 </p:sld>
 </file>
 
@@ -16538,6 +16648,13 @@
       </p:transition>
     </mc:Fallback>
   </mc:AlternateContent>
+  <p:timing>
+    <p:tnLst>
+      <p:par>
+        <p:cTn id="1" dur="indefinite" restart="never" nodeType="tmRoot"/>
+      </p:par>
+    </p:tnLst>
+  </p:timing>
 </p:sld>
 </file>
 
@@ -16738,6 +16855,13 @@
       </p:transition>
     </mc:Fallback>
   </mc:AlternateContent>
+  <p:timing>
+    <p:tnLst>
+      <p:par>
+        <p:cTn id="1" dur="indefinite" restart="never" nodeType="tmRoot"/>
+      </p:par>
+    </p:tnLst>
+  </p:timing>
 </p:sld>
 </file>
 
@@ -17471,6 +17595,15 @@
               </a:rPr>
               <a:t>	});</a:t>
             </a:r>
+            <a:r>
+              <a:rPr lang="fr-BE" sz="1800">
+                <a:solidFill>
+                  <a:srgbClr val="996633"/>
+                </a:solidFill>
+                <a:latin typeface="Consolas" panose="020B0609020204030204" pitchFamily="49" charset="0"/>
+              </a:rPr>
+              <a:t/>
+            </a:r>
             <a:br>
               <a:rPr lang="fr-BE" sz="1800">
                 <a:solidFill>
@@ -17633,6 +17766,13 @@
       </p:transition>
     </mc:Fallback>
   </mc:AlternateContent>
+  <p:timing>
+    <p:tnLst>
+      <p:par>
+        <p:cTn id="1" dur="indefinite" restart="never" nodeType="tmRoot"/>
+      </p:par>
+    </p:tnLst>
+  </p:timing>
 </p:sld>
 </file>
 
@@ -17853,6 +17993,13 @@
       </p:transition>
     </mc:Fallback>
   </mc:AlternateContent>
+  <p:timing>
+    <p:tnLst>
+      <p:par>
+        <p:cTn id="1" dur="indefinite" restart="never" nodeType="tmRoot"/>
+      </p:par>
+    </p:tnLst>
+  </p:timing>
 </p:sld>
 </file>
 
@@ -18615,6 +18762,13 @@
       </p:transition>
     </mc:Fallback>
   </mc:AlternateContent>
+  <p:timing>
+    <p:tnLst>
+      <p:par>
+        <p:cTn id="1" dur="indefinite" restart="never" nodeType="tmRoot"/>
+      </p:par>
+    </p:tnLst>
+  </p:timing>
 </p:sld>
 </file>
 
@@ -19242,6 +19396,15 @@
               </a:rPr>
               <a:t>	});</a:t>
             </a:r>
+            <a:r>
+              <a:rPr lang="fr-BE" sz="2000">
+                <a:solidFill>
+                  <a:srgbClr val="996633"/>
+                </a:solidFill>
+                <a:latin typeface="Consolas" panose="020B0609020204030204" pitchFamily="49" charset="0"/>
+              </a:rPr>
+              <a:t/>
+            </a:r>
             <a:br>
               <a:rPr lang="fr-BE" sz="2000">
                 <a:solidFill>
@@ -19398,6 +19561,13 @@
       </p:transition>
     </mc:Fallback>
   </mc:AlternateContent>
+  <p:timing>
+    <p:tnLst>
+      <p:par>
+        <p:cTn id="1" dur="indefinite" restart="never" nodeType="tmRoot"/>
+      </p:par>
+    </p:tnLst>
+  </p:timing>
 </p:sld>
 </file>
 
@@ -19576,6 +19746,13 @@
       </p:transition>
     </mc:Fallback>
   </mc:AlternateContent>
+  <p:timing>
+    <p:tnLst>
+      <p:par>
+        <p:cTn id="1" dur="indefinite" restart="never" nodeType="tmRoot"/>
+      </p:par>
+    </p:tnLst>
+  </p:timing>
 </p:sld>
 </file>
 
@@ -20023,18 +20200,25 @@
   <p:clrMapOvr>
     <a:masterClrMapping/>
   </p:clrMapOvr>
-  <mc:AlternateContent xmlns:mc="http://schemas.openxmlformats.org/markup-compatibility/2006">
-    <mc:Choice xmlns:p14="http://schemas.microsoft.com/office/powerpoint/2010/main" Requires="p14">
+  <mc:AlternateContent xmlns:mc="http://schemas.openxmlformats.org/markup-compatibility/2006" xmlns:p14="http://schemas.microsoft.com/office/powerpoint/2010/main">
+    <mc:Choice Requires="p14">
       <p:transition spd="slow">
         <p14:reveal/>
       </p:transition>
     </mc:Choice>
-    <mc:Fallback>
+    <mc:Fallback xmlns="">
       <p:transition spd="slow">
         <p:fade/>
       </p:transition>
     </mc:Fallback>
   </mc:AlternateContent>
+  <p:timing>
+    <p:tnLst>
+      <p:par>
+        <p:cTn id="1" dur="indefinite" restart="never" nodeType="tmRoot"/>
+      </p:par>
+    </p:tnLst>
+  </p:timing>
 </p:sld>
 </file>
 
@@ -20437,18 +20621,25 @@
   <p:clrMapOvr>
     <a:masterClrMapping/>
   </p:clrMapOvr>
-  <mc:AlternateContent xmlns:mc="http://schemas.openxmlformats.org/markup-compatibility/2006">
-    <mc:Choice xmlns:p14="http://schemas.microsoft.com/office/powerpoint/2010/main" Requires="p14">
+  <mc:AlternateContent xmlns:mc="http://schemas.openxmlformats.org/markup-compatibility/2006" xmlns:p14="http://schemas.microsoft.com/office/powerpoint/2010/main">
+    <mc:Choice Requires="p14">
       <p:transition spd="slow">
         <p14:reveal/>
       </p:transition>
     </mc:Choice>
-    <mc:Fallback>
+    <mc:Fallback xmlns="">
       <p:transition spd="slow">
         <p:fade/>
       </p:transition>
     </mc:Fallback>
   </mc:AlternateContent>
+  <p:timing>
+    <p:tnLst>
+      <p:par>
+        <p:cTn id="1" dur="indefinite" restart="never" nodeType="tmRoot"/>
+      </p:par>
+    </p:tnLst>
+  </p:timing>
 </p:sld>
 </file>
 
@@ -20652,6 +20843,13 @@
       </p:transition>
     </mc:Fallback>
   </mc:AlternateContent>
+  <p:timing>
+    <p:tnLst>
+      <p:par>
+        <p:cTn id="1" dur="indefinite" restart="never" nodeType="tmRoot"/>
+      </p:par>
+    </p:tnLst>
+  </p:timing>
 </p:sld>
 </file>
 
@@ -20865,6 +21063,13 @@
       </p:transition>
     </mc:Fallback>
   </mc:AlternateContent>
+  <p:timing>
+    <p:tnLst>
+      <p:par>
+        <p:cTn id="1" dur="indefinite" restart="never" nodeType="tmRoot"/>
+      </p:par>
+    </p:tnLst>
+  </p:timing>
 </p:sld>
 </file>
 
@@ -21139,6 +21344,13 @@
       </p:transition>
     </mc:Fallback>
   </mc:AlternateContent>
+  <p:timing>
+    <p:tnLst>
+      <p:par>
+        <p:cTn id="1" dur="indefinite" restart="never" nodeType="tmRoot"/>
+      </p:par>
+    </p:tnLst>
+  </p:timing>
 </p:sld>
 </file>
 
@@ -21308,6 +21520,13 @@
       </p:transition>
     </mc:Fallback>
   </mc:AlternateContent>
+  <p:timing>
+    <p:tnLst>
+      <p:par>
+        <p:cTn id="1" dur="indefinite" restart="never" nodeType="tmRoot"/>
+      </p:par>
+    </p:tnLst>
+  </p:timing>
 </p:sld>
 </file>
 
@@ -21493,6 +21712,13 @@
       </p:transition>
     </mc:Fallback>
   </mc:AlternateContent>
+  <p:timing>
+    <p:tnLst>
+      <p:par>
+        <p:cTn id="1" dur="indefinite" restart="never" nodeType="tmRoot"/>
+      </p:par>
+    </p:tnLst>
+  </p:timing>
 </p:sld>
 </file>
 
@@ -21656,6 +21882,15 @@
                 <a:latin typeface="Consolas" panose="020B0609020204030204" pitchFamily="49" charset="0"/>
               </a:rPr>
               <a:t>&lt;/head&gt;</a:t>
+            </a:r>
+            <a:r>
+              <a:rPr lang="fr-BE">
+                <a:solidFill>
+                  <a:srgbClr val="996633"/>
+                </a:solidFill>
+                <a:latin typeface="Consolas" panose="020B0609020204030204" pitchFamily="49" charset="0"/>
+              </a:rPr>
+              <a:t/>
             </a:r>
             <a:br>
               <a:rPr lang="fr-BE">
@@ -21757,6 +21992,13 @@
       </p:transition>
     </mc:Fallback>
   </mc:AlternateContent>
+  <p:timing>
+    <p:tnLst>
+      <p:par>
+        <p:cTn id="1" dur="indefinite" restart="never" nodeType="tmRoot"/>
+      </p:par>
+    </p:tnLst>
+  </p:timing>
 </p:sld>
 </file>
 
@@ -21961,6 +22203,13 @@
       </p:transition>
     </mc:Fallback>
   </mc:AlternateContent>
+  <p:timing>
+    <p:tnLst>
+      <p:par>
+        <p:cTn id="1" dur="indefinite" restart="never" nodeType="tmRoot"/>
+      </p:par>
+    </p:tnLst>
+  </p:timing>
 </p:sld>
 </file>
 
@@ -22190,6 +22439,13 @@
       </p:transition>
     </mc:Fallback>
   </mc:AlternateContent>
+  <p:timing>
+    <p:tnLst>
+      <p:par>
+        <p:cTn id="1" dur="indefinite" restart="never" nodeType="tmRoot"/>
+      </p:par>
+    </p:tnLst>
+  </p:timing>
 </p:sld>
 </file>
 
@@ -22451,6 +22707,13 @@
       </p:transition>
     </mc:Fallback>
   </mc:AlternateContent>
+  <p:timing>
+    <p:tnLst>
+      <p:par>
+        <p:cTn id="1" dur="indefinite" restart="never" nodeType="tmRoot"/>
+      </p:par>
+    </p:tnLst>
+  </p:timing>
 </p:sld>
 </file>
 
@@ -22539,39 +22802,65 @@
           <a:lstStyle/>
           <a:p>
             <a:r>
-              <a:rPr lang="fr-BE"/>
+              <a:rPr lang="fr-BE" dirty="0"/>
               <a:t>Déclaration de la fonction JS </a:t>
             </a:r>
             <a:r>
-              <a:rPr lang="fr-BE">
+              <a:rPr lang="fr-BE" dirty="0" err="1">
                 <a:solidFill>
                   <a:srgbClr val="996633"/>
                 </a:solidFill>
                 <a:latin typeface="Consolas" panose="020B0609020204030204" pitchFamily="49" charset="0"/>
               </a:rPr>
-              <a:t>getset_counter(action)</a:t>
+              <a:t>getset_counter</a:t>
+            </a:r>
+            <a:r>
+              <a:rPr lang="fr-BE" dirty="0">
+                <a:solidFill>
+                  <a:srgbClr val="996633"/>
+                </a:solidFill>
+                <a:latin typeface="Consolas" panose="020B0609020204030204" pitchFamily="49" charset="0"/>
+              </a:rPr>
+              <a:t>(action)</a:t>
             </a:r>
           </a:p>
           <a:p>
             <a:pPr lvl="1"/>
             <a:r>
-              <a:rPr lang="fr-BE">
+              <a:rPr lang="fr-BE" dirty="0" err="1">
                 <a:solidFill>
                   <a:srgbClr val="996633"/>
                 </a:solidFill>
                 <a:latin typeface="Consolas" panose="020B0609020204030204" pitchFamily="49" charset="0"/>
               </a:rPr>
-              <a:t>param </a:t>
+              <a:t>param</a:t>
+            </a:r>
+            <a:r>
+              <a:rPr lang="fr-BE" dirty="0">
+                <a:solidFill>
+                  <a:srgbClr val="996633"/>
+                </a:solidFill>
+                <a:latin typeface="Consolas" panose="020B0609020204030204" pitchFamily="49" charset="0"/>
+              </a:rPr>
+              <a:t> </a:t>
             </a:r>
           </a:p>
           <a:p>
             <a:pPr lvl="2"/>
             <a:r>
-              <a:rPr lang="fr-BE"/>
-              <a:t>contient e.a. : </a:t>
-            </a:r>
-            <a:r>
-              <a:rPr lang="fr-BE">
+              <a:rPr lang="fr-BE" dirty="0"/>
+              <a:t>contient </a:t>
+            </a:r>
+            <a:r>
+              <a:rPr lang="fr-BE" dirty="0" err="1"/>
+              <a:t>e.a</a:t>
+            </a:r>
+            <a:r>
+              <a:rPr lang="fr-BE" dirty="0"/>
+              <a:t>. : </a:t>
+            </a:r>
+            <a:r>
+              <a:rPr lang="fr-BE" dirty="0">
                 <a:solidFill>
                   <a:srgbClr val="996633"/>
                 </a:solidFill>
@@ -22580,7 +22869,7 @@
               <a:t>{</a:t>
             </a:r>
             <a:br>
-              <a:rPr lang="fr-BE">
+              <a:rPr lang="fr-BE" dirty="0">
                 <a:solidFill>
                   <a:srgbClr val="996633"/>
                 </a:solidFill>
@@ -22588,16 +22877,61 @@
               </a:rPr>
             </a:br>
             <a:r>
-              <a:rPr lang="fr-BE">
+              <a:rPr lang="fr-BE" dirty="0">
                 <a:solidFill>
                   <a:srgbClr val="996633"/>
                 </a:solidFill>
                 <a:latin typeface="Consolas" panose="020B0609020204030204" pitchFamily="49" charset="0"/>
               </a:rPr>
-              <a:t>    header : "application/json",</a:t>
+              <a:t>    </a:t>
+            </a:r>
+            <a:r>
+              <a:rPr lang="fr-BE" dirty="0" err="1" smtClean="0">
+                <a:solidFill>
+                  <a:srgbClr val="996633"/>
+                </a:solidFill>
+                <a:latin typeface="Consolas" panose="020B0609020204030204" pitchFamily="49" charset="0"/>
+              </a:rPr>
+              <a:t>returnType</a:t>
+            </a:r>
+            <a:r>
+              <a:rPr lang="fr-BE" dirty="0" smtClean="0">
+                <a:solidFill>
+                  <a:srgbClr val="996633"/>
+                </a:solidFill>
+                <a:latin typeface="Consolas" panose="020B0609020204030204" pitchFamily="49" charset="0"/>
+              </a:rPr>
+              <a:t> </a:t>
+            </a:r>
+            <a:r>
+              <a:rPr lang="fr-BE" dirty="0">
+                <a:solidFill>
+                  <a:srgbClr val="996633"/>
+                </a:solidFill>
+                <a:latin typeface="Consolas" panose="020B0609020204030204" pitchFamily="49" charset="0"/>
+              </a:rPr>
+              <a:t>: "application/</a:t>
+            </a:r>
+            <a:r>
+              <a:rPr lang="fr-BE" dirty="0" err="1">
+                <a:solidFill>
+                  <a:srgbClr val="996633"/>
+                </a:solidFill>
+                <a:latin typeface="Consolas" panose="020B0609020204030204" pitchFamily="49" charset="0"/>
+              </a:rPr>
+              <a:t>json</a:t>
+            </a:r>
+            <a:r>
+              <a:rPr lang="fr-BE" dirty="0">
+                <a:solidFill>
+                  <a:srgbClr val="996633"/>
+                </a:solidFill>
+                <a:latin typeface="Consolas" panose="020B0609020204030204" pitchFamily="49" charset="0"/>
+              </a:rPr>
+              <a:t>",</a:t>
             </a:r>
             <a:br>
-              <a:rPr lang="fr-BE">
+              <a:rPr lang="fr-BE" dirty="0">
                 <a:solidFill>
                   <a:srgbClr val="996633"/>
                 </a:solidFill>
@@ -22605,16 +22939,34 @@
               </a:rPr>
             </a:br>
             <a:r>
-              <a:rPr lang="fr-BE">
+              <a:rPr lang="fr-BE" dirty="0">
                 <a:solidFill>
                   <a:srgbClr val="996633"/>
                 </a:solidFill>
                 <a:latin typeface="Consolas" panose="020B0609020204030204" pitchFamily="49" charset="0"/>
               </a:rPr>
-              <a:t>    page : "counter_fetch",</a:t>
+              <a:t>    page : "</a:t>
+            </a:r>
+            <a:r>
+              <a:rPr lang="fr-BE" dirty="0" err="1">
+                <a:solidFill>
+                  <a:srgbClr val="996633"/>
+                </a:solidFill>
+                <a:latin typeface="Consolas" panose="020B0609020204030204" pitchFamily="49" charset="0"/>
+              </a:rPr>
+              <a:t>counter_fetch</a:t>
+            </a:r>
+            <a:r>
+              <a:rPr lang="fr-BE" dirty="0">
+                <a:solidFill>
+                  <a:srgbClr val="996633"/>
+                </a:solidFill>
+                <a:latin typeface="Consolas" panose="020B0609020204030204" pitchFamily="49" charset="0"/>
+              </a:rPr>
+              <a:t>",</a:t>
             </a:r>
             <a:br>
-              <a:rPr lang="fr-BE">
+              <a:rPr lang="fr-BE" dirty="0">
                 <a:solidFill>
                   <a:srgbClr val="996633"/>
                 </a:solidFill>
@@ -22622,7 +22974,7 @@
               </a:rPr>
             </a:br>
             <a:r>
-              <a:rPr lang="fr-BE">
+              <a:rPr lang="fr-BE" dirty="0">
                 <a:solidFill>
                   <a:srgbClr val="996633"/>
                 </a:solidFill>
@@ -22634,14 +22986,14 @@
           <a:p>
             <a:pPr lvl="2"/>
             <a:r>
-              <a:rPr lang="fr-BE"/>
+              <a:rPr lang="fr-BE" dirty="0"/>
               <a:t>aiguillage de la requête sur le serveur </a:t>
             </a:r>
           </a:p>
           <a:p>
             <a:pPr lvl="1"/>
             <a:r>
-              <a:rPr lang="fr-BE">
+              <a:rPr lang="fr-BE" dirty="0" err="1">
                 <a:solidFill>
                   <a:srgbClr val="996633"/>
                 </a:solidFill>
@@ -22649,15 +23001,21 @@
               </a:rPr>
               <a:t>fetch</a:t>
             </a:r>
+            <a:endParaRPr lang="fr-BE" dirty="0">
+              <a:solidFill>
+                <a:srgbClr val="996633"/>
+              </a:solidFill>
+              <a:latin typeface="Consolas" panose="020B0609020204030204" pitchFamily="49" charset="0"/>
+            </a:endParaRPr>
           </a:p>
           <a:p>
             <a:pPr lvl="2"/>
             <a:r>
-              <a:rPr lang="fr-BE"/>
+              <a:rPr lang="fr-BE" dirty="0"/>
               <a:t>URL : </a:t>
             </a:r>
             <a:r>
-              <a:rPr lang="fr-BE">
+              <a:rPr lang="fr-BE" dirty="0" err="1">
                 <a:solidFill>
                   <a:srgbClr val="996633"/>
                 </a:solidFill>
@@ -22666,18 +23024,34 @@
               <a:t>window.location.pathname</a:t>
             </a:r>
             <a:r>
-              <a:rPr lang="fr-BE"/>
-              <a:t>, càd le path courant</a:t>
+              <a:rPr lang="fr-BE" dirty="0"/>
+              <a:t>, </a:t>
+            </a:r>
+            <a:r>
+              <a:rPr lang="fr-BE" dirty="0" err="1"/>
+              <a:t>càd</a:t>
+            </a:r>
+            <a:r>
+              <a:rPr lang="fr-BE" dirty="0"/>
+              <a:t> le </a:t>
+            </a:r>
+            <a:r>
+              <a:rPr lang="fr-BE" dirty="0" err="1"/>
+              <a:t>path</a:t>
+            </a:r>
+            <a:r>
+              <a:rPr lang="fr-BE" dirty="0"/>
+              <a:t> courant</a:t>
             </a:r>
           </a:p>
           <a:p>
             <a:pPr lvl="2"/>
             <a:r>
-              <a:rPr lang="fr-BE"/>
+              <a:rPr lang="fr-BE" dirty="0"/>
               <a:t>envoie </a:t>
             </a:r>
             <a:r>
-              <a:rPr lang="fr-BE">
+              <a:rPr lang="fr-BE" dirty="0" err="1">
                 <a:solidFill>
                   <a:srgbClr val="996633"/>
                 </a:solidFill>
@@ -22685,15 +23059,21 @@
               </a:rPr>
               <a:t>param</a:t>
             </a:r>
+            <a:endParaRPr lang="fr-BE" dirty="0">
+              <a:solidFill>
+                <a:srgbClr val="996633"/>
+              </a:solidFill>
+              <a:latin typeface="Consolas" panose="020B0609020204030204" pitchFamily="49" charset="0"/>
+            </a:endParaRPr>
           </a:p>
           <a:p>
             <a:pPr lvl="2"/>
             <a:r>
-              <a:rPr lang="fr-BE"/>
+              <a:rPr lang="fr-BE" dirty="0"/>
               <a:t>reçoit du </a:t>
             </a:r>
             <a:r>
-              <a:rPr lang="fr-BE">
+              <a:rPr lang="fr-BE" dirty="0">
                 <a:solidFill>
                   <a:srgbClr val="996633"/>
                 </a:solidFill>
@@ -22702,18 +23082,18 @@
               <a:t>JSON</a:t>
             </a:r>
             <a:r>
-              <a:rPr lang="fr-BE"/>
+              <a:rPr lang="fr-BE" dirty="0"/>
               <a:t> en retour</a:t>
             </a:r>
           </a:p>
           <a:p>
             <a:pPr lvl="2"/>
             <a:r>
-              <a:rPr lang="fr-BE"/>
+              <a:rPr lang="fr-BE" dirty="0"/>
               <a:t>valide le </a:t>
             </a:r>
             <a:r>
-              <a:rPr lang="fr-BE">
+              <a:rPr lang="fr-BE" dirty="0">
                 <a:solidFill>
                   <a:srgbClr val="996633"/>
                 </a:solidFill>
@@ -22725,11 +23105,11 @@
           <a:p>
             <a:pPr lvl="2"/>
             <a:r>
-              <a:rPr lang="fr-BE"/>
+              <a:rPr lang="fr-BE" dirty="0"/>
               <a:t>traite le </a:t>
             </a:r>
             <a:r>
-              <a:rPr lang="fr-BE">
+              <a:rPr lang="fr-BE" dirty="0">
                 <a:solidFill>
                   <a:srgbClr val="996633"/>
                 </a:solidFill>
@@ -22738,15 +23118,15 @@
               <a:t>JSON</a:t>
             </a:r>
             <a:r>
-              <a:rPr lang="fr-BE"/>
+              <a:rPr lang="fr-BE" dirty="0"/>
               <a:t> : affichage de la nouvelle valeur du compteur</a:t>
             </a:r>
           </a:p>
           <a:p>
-            <a:endParaRPr lang="fr-BE"/>
-          </a:p>
-          <a:p>
-            <a:endParaRPr lang="fr-BE"/>
+            <a:endParaRPr lang="fr-BE" dirty="0"/>
+          </a:p>
+          <a:p>
+            <a:endParaRPr lang="fr-BE" dirty="0"/>
           </a:p>
         </p:txBody>
       </p:sp>
@@ -22830,6 +23210,13 @@
       </p:transition>
     </mc:Fallback>
   </mc:AlternateContent>
+  <p:timing>
+    <p:tnLst>
+      <p:par>
+        <p:cTn id="1" dur="indefinite" restart="never" nodeType="tmRoot"/>
+      </p:par>
+    </p:tnLst>
+  </p:timing>
 </p:sld>
 </file>
 
@@ -23099,6 +23486,13 @@
       </p:transition>
     </mc:Fallback>
   </mc:AlternateContent>
+  <p:timing>
+    <p:tnLst>
+      <p:par>
+        <p:cTn id="1" dur="indefinite" restart="never" nodeType="tmRoot"/>
+      </p:par>
+    </p:tnLst>
+  </p:timing>
 </p:sld>
 </file>
 
@@ -23267,6 +23661,13 @@
       </p:transition>
     </mc:Fallback>
   </mc:AlternateContent>
+  <p:timing>
+    <p:tnLst>
+      <p:par>
+        <p:cTn id="1" dur="indefinite" restart="never" nodeType="tmRoot"/>
+      </p:par>
+    </p:tnLst>
+  </p:timing>
 </p:sld>
 </file>
 
@@ -23513,6 +23914,13 @@
       </p:transition>
     </mc:Fallback>
   </mc:AlternateContent>
+  <p:timing>
+    <p:tnLst>
+      <p:par>
+        <p:cTn id="1" dur="indefinite" restart="never" nodeType="tmRoot"/>
+      </p:par>
+    </p:tnLst>
+  </p:timing>
 </p:sld>
 </file>
 
@@ -23757,6 +24165,13 @@
       </p:transition>
     </mc:Fallback>
   </mc:AlternateContent>
+  <p:timing>
+    <p:tnLst>
+      <p:par>
+        <p:cTn id="1" dur="indefinite" restart="never" nodeType="tmRoot"/>
+      </p:par>
+    </p:tnLst>
+  </p:timing>
 </p:sld>
 </file>
 
@@ -23942,6 +24357,13 @@
       </p:transition>
     </mc:Fallback>
   </mc:AlternateContent>
+  <p:timing>
+    <p:tnLst>
+      <p:par>
+        <p:cTn id="1" dur="indefinite" restart="never" nodeType="tmRoot"/>
+      </p:par>
+    </p:tnLst>
+  </p:timing>
 </p:sld>
 </file>
 
@@ -24180,6 +24602,15 @@
               </a:rPr>
               <a:t>&lt;/head&gt;</a:t>
             </a:r>
+            <a:r>
+              <a:rPr lang="fr-BE">
+                <a:solidFill>
+                  <a:srgbClr val="996633"/>
+                </a:solidFill>
+                <a:latin typeface="Consolas" panose="020B0609020204030204" pitchFamily="49" charset="0"/>
+              </a:rPr>
+              <a:t/>
+            </a:r>
             <a:br>
               <a:rPr lang="fr-BE">
                 <a:solidFill>
@@ -24280,6 +24711,13 @@
       </p:transition>
     </mc:Fallback>
   </mc:AlternateContent>
+  <p:timing>
+    <p:tnLst>
+      <p:par>
+        <p:cTn id="1" dur="indefinite" restart="never" nodeType="tmRoot"/>
+      </p:par>
+    </p:tnLst>
+  </p:timing>
 </p:sld>
 </file>
 
@@ -24478,6 +24916,13 @@
       </p:transition>
     </mc:Fallback>
   </mc:AlternateContent>
+  <p:timing>
+    <p:tnLst>
+      <p:par>
+        <p:cTn id="1" dur="indefinite" restart="never" nodeType="tmRoot"/>
+      </p:par>
+    </p:tnLst>
+  </p:timing>
 </p:sld>
 </file>
 
@@ -24683,6 +25128,13 @@
       </p:transition>
     </mc:Fallback>
   </mc:AlternateContent>
+  <p:timing>
+    <p:tnLst>
+      <p:par>
+        <p:cTn id="1" dur="indefinite" restart="never" nodeType="tmRoot"/>
+      </p:par>
+    </p:tnLst>
+  </p:timing>
 </p:sld>
 </file>
 
@@ -25019,6 +25471,13 @@
       </p:transition>
     </mc:Fallback>
   </mc:AlternateContent>
+  <p:timing>
+    <p:tnLst>
+      <p:par>
+        <p:cTn id="1" dur="indefinite" restart="never" nodeType="tmRoot"/>
+      </p:par>
+    </p:tnLst>
+  </p:timing>
 </p:sld>
 </file>
 
@@ -25211,6 +25670,17 @@
               </a:rPr>
               <a:t>$.ajax()</a:t>
             </a:r>
+            <a:r>
+              <a:rPr lang="fr-BE" sz="2800">
+                <a:solidFill>
+                  <a:schemeClr val="accent6">
+                    <a:lumMod val="50000"/>
+                  </a:schemeClr>
+                </a:solidFill>
+                <a:latin typeface="Consolas" panose="020B0609020204030204" pitchFamily="49" charset="0"/>
+              </a:rPr>
+              <a:t/>
+            </a:r>
             <a:br>
               <a:rPr lang="fr-BE" sz="2800">
                 <a:solidFill>
@@ -25385,6 +25855,13 @@
       </p:transition>
     </mc:Fallback>
   </mc:AlternateContent>
+  <p:timing>
+    <p:tnLst>
+      <p:par>
+        <p:cTn id="1" dur="indefinite" restart="never" nodeType="tmRoot"/>
+      </p:par>
+    </p:tnLst>
+  </p:timing>
 </p:sld>
 </file>
 
@@ -25461,20 +25938,36 @@
           <a:lstStyle/>
           <a:p>
             <a:r>
-              <a:rPr lang="fr-BE"/>
-              <a:t>Ajouter un bouton "decrement". </a:t>
-            </a:r>
-          </a:p>
-          <a:p>
-            <a:r>
-              <a:rPr lang="fr-BE"/>
+              <a:rPr lang="fr-BE" dirty="0"/>
+              <a:t>Ajouter un bouton "</a:t>
+            </a:r>
+            <a:r>
+              <a:rPr lang="fr-BE" dirty="0" err="1"/>
+              <a:t>decrement</a:t>
+            </a:r>
+            <a:r>
+              <a:rPr lang="fr-BE" dirty="0"/>
+              <a:t>". </a:t>
+            </a:r>
+          </a:p>
+          <a:p>
+            <a:r>
+              <a:rPr lang="fr-BE" dirty="0"/>
               <a:t>Ajouter un bouton "reset" qui initialise le compteur à 0.</a:t>
             </a:r>
           </a:p>
           <a:p>
             <a:r>
-              <a:rPr lang="fr-BE"/>
-              <a:t>Ajouter un bouton "reset to value" qui initialise le compteur à une valeur donnée en input field.</a:t>
+              <a:rPr lang="fr-BE" dirty="0"/>
+              <a:t>Ajouter un bouton "reset to value" qui initialise le compteur à une valeur donnée en input </a:t>
+            </a:r>
+            <a:r>
+              <a:rPr lang="fr-BE" dirty="0" err="1"/>
+              <a:t>field</a:t>
+            </a:r>
+            <a:r>
+              <a:rPr lang="fr-BE" dirty="0"/>
+              <a:t>.</a:t>
             </a:r>
           </a:p>
         </p:txBody>
@@ -25559,6 +26052,13 @@
       </p:transition>
     </mc:Fallback>
   </mc:AlternateContent>
+  <p:timing>
+    <p:tnLst>
+      <p:par>
+        <p:cTn id="1" dur="indefinite" restart="never" nodeType="tmRoot"/>
+      </p:par>
+    </p:tnLst>
+  </p:timing>
 </p:sld>
 </file>
 
@@ -25608,6 +26108,10 @@
             <a:br>
               <a:rPr lang="fr-BE" dirty="0"/>
             </a:br>
+            <a:r>
+              <a:rPr lang="fr-BE" dirty="0"/>
+              <a:t/>
+            </a:r>
             <a:br>
               <a:rPr lang="fr-BE" dirty="0"/>
             </a:br>
@@ -25723,6 +26227,13 @@
       </p:transition>
     </mc:Fallback>
   </mc:AlternateContent>
+  <p:timing>
+    <p:tnLst>
+      <p:par>
+        <p:cTn id="1" dur="indefinite" restart="never" nodeType="tmRoot"/>
+      </p:par>
+    </p:tnLst>
+  </p:timing>
 </p:sld>
 </file>
 
@@ -25795,7 +26306,7 @@
                 <a14:useLocalDpi xmlns:a14="http://schemas.microsoft.com/office/drawing/2010/main" val="0"/>
               </a:ext>
               <a:ext uri="{96DAC541-7B7A-43D3-8B79-37D633B846F1}">
-                <asvg:svgBlip xmlns:asvg="http://schemas.microsoft.com/office/drawing/2016/SVG/main" r:embed="rId3"/>
+                <asvg:svgBlip xmlns:asvg="http://schemas.microsoft.com/office/drawing/2016/SVG/main" xmlns="" r:embed="rId3"/>
               </a:ext>
             </a:extLst>
           </a:blip>
@@ -25973,6 +26484,13 @@
       </p:transition>
     </mc:Fallback>
   </mc:AlternateContent>
+  <p:timing>
+    <p:tnLst>
+      <p:par>
+        <p:cTn id="1" dur="indefinite" restart="never" nodeType="tmRoot"/>
+      </p:par>
+    </p:tnLst>
+  </p:timing>
 </p:sld>
 </file>
 
@@ -26105,6 +26623,13 @@
       </p:transition>
     </mc:Fallback>
   </mc:AlternateContent>
+  <p:timing>
+    <p:tnLst>
+      <p:par>
+        <p:cTn id="1" dur="indefinite" restart="never" nodeType="tmRoot"/>
+      </p:par>
+    </p:tnLst>
+  </p:timing>
 </p:sld>
 </file>
 
@@ -26276,6 +26801,13 @@
       </p:transition>
     </mc:Fallback>
   </mc:AlternateContent>
+  <p:timing>
+    <p:tnLst>
+      <p:par>
+        <p:cTn id="1" dur="indefinite" restart="never" nodeType="tmRoot"/>
+      </p:par>
+    </p:tnLst>
+  </p:timing>
 </p:sld>
 </file>
 
